--- a/Final_Project.pptx
+++ b/Final_Project.pptx
@@ -5,16 +5,23 @@
     <p:sldMasterId id="2147483648" r:id="rId1"/>
   </p:sldMasterIdLst>
   <p:notesMasterIdLst>
-    <p:notesMasterId r:id="rId7"/>
+    <p:notesMasterId r:id="rId14"/>
   </p:notesMasterIdLst>
   <p:handoutMasterIdLst>
-    <p:handoutMasterId r:id="rId8"/>
+    <p:handoutMasterId r:id="rId15"/>
   </p:handoutMasterIdLst>
   <p:sldIdLst>
     <p:sldId id="256" r:id="rId3"/>
     <p:sldId id="299" r:id="rId4"/>
     <p:sldId id="305" r:id="rId5"/>
-    <p:sldId id="285" r:id="rId6"/>
+    <p:sldId id="306" r:id="rId6"/>
+    <p:sldId id="307" r:id="rId7"/>
+    <p:sldId id="308" r:id="rId8"/>
+    <p:sldId id="309" r:id="rId9"/>
+    <p:sldId id="311" r:id="rId10"/>
+    <p:sldId id="312" r:id="rId11"/>
+    <p:sldId id="313" r:id="rId12"/>
+    <p:sldId id="285" r:id="rId13"/>
   </p:sldIdLst>
   <p:sldSz cx="12192000" cy="6858000"/>
   <p:notesSz cx="9144000" cy="6858000"/>
@@ -220,7 +227,7 @@
             <a:srgbClr val="A4A3A4"/>
           </p15:clr>
         </p15:guide>
-        <p15:guide id="2" pos="3864" userDrawn="1">
+        <p15:guide id="2" pos="3840" userDrawn="1">
           <p15:clr>
             <a:srgbClr val="A4A3A4"/>
           </p15:clr>
@@ -2258,7 +2265,7 @@
 </p:sld>
 </file>
 
-<file path=ppt/slides/slide2.xml><?xml version="1.0" encoding="utf-8"?>
+<file path=ppt/slides/slide10.xml><?xml version="1.0" encoding="utf-8"?>
 <p:sld xmlns:a="http://schemas.openxmlformats.org/drawingml/2006/main" xmlns:r="http://schemas.openxmlformats.org/officeDocument/2006/relationships" xmlns:p="http://schemas.openxmlformats.org/presentationml/2006/main">
   <p:cSld>
     <p:spTree>
@@ -2299,14 +2306,14 @@
       </p:pic>
       <p:sp>
         <p:nvSpPr>
-          <p:cNvPr id="10250" name="文本框 28"/>
-          <p:cNvSpPr txBox="1"/>
+          <p:cNvPr id="10255" name="矩形 8"/>
+          <p:cNvSpPr/>
           <p:nvPr/>
         </p:nvSpPr>
         <p:spPr>
           <a:xfrm>
-            <a:off x="3861435" y="732790"/>
-            <a:ext cx="2234565" cy="645160"/>
+            <a:off x="96520" y="1200150"/>
+            <a:ext cx="8086090" cy="1533525"/>
           </a:xfrm>
           <a:prstGeom prst="rect">
             <a:avLst/>
@@ -2317,545 +2324,8 @@
           </a:ln>
         </p:spPr>
         <p:txBody>
-          <a:bodyPr wrap="square" anchor="t">
-            <a:spAutoFit/>
-          </a:bodyPr>
-          <a:p>
-            <a:pPr>
-              <a:buFont typeface="Arial" panose="020B0604020202090204" pitchFamily="34" charset="0"/>
-            </a:pPr>
-            <a:r>
-              <a:rPr lang="en-US" altLang="en-US" sz="3600" b="1" dirty="0">
-                <a:solidFill>
-                  <a:srgbClr val="404040"/>
-                </a:solidFill>
-                <a:ea typeface="Calibri" panose="020F0502020204030204" pitchFamily="34" charset="0"/>
-              </a:rPr>
-              <a:t>Sections</a:t>
-            </a:r>
-            <a:endParaRPr lang="en-US" altLang="en-US" sz="3600" b="1" dirty="0">
-              <a:solidFill>
-                <a:srgbClr val="404040"/>
-              </a:solidFill>
-              <a:ea typeface="Calibri" panose="020F0502020204030204" pitchFamily="34" charset="0"/>
-            </a:endParaRPr>
-          </a:p>
-        </p:txBody>
-      </p:sp>
-      <p:sp>
-        <p:nvSpPr>
-          <p:cNvPr id="12" name="矩形 11"/>
-          <p:cNvSpPr/>
-          <p:nvPr/>
-        </p:nvSpPr>
-        <p:spPr>
-          <a:xfrm>
-            <a:off x="828675" y="1729105"/>
-            <a:ext cx="10515600" cy="4653280"/>
-          </a:xfrm>
-          <a:prstGeom prst="rect">
-            <a:avLst/>
-          </a:prstGeom>
-          <a:noFill/>
-          <a:ln>
-            <a:solidFill>
-              <a:schemeClr val="tx1"/>
-            </a:solidFill>
-          </a:ln>
-        </p:spPr>
-        <p:style>
-          <a:lnRef idx="2">
-            <a:schemeClr val="accent1">
-              <a:shade val="50000"/>
-            </a:schemeClr>
-          </a:lnRef>
-          <a:fillRef idx="1">
-            <a:schemeClr val="accent1"/>
-          </a:fillRef>
-          <a:effectRef idx="0">
-            <a:schemeClr val="accent1"/>
-          </a:effectRef>
-          <a:fontRef idx="minor">
-            <a:schemeClr val="lt1"/>
-          </a:fontRef>
-        </p:style>
-        <p:txBody>
-          <a:bodyPr anchor="ctr"/>
-          <a:lstStyle/>
-          <a:p>
-            <a:pPr marL="0" marR="0" lvl="0" indent="0" algn="ctr" defTabSz="914400" rtl="0" eaLnBrk="1" fontAlgn="auto" latinLnBrk="0" hangingPunct="1">
-              <a:lnSpc>
-                <a:spcPct val="100000"/>
-              </a:lnSpc>
-              <a:spcBef>
-                <a:spcPts val="0"/>
-              </a:spcBef>
-              <a:spcAft>
-                <a:spcPts val="0"/>
-              </a:spcAft>
-              <a:buClrTx/>
-              <a:buSzTx/>
-              <a:buFontTx/>
-              <a:buNone/>
-              <a:defRPr/>
-            </a:pPr>
-            <a:endParaRPr kumimoji="0" lang="zh-CN" altLang="en-US" sz="1800" b="0" i="0" u="none" strike="noStrike" kern="1200" cap="none" spc="0" normalizeH="0" baseline="0" noProof="0">
-              <a:ln>
-                <a:noFill/>
-              </a:ln>
-              <a:solidFill>
-                <a:schemeClr val="lt1"/>
-              </a:solidFill>
-              <a:effectLst/>
-              <a:uLnTx/>
-              <a:uFillTx/>
-              <a:latin typeface="+mn-lt"/>
-              <a:ea typeface="+mn-ea"/>
-              <a:cs typeface="+mn-cs"/>
-            </a:endParaRPr>
-          </a:p>
-        </p:txBody>
-      </p:sp>
-      <p:sp>
-        <p:nvSpPr>
-          <p:cNvPr id="10253" name="文本框 6"/>
-          <p:cNvSpPr txBox="1"/>
-          <p:nvPr/>
-        </p:nvSpPr>
-        <p:spPr>
-          <a:xfrm>
-            <a:off x="956945" y="3169920"/>
-            <a:ext cx="9671685" cy="929640"/>
-          </a:xfrm>
-          <a:prstGeom prst="rect">
-            <a:avLst/>
-          </a:prstGeom>
-          <a:noFill/>
-          <a:ln w="9525">
-            <a:noFill/>
-          </a:ln>
-        </p:spPr>
-        <p:txBody>
-          <a:bodyPr wrap="square" anchor="t">
-            <a:noAutofit/>
-          </a:bodyPr>
-          <a:p>
-            <a:pPr>
-              <a:buFont typeface="Arial" panose="020B0604020202090204" pitchFamily="34" charset="0"/>
-            </a:pPr>
-            <a:endParaRPr lang="en-US" altLang="en-US" sz="3200" b="1" dirty="0">
-              <a:solidFill>
-                <a:srgbClr val="404040"/>
-              </a:solidFill>
-              <a:ea typeface="Calibri" panose="020F0502020204030204" pitchFamily="34" charset="0"/>
-            </a:endParaRPr>
-          </a:p>
-        </p:txBody>
-      </p:sp>
-      <p:sp>
-        <p:nvSpPr>
-          <p:cNvPr id="10255" name="矩形 8"/>
-          <p:cNvSpPr/>
-          <p:nvPr/>
-        </p:nvSpPr>
-        <p:spPr>
-          <a:xfrm>
-            <a:off x="1082675" y="1889125"/>
-            <a:ext cx="10102215" cy="4272915"/>
-          </a:xfrm>
-          <a:prstGeom prst="rect">
-            <a:avLst/>
-          </a:prstGeom>
-          <a:noFill/>
-          <a:ln w="9525">
-            <a:noFill/>
-          </a:ln>
-        </p:spPr>
-        <p:txBody>
           <a:bodyPr wrap="square" lIns="0" tIns="0" rIns="0" bIns="0" anchor="t">
             <a:noAutofit/>
-          </a:bodyPr>
-          <a:p>
-            <a:pPr marL="457200" lvl="1" indent="457200" algn="l" defTabSz="1216025">
-              <a:lnSpc>
-                <a:spcPct val="130000"/>
-              </a:lnSpc>
-              <a:spcBef>
-                <a:spcPct val="20000"/>
-              </a:spcBef>
-              <a:buFont typeface="Arial" panose="020B0604020202090204" pitchFamily="34" charset="0"/>
-            </a:pPr>
-            <a:r>
-              <a:rPr lang="en-US" altLang="en-US" sz="3200" b="1" dirty="0">
-                <a:solidFill>
-                  <a:srgbClr val="404040"/>
-                </a:solidFill>
-                <a:ea typeface="Calibri" panose="020F0502020204030204" pitchFamily="34" charset="0"/>
-                <a:sym typeface="Arial" panose="020B0604020202090204" pitchFamily="34" charset="0"/>
-              </a:rPr>
-              <a:t>Part 1</a:t>
-            </a:r>
-            <a:r>
-              <a:rPr lang="en-US" altLang="en-US" sz="3200" dirty="0">
-                <a:solidFill>
-                  <a:srgbClr val="404040"/>
-                </a:solidFill>
-                <a:ea typeface="Calibri" panose="020F0502020204030204" pitchFamily="34" charset="0"/>
-                <a:sym typeface="Arial" panose="020B0604020202090204" pitchFamily="34" charset="0"/>
-              </a:rPr>
-              <a:t>: Clean and process the flight dataset</a:t>
-            </a:r>
-            <a:endParaRPr lang="en-US" altLang="en-US" sz="3200" dirty="0">
-              <a:solidFill>
-                <a:srgbClr val="404040"/>
-              </a:solidFill>
-              <a:ea typeface="Calibri" panose="020F0502020204030204" pitchFamily="34" charset="0"/>
-              <a:sym typeface="Arial" panose="020B0604020202090204" pitchFamily="34" charset="0"/>
-            </a:endParaRPr>
-          </a:p>
-          <a:p>
-            <a:pPr marL="457200" lvl="1" indent="457200" algn="l" defTabSz="1216025">
-              <a:lnSpc>
-                <a:spcPct val="130000"/>
-              </a:lnSpc>
-              <a:spcBef>
-                <a:spcPct val="20000"/>
-              </a:spcBef>
-              <a:buFont typeface="Arial" panose="020B0604020202090204" pitchFamily="34" charset="0"/>
-            </a:pPr>
-            <a:r>
-              <a:rPr lang="en-US" altLang="en-US" sz="3200" b="1" dirty="0">
-                <a:solidFill>
-                  <a:srgbClr val="404040"/>
-                </a:solidFill>
-                <a:ea typeface="Calibri" panose="020F0502020204030204" pitchFamily="34" charset="0"/>
-                <a:sym typeface="Arial" panose="020B0604020202090204" pitchFamily="34" charset="0"/>
-              </a:rPr>
-              <a:t>Part 2</a:t>
-            </a:r>
-            <a:r>
-              <a:rPr lang="en-US" altLang="en-US" sz="3200" dirty="0">
-                <a:solidFill>
-                  <a:srgbClr val="404040"/>
-                </a:solidFill>
-                <a:ea typeface="Calibri" panose="020F0502020204030204" pitchFamily="34" charset="0"/>
-                <a:sym typeface="Arial" panose="020B0604020202090204" pitchFamily="34" charset="0"/>
-              </a:rPr>
-              <a:t>: Identify the major causes of flight delays</a:t>
-            </a:r>
-            <a:endParaRPr lang="en-US" altLang="en-US" sz="3200" dirty="0">
-              <a:solidFill>
-                <a:srgbClr val="404040"/>
-              </a:solidFill>
-              <a:ea typeface="Calibri" panose="020F0502020204030204" pitchFamily="34" charset="0"/>
-              <a:sym typeface="Arial" panose="020B0604020202090204" pitchFamily="34" charset="0"/>
-            </a:endParaRPr>
-          </a:p>
-          <a:p>
-            <a:pPr marL="457200" lvl="1" indent="457200" algn="l" defTabSz="1216025">
-              <a:lnSpc>
-                <a:spcPct val="130000"/>
-              </a:lnSpc>
-              <a:spcBef>
-                <a:spcPct val="20000"/>
-              </a:spcBef>
-              <a:buFont typeface="Arial" panose="020B0604020202090204" pitchFamily="34" charset="0"/>
-            </a:pPr>
-            <a:r>
-              <a:rPr lang="en-US" altLang="en-US" sz="3200" b="1" dirty="0">
-                <a:solidFill>
-                  <a:srgbClr val="404040"/>
-                </a:solidFill>
-                <a:ea typeface="Calibri" panose="020F0502020204030204" pitchFamily="34" charset="0"/>
-                <a:sym typeface="Arial" panose="020B0604020202090204" pitchFamily="34" charset="0"/>
-              </a:rPr>
-              <a:t>Part 3</a:t>
-            </a:r>
-            <a:r>
-              <a:rPr lang="en-US" altLang="en-US" sz="3200" dirty="0">
-                <a:solidFill>
-                  <a:srgbClr val="404040"/>
-                </a:solidFill>
-                <a:ea typeface="Calibri" panose="020F0502020204030204" pitchFamily="34" charset="0"/>
-                <a:sym typeface="Arial" panose="020B0604020202090204" pitchFamily="34" charset="0"/>
-              </a:rPr>
-              <a:t>: Explore how factors like distance or weather influence delays</a:t>
-            </a:r>
-            <a:endParaRPr lang="en-US" altLang="en-US" sz="3200" dirty="0">
-              <a:solidFill>
-                <a:srgbClr val="404040"/>
-              </a:solidFill>
-              <a:ea typeface="Calibri" panose="020F0502020204030204" pitchFamily="34" charset="0"/>
-              <a:sym typeface="Arial" panose="020B0604020202090204" pitchFamily="34" charset="0"/>
-            </a:endParaRPr>
-          </a:p>
-          <a:p>
-            <a:pPr marL="457200" lvl="1" indent="457200" algn="l" defTabSz="1216025">
-              <a:lnSpc>
-                <a:spcPct val="130000"/>
-              </a:lnSpc>
-              <a:spcBef>
-                <a:spcPct val="20000"/>
-              </a:spcBef>
-              <a:buFont typeface="Arial" panose="020B0604020202090204" pitchFamily="34" charset="0"/>
-            </a:pPr>
-            <a:r>
-              <a:rPr lang="en-US" altLang="en-US" sz="3200" b="1" dirty="0">
-                <a:solidFill>
-                  <a:srgbClr val="404040"/>
-                </a:solidFill>
-                <a:ea typeface="Calibri" panose="020F0502020204030204" pitchFamily="34" charset="0"/>
-                <a:sym typeface="Arial" panose="020B0604020202090204" pitchFamily="34" charset="0"/>
-              </a:rPr>
-              <a:t>Part 4</a:t>
-            </a:r>
-            <a:r>
-              <a:rPr lang="en-US" altLang="en-US" sz="3200" dirty="0">
-                <a:solidFill>
-                  <a:srgbClr val="404040"/>
-                </a:solidFill>
-                <a:ea typeface="Calibri" panose="020F0502020204030204" pitchFamily="34" charset="0"/>
-                <a:sym typeface="Arial" panose="020B0604020202090204" pitchFamily="34" charset="0"/>
-              </a:rPr>
-              <a:t>: Visualize the delay patterns clearly.</a:t>
-            </a:r>
-            <a:endParaRPr lang="en-US" altLang="en-US" sz="3200" dirty="0">
-              <a:solidFill>
-                <a:srgbClr val="404040"/>
-              </a:solidFill>
-              <a:ea typeface="Calibri" panose="020F0502020204030204" pitchFamily="34" charset="0"/>
-              <a:sym typeface="Arial" panose="020B0604020202090204" pitchFamily="34" charset="0"/>
-            </a:endParaRPr>
-          </a:p>
-        </p:txBody>
-      </p:sp>
-    </p:spTree>
-  </p:cSld>
-  <p:clrMapOvr>
-    <a:masterClrMapping/>
-  </p:clrMapOvr>
-  <p:transition spd="slow">
-    <p:wipe/>
-  </p:transition>
-</p:sld>
-</file>
-
-<file path=ppt/slides/slide3.xml><?xml version="1.0" encoding="utf-8"?>
-<p:sld xmlns:a="http://schemas.openxmlformats.org/drawingml/2006/main" xmlns:r="http://schemas.openxmlformats.org/officeDocument/2006/relationships" xmlns:p="http://schemas.openxmlformats.org/presentationml/2006/main">
-  <p:cSld>
-    <p:spTree>
-      <p:nvGrpSpPr>
-        <p:cNvPr id="1" name=""/>
-        <p:cNvGrpSpPr/>
-        <p:nvPr/>
-      </p:nvGrpSpPr>
-      <p:grpSpPr/>
-      <p:pic>
-        <p:nvPicPr>
-          <p:cNvPr id="10241" name="图片 3"/>
-          <p:cNvPicPr>
-            <a:picLocks noChangeAspect="1"/>
-          </p:cNvPicPr>
-          <p:nvPr/>
-        </p:nvPicPr>
-        <p:blipFill>
-          <a:blip r:embed="rId1"/>
-          <a:srcRect l="5727" r="16841" b="26530"/>
-          <a:stretch>
-            <a:fillRect/>
-          </a:stretch>
-        </p:blipFill>
-        <p:spPr>
-          <a:xfrm>
-            <a:off x="0" y="0"/>
-            <a:ext cx="12192000" cy="6858000"/>
-          </a:xfrm>
-          <a:prstGeom prst="rect">
-            <a:avLst/>
-          </a:prstGeom>
-          <a:noFill/>
-          <a:ln w="9525">
-            <a:noFill/>
-          </a:ln>
-        </p:spPr>
-      </p:pic>
-      <p:sp>
-        <p:nvSpPr>
-          <p:cNvPr id="10250" name="文本框 28"/>
-          <p:cNvSpPr txBox="1"/>
-          <p:nvPr/>
-        </p:nvSpPr>
-        <p:spPr>
-          <a:xfrm>
-            <a:off x="1610360" y="405765"/>
-            <a:ext cx="7923530" cy="645160"/>
-          </a:xfrm>
-          <a:prstGeom prst="rect">
-            <a:avLst/>
-          </a:prstGeom>
-          <a:noFill/>
-          <a:ln w="9525">
-            <a:noFill/>
-          </a:ln>
-        </p:spPr>
-        <p:txBody>
-          <a:bodyPr wrap="square" anchor="t">
-            <a:spAutoFit/>
-          </a:bodyPr>
-          <a:p>
-            <a:pPr>
-              <a:buFont typeface="Arial" panose="020B0604020202090204" pitchFamily="34" charset="0"/>
-            </a:pPr>
-            <a:r>
-              <a:rPr lang="en-US" altLang="en-US" sz="3600" b="1" dirty="0">
-                <a:solidFill>
-                  <a:srgbClr val="404040"/>
-                </a:solidFill>
-                <a:ea typeface="Calibri" panose="020F0502020204030204" pitchFamily="34" charset="0"/>
-              </a:rPr>
-              <a:t>Conclusion</a:t>
-            </a:r>
-            <a:endParaRPr lang="en-US" altLang="en-US" sz="3600" b="1" dirty="0">
-              <a:solidFill>
-                <a:srgbClr val="404040"/>
-              </a:solidFill>
-              <a:ea typeface="Calibri" panose="020F0502020204030204" pitchFamily="34" charset="0"/>
-            </a:endParaRPr>
-          </a:p>
-        </p:txBody>
-      </p:sp>
-      <p:sp>
-        <p:nvSpPr>
-          <p:cNvPr id="12" name="矩形 11"/>
-          <p:cNvSpPr/>
-          <p:nvPr/>
-        </p:nvSpPr>
-        <p:spPr>
-          <a:xfrm>
-            <a:off x="828675" y="1729105"/>
-            <a:ext cx="10515600" cy="4653280"/>
-          </a:xfrm>
-          <a:prstGeom prst="rect">
-            <a:avLst/>
-          </a:prstGeom>
-          <a:noFill/>
-          <a:ln>
-            <a:solidFill>
-              <a:schemeClr val="tx1"/>
-            </a:solidFill>
-          </a:ln>
-        </p:spPr>
-        <p:style>
-          <a:lnRef idx="2">
-            <a:schemeClr val="accent1">
-              <a:shade val="50000"/>
-            </a:schemeClr>
-          </a:lnRef>
-          <a:fillRef idx="1">
-            <a:schemeClr val="accent1"/>
-          </a:fillRef>
-          <a:effectRef idx="0">
-            <a:schemeClr val="accent1"/>
-          </a:effectRef>
-          <a:fontRef idx="minor">
-            <a:schemeClr val="lt1"/>
-          </a:fontRef>
-        </p:style>
-        <p:txBody>
-          <a:bodyPr anchor="ctr"/>
-          <a:lstStyle/>
-          <a:p>
-            <a:pPr marL="0" marR="0" lvl="0" indent="0" algn="ctr" defTabSz="914400" rtl="0" eaLnBrk="1" fontAlgn="auto" latinLnBrk="0" hangingPunct="1">
-              <a:lnSpc>
-                <a:spcPct val="100000"/>
-              </a:lnSpc>
-              <a:spcBef>
-                <a:spcPts val="0"/>
-              </a:spcBef>
-              <a:spcAft>
-                <a:spcPts val="0"/>
-              </a:spcAft>
-              <a:buClrTx/>
-              <a:buSzTx/>
-              <a:buFontTx/>
-              <a:buNone/>
-              <a:defRPr/>
-            </a:pPr>
-            <a:endParaRPr kumimoji="0" lang="zh-CN" altLang="en-US" sz="1800" b="0" i="0" u="none" strike="noStrike" kern="1200" cap="none" spc="0" normalizeH="0" baseline="0" noProof="0">
-              <a:ln>
-                <a:noFill/>
-              </a:ln>
-              <a:solidFill>
-                <a:schemeClr val="lt1"/>
-              </a:solidFill>
-              <a:effectLst/>
-              <a:uLnTx/>
-              <a:uFillTx/>
-              <a:latin typeface="+mn-lt"/>
-              <a:ea typeface="+mn-ea"/>
-              <a:cs typeface="+mn-cs"/>
-            </a:endParaRPr>
-          </a:p>
-        </p:txBody>
-      </p:sp>
-      <p:sp>
-        <p:nvSpPr>
-          <p:cNvPr id="10253" name="文本框 6"/>
-          <p:cNvSpPr txBox="1"/>
-          <p:nvPr/>
-        </p:nvSpPr>
-        <p:spPr>
-          <a:xfrm>
-            <a:off x="956945" y="1729105"/>
-            <a:ext cx="9671685" cy="929640"/>
-          </a:xfrm>
-          <a:prstGeom prst="rect">
-            <a:avLst/>
-          </a:prstGeom>
-          <a:noFill/>
-          <a:ln w="9525">
-            <a:noFill/>
-          </a:ln>
-        </p:spPr>
-        <p:txBody>
-          <a:bodyPr wrap="square" anchor="t">
-            <a:noAutofit/>
-          </a:bodyPr>
-          <a:p>
-            <a:pPr>
-              <a:buFont typeface="Arial" panose="020B0604020202090204" pitchFamily="34" charset="0"/>
-            </a:pPr>
-            <a:endParaRPr lang="en-US" altLang="en-US" sz="3200" b="1" dirty="0">
-              <a:solidFill>
-                <a:srgbClr val="404040"/>
-              </a:solidFill>
-              <a:ea typeface="Calibri" panose="020F0502020204030204" pitchFamily="34" charset="0"/>
-            </a:endParaRPr>
-          </a:p>
-        </p:txBody>
-      </p:sp>
-      <p:sp>
-        <p:nvSpPr>
-          <p:cNvPr id="10255" name="矩形 8"/>
-          <p:cNvSpPr/>
-          <p:nvPr/>
-        </p:nvSpPr>
-        <p:spPr>
-          <a:xfrm>
-            <a:off x="1082675" y="2136775"/>
-            <a:ext cx="9545955" cy="3837305"/>
-          </a:xfrm>
-          <a:prstGeom prst="rect">
-            <a:avLst/>
-          </a:prstGeom>
-          <a:noFill/>
-          <a:ln w="9525">
-            <a:noFill/>
-          </a:ln>
-        </p:spPr>
-        <p:txBody>
-          <a:bodyPr wrap="square" lIns="0" tIns="0" rIns="0" bIns="0" anchor="t">
-            <a:spAutoFit/>
           </a:bodyPr>
           <a:p>
             <a:pPr marL="457200" lvl="1" indent="457200" algn="l" defTabSz="1216025">
@@ -2875,7 +2345,7 @@
                 <a:ea typeface="Calibri" panose="020F0502020204030204" pitchFamily="34" charset="0"/>
                 <a:sym typeface="Arial" panose="020B0604020202090204" pitchFamily="34" charset="0"/>
               </a:rPr>
-              <a:t>Our project followed the Agile model, which helped us:</a:t>
+              <a:t>The first few (only 4 missing) can safely be filled or dropped.</a:t>
             </a:r>
             <a:endParaRPr lang="en-US" altLang="en-US" sz="2400" dirty="0">
               <a:solidFill>
@@ -2885,194 +2355,179 @@
               <a:sym typeface="Arial" panose="020B0604020202090204" pitchFamily="34" charset="0"/>
             </a:endParaRPr>
           </a:p>
-          <a:p>
-            <a:pPr marL="457200" lvl="1" indent="457200" algn="l" defTabSz="1216025">
-              <a:lnSpc>
-                <a:spcPct val="90000"/>
-              </a:lnSpc>
-              <a:spcBef>
-                <a:spcPct val="20000"/>
-              </a:spcBef>
+        </p:txBody>
+      </p:sp>
+      <p:sp>
+        <p:nvSpPr>
+          <p:cNvPr id="10250" name="文本框 28"/>
+          <p:cNvSpPr txBox="1"/>
+          <p:nvPr/>
+        </p:nvSpPr>
+        <p:spPr>
+          <a:xfrm>
+            <a:off x="96520" y="90805"/>
+            <a:ext cx="5998845" cy="706755"/>
+          </a:xfrm>
+          <a:prstGeom prst="rect">
+            <a:avLst/>
+          </a:prstGeom>
+          <a:noFill/>
+          <a:ln w="9525">
+            <a:noFill/>
+          </a:ln>
+        </p:spPr>
+        <p:txBody>
+          <a:bodyPr wrap="square" anchor="t">
+            <a:spAutoFit/>
+          </a:bodyPr>
+          <a:p>
+            <a:pPr>
               <a:buFont typeface="Arial" panose="020B0604020202090204" pitchFamily="34" charset="0"/>
             </a:pPr>
             <a:r>
-              <a:rPr lang="en-US" altLang="en-US" sz="2400" dirty="0">
+              <a:rPr lang="en-US" altLang="en-US" sz="4000" b="1" dirty="0">
                 <a:solidFill>
                   <a:srgbClr val="404040"/>
                 </a:solidFill>
                 <a:ea typeface="Calibri" panose="020F0502020204030204" pitchFamily="34" charset="0"/>
-                <a:sym typeface="Arial" panose="020B0604020202090204" pitchFamily="34" charset="0"/>
               </a:rPr>
-              <a:t>	•	Break work into manageable tasks (sprint)</a:t>
+              <a:t>Data Preparation</a:t>
             </a:r>
-            <a:endParaRPr lang="en-US" altLang="en-US" sz="2400" dirty="0">
+            <a:endParaRPr lang="en-US" altLang="en-US" sz="4000" b="1" dirty="0">
               <a:solidFill>
                 <a:srgbClr val="404040"/>
               </a:solidFill>
               <a:ea typeface="Calibri" panose="020F0502020204030204" pitchFamily="34" charset="0"/>
-              <a:sym typeface="Arial" panose="020B0604020202090204" pitchFamily="34" charset="0"/>
-            </a:endParaRPr>
-          </a:p>
-          <a:p>
-            <a:pPr marL="457200" lvl="1" indent="457200" algn="l" defTabSz="1216025">
-              <a:lnSpc>
-                <a:spcPct val="90000"/>
-              </a:lnSpc>
-              <a:spcBef>
-                <a:spcPct val="20000"/>
-              </a:spcBef>
-              <a:buFont typeface="Arial" panose="020B0604020202090204" pitchFamily="34" charset="0"/>
-            </a:pPr>
-            <a:r>
-              <a:rPr lang="en-US" altLang="en-US" sz="2400" dirty="0">
-                <a:solidFill>
-                  <a:srgbClr val="404040"/>
-                </a:solidFill>
-                <a:ea typeface="Calibri" panose="020F0502020204030204" pitchFamily="34" charset="0"/>
-                <a:sym typeface="Arial" panose="020B0604020202090204" pitchFamily="34" charset="0"/>
-              </a:rPr>
-              <a:t>	•	Stay organized and flexible</a:t>
-            </a:r>
-            <a:endParaRPr lang="en-US" altLang="en-US" sz="2400" dirty="0">
-              <a:solidFill>
-                <a:srgbClr val="404040"/>
-              </a:solidFill>
-              <a:ea typeface="Calibri" panose="020F0502020204030204" pitchFamily="34" charset="0"/>
-              <a:sym typeface="Arial" panose="020B0604020202090204" pitchFamily="34" charset="0"/>
-            </a:endParaRPr>
-          </a:p>
-          <a:p>
-            <a:pPr marL="457200" lvl="1" indent="457200" algn="l" defTabSz="1216025">
-              <a:lnSpc>
-                <a:spcPct val="90000"/>
-              </a:lnSpc>
-              <a:spcBef>
-                <a:spcPct val="20000"/>
-              </a:spcBef>
-              <a:buFont typeface="Arial" panose="020B0604020202090204" pitchFamily="34" charset="0"/>
-            </a:pPr>
-            <a:r>
-              <a:rPr lang="en-US" altLang="en-US" sz="2400" dirty="0">
-                <a:solidFill>
-                  <a:srgbClr val="404040"/>
-                </a:solidFill>
-                <a:ea typeface="Calibri" panose="020F0502020204030204" pitchFamily="34" charset="0"/>
-                <a:sym typeface="Arial" panose="020B0604020202090204" pitchFamily="34" charset="0"/>
-              </a:rPr>
-              <a:t>	•	Deliver a working product incrementally</a:t>
-            </a:r>
-            <a:endParaRPr lang="en-US" altLang="en-US" sz="2400" dirty="0">
-              <a:solidFill>
-                <a:srgbClr val="404040"/>
-              </a:solidFill>
-              <a:ea typeface="Calibri" panose="020F0502020204030204" pitchFamily="34" charset="0"/>
-              <a:sym typeface="Arial" panose="020B0604020202090204" pitchFamily="34" charset="0"/>
-            </a:endParaRPr>
-          </a:p>
-          <a:p>
-            <a:pPr marL="457200" lvl="1" indent="457200" algn="l" defTabSz="1216025">
-              <a:lnSpc>
-                <a:spcPct val="90000"/>
-              </a:lnSpc>
-              <a:spcBef>
-                <a:spcPct val="20000"/>
-              </a:spcBef>
-              <a:buFont typeface="Arial" panose="020B0604020202090204" pitchFamily="34" charset="0"/>
-            </a:pPr>
-            <a:r>
-              <a:rPr lang="en-US" altLang="en-US" sz="2400" dirty="0">
-                <a:solidFill>
-                  <a:srgbClr val="404040"/>
-                </a:solidFill>
-                <a:ea typeface="Calibri" panose="020F0502020204030204" pitchFamily="34" charset="0"/>
-                <a:sym typeface="Arial" panose="020B0604020202090204" pitchFamily="34" charset="0"/>
-              </a:rPr>
-              <a:t>	•	Get feedback and improve continuously</a:t>
-            </a:r>
-            <a:endParaRPr lang="en-US" altLang="en-US" sz="2400" dirty="0">
-              <a:solidFill>
-                <a:srgbClr val="404040"/>
-              </a:solidFill>
-              <a:ea typeface="Calibri" panose="020F0502020204030204" pitchFamily="34" charset="0"/>
-              <a:sym typeface="Arial" panose="020B0604020202090204" pitchFamily="34" charset="0"/>
-            </a:endParaRPr>
-          </a:p>
-          <a:p>
-            <a:pPr marL="457200" lvl="1" indent="457200" algn="l" defTabSz="1216025">
-              <a:lnSpc>
-                <a:spcPct val="90000"/>
-              </a:lnSpc>
-              <a:spcBef>
-                <a:spcPct val="20000"/>
-              </a:spcBef>
-              <a:buFont typeface="Arial" panose="020B0604020202090204" pitchFamily="34" charset="0"/>
-            </a:pPr>
-            <a:endParaRPr lang="en-US" altLang="en-US" sz="2400" dirty="0">
-              <a:solidFill>
-                <a:srgbClr val="404040"/>
-              </a:solidFill>
-              <a:ea typeface="Calibri" panose="020F0502020204030204" pitchFamily="34" charset="0"/>
-              <a:sym typeface="Arial" panose="020B0604020202090204" pitchFamily="34" charset="0"/>
-            </a:endParaRPr>
-          </a:p>
-          <a:p>
-            <a:pPr marL="457200" lvl="1" indent="457200" algn="l" defTabSz="1216025">
-              <a:lnSpc>
-                <a:spcPct val="90000"/>
-              </a:lnSpc>
-              <a:spcBef>
-                <a:spcPct val="20000"/>
-              </a:spcBef>
-              <a:buFont typeface="Arial" panose="020B0604020202090204" pitchFamily="34" charset="0"/>
-            </a:pPr>
-            <a:r>
-              <a:rPr lang="en-US" altLang="en-US" sz="2400" dirty="0">
-                <a:solidFill>
-                  <a:srgbClr val="404040"/>
-                </a:solidFill>
-                <a:ea typeface="Calibri" panose="020F0502020204030204" pitchFamily="34" charset="0"/>
-                <a:sym typeface="Arial" panose="020B0604020202090204" pitchFamily="34" charset="0"/>
-              </a:rPr>
-              <a:t>Through this process, we learned the value of teamwork, planning, and adaptability in real-world software development.</a:t>
-            </a:r>
-            <a:endParaRPr lang="en-US" altLang="en-US" sz="2400" dirty="0">
-              <a:solidFill>
-                <a:srgbClr val="404040"/>
-              </a:solidFill>
-              <a:ea typeface="Calibri" panose="020F0502020204030204" pitchFamily="34" charset="0"/>
-              <a:sym typeface="Arial" panose="020B0604020202090204" pitchFamily="34" charset="0"/>
-            </a:endParaRPr>
-          </a:p>
-          <a:p>
-            <a:pPr marL="457200" lvl="1" indent="457200" algn="l" defTabSz="1216025">
-              <a:lnSpc>
-                <a:spcPct val="90000"/>
-              </a:lnSpc>
-              <a:spcBef>
-                <a:spcPct val="20000"/>
-              </a:spcBef>
-              <a:buFont typeface="Arial" panose="020B0604020202090204" pitchFamily="34" charset="0"/>
-            </a:pPr>
-            <a:r>
-              <a:rPr lang="en-US" altLang="en-US" sz="2400" dirty="0">
-                <a:solidFill>
-                  <a:srgbClr val="404040"/>
-                </a:solidFill>
-                <a:ea typeface="Calibri" panose="020F0502020204030204" pitchFamily="34" charset="0"/>
-                <a:sym typeface="Arial" panose="020B0604020202090204" pitchFamily="34" charset="0"/>
-              </a:rPr>
-              <a:t>https://github.com/yusufjonc07/CourseAssignments/tree/main/software-engineering/6.%20Agile%20Sprint</a:t>
-            </a:r>
-            <a:endParaRPr lang="en-US" altLang="en-US" sz="2400" dirty="0">
-              <a:solidFill>
-                <a:srgbClr val="404040"/>
-              </a:solidFill>
-              <a:ea typeface="Calibri" panose="020F0502020204030204" pitchFamily="34" charset="0"/>
-              <a:sym typeface="Arial" panose="020B0604020202090204" pitchFamily="34" charset="0"/>
             </a:endParaRPr>
           </a:p>
         </p:txBody>
       </p:sp>
+      <p:pic>
+        <p:nvPicPr>
+          <p:cNvPr id="2" name="Picture 1" descr="Screenshot 2025-11-04 at 5.44.51 PM"/>
+          <p:cNvPicPr>
+            <a:picLocks noChangeAspect="1"/>
+          </p:cNvPicPr>
+          <p:nvPr/>
+        </p:nvPicPr>
+        <p:blipFill>
+          <a:blip r:embed="rId2"/>
+          <a:stretch>
+            <a:fillRect/>
+          </a:stretch>
+        </p:blipFill>
+        <p:spPr>
+          <a:xfrm>
+            <a:off x="9032875" y="62230"/>
+            <a:ext cx="2860040" cy="6698615"/>
+          </a:xfrm>
+          <a:prstGeom prst="rect">
+            <a:avLst/>
+          </a:prstGeom>
+        </p:spPr>
+      </p:pic>
+      <p:pic>
+        <p:nvPicPr>
+          <p:cNvPr id="3" name="Picture 2" descr="Screenshot 2025-11-04 at 5.48.01 PM"/>
+          <p:cNvPicPr>
+            <a:picLocks noChangeAspect="1"/>
+          </p:cNvPicPr>
+          <p:nvPr/>
+        </p:nvPicPr>
+        <p:blipFill>
+          <a:blip r:embed="rId3"/>
+          <a:stretch>
+            <a:fillRect/>
+          </a:stretch>
+        </p:blipFill>
+        <p:spPr>
+          <a:xfrm>
+            <a:off x="326390" y="2431415"/>
+            <a:ext cx="8318500" cy="1549400"/>
+          </a:xfrm>
+          <a:prstGeom prst="rect">
+            <a:avLst/>
+          </a:prstGeom>
+        </p:spPr>
+      </p:pic>
+      <p:sp>
+        <p:nvSpPr>
+          <p:cNvPr id="4" name="Rectangles 3"/>
+          <p:cNvSpPr/>
+          <p:nvPr/>
+        </p:nvSpPr>
+        <p:spPr>
+          <a:xfrm>
+            <a:off x="9253855" y="5283200"/>
+            <a:ext cx="2299970" cy="1169035"/>
+          </a:xfrm>
+          <a:prstGeom prst="rect">
+            <a:avLst/>
+          </a:prstGeom>
+          <a:noFill/>
+          <a:ln w="28575">
+            <a:solidFill>
+              <a:srgbClr val="FF0000"/>
+            </a:solidFill>
+          </a:ln>
+          <a:extLst>
+            <a:ext uri="{909E8E84-426E-40DD-AFC4-6F175D3DCCD1}">
+              <a14:hiddenFill xmlns:a14="http://schemas.microsoft.com/office/drawing/2010/main">
+                <a:solidFill>
+                  <a:schemeClr val="accent1"/>
+                </a:solidFill>
+              </a14:hiddenFill>
+            </a:ext>
+          </a:extLst>
+        </p:spPr>
+        <p:style>
+          <a:lnRef idx="2">
+            <a:schemeClr val="accent1">
+              <a:lumMod val="75000"/>
+            </a:schemeClr>
+          </a:lnRef>
+          <a:fillRef idx="1">
+            <a:schemeClr val="accent1"/>
+          </a:fillRef>
+          <a:effectRef idx="0">
+            <a:srgbClr val="FFFFFF"/>
+          </a:effectRef>
+          <a:fontRef idx="minor">
+            <a:schemeClr val="lt1"/>
+          </a:fontRef>
+        </p:style>
+        <p:txBody>
+          <a:bodyPr rtlCol="0" anchor="ctr"/>
+          <a:p>
+            <a:pPr algn="ctr"/>
+            <a:endParaRPr lang="en-US"/>
+          </a:p>
+        </p:txBody>
+      </p:sp>
+      <p:pic>
+        <p:nvPicPr>
+          <p:cNvPr id="6" name="Picture 5" descr="Screenshot 2025-11-04 at 5.50.42 PM"/>
+          <p:cNvPicPr>
+            <a:picLocks noChangeAspect="1"/>
+          </p:cNvPicPr>
+          <p:nvPr/>
+        </p:nvPicPr>
+        <p:blipFill>
+          <a:blip r:embed="rId4"/>
+          <a:stretch>
+            <a:fillRect/>
+          </a:stretch>
+        </p:blipFill>
+        <p:spPr>
+          <a:xfrm>
+            <a:off x="1828165" y="4307205"/>
+            <a:ext cx="4267200" cy="2145030"/>
+          </a:xfrm>
+          <a:prstGeom prst="rect">
+            <a:avLst/>
+          </a:prstGeom>
+        </p:spPr>
+      </p:pic>
     </p:spTree>
   </p:cSld>
   <p:clrMapOvr>
@@ -3084,7 +2539,7 @@
 </p:sld>
 </file>
 
-<file path=ppt/slides/slide4.xml><?xml version="1.0" encoding="utf-8"?>
+<file path=ppt/slides/slide11.xml><?xml version="1.0" encoding="utf-8"?>
 <p:sld xmlns:a="http://schemas.openxmlformats.org/drawingml/2006/main" xmlns:r="http://schemas.openxmlformats.org/officeDocument/2006/relationships" xmlns:p="http://schemas.openxmlformats.org/presentationml/2006/main">
   <p:cSld>
     <p:spTree>
@@ -3515,6 +2970,2763 @@
           </p:txBody>
         </p:sp>
       </p:grpSp>
+    </p:spTree>
+  </p:cSld>
+  <p:clrMapOvr>
+    <a:masterClrMapping/>
+  </p:clrMapOvr>
+  <p:transition spd="slow">
+    <p:wipe/>
+  </p:transition>
+</p:sld>
+</file>
+
+<file path=ppt/slides/slide2.xml><?xml version="1.0" encoding="utf-8"?>
+<p:sld xmlns:a="http://schemas.openxmlformats.org/drawingml/2006/main" xmlns:r="http://schemas.openxmlformats.org/officeDocument/2006/relationships" xmlns:p="http://schemas.openxmlformats.org/presentationml/2006/main">
+  <p:cSld>
+    <p:spTree>
+      <p:nvGrpSpPr>
+        <p:cNvPr id="1" name=""/>
+        <p:cNvGrpSpPr/>
+        <p:nvPr/>
+      </p:nvGrpSpPr>
+      <p:grpSpPr/>
+      <p:pic>
+        <p:nvPicPr>
+          <p:cNvPr id="10241" name="图片 3"/>
+          <p:cNvPicPr>
+            <a:picLocks noChangeAspect="1"/>
+          </p:cNvPicPr>
+          <p:nvPr/>
+        </p:nvPicPr>
+        <p:blipFill>
+          <a:blip r:embed="rId1"/>
+          <a:srcRect l="5727" r="16841" b="26530"/>
+          <a:stretch>
+            <a:fillRect/>
+          </a:stretch>
+        </p:blipFill>
+        <p:spPr>
+          <a:xfrm>
+            <a:off x="0" y="0"/>
+            <a:ext cx="12192000" cy="6858000"/>
+          </a:xfrm>
+          <a:prstGeom prst="rect">
+            <a:avLst/>
+          </a:prstGeom>
+          <a:noFill/>
+          <a:ln w="9525">
+            <a:noFill/>
+          </a:ln>
+        </p:spPr>
+      </p:pic>
+      <p:sp>
+        <p:nvSpPr>
+          <p:cNvPr id="10250" name="文本框 28"/>
+          <p:cNvSpPr txBox="1"/>
+          <p:nvPr/>
+        </p:nvSpPr>
+        <p:spPr>
+          <a:xfrm>
+            <a:off x="3966845" y="714375"/>
+            <a:ext cx="3651250" cy="1014730"/>
+          </a:xfrm>
+          <a:prstGeom prst="rect">
+            <a:avLst/>
+          </a:prstGeom>
+          <a:noFill/>
+          <a:ln w="9525">
+            <a:noFill/>
+          </a:ln>
+        </p:spPr>
+        <p:txBody>
+          <a:bodyPr wrap="square" anchor="t">
+            <a:spAutoFit/>
+          </a:bodyPr>
+          <a:p>
+            <a:pPr algn="ctr">
+              <a:buFont typeface="Arial" panose="020B0604020202090204" pitchFamily="34" charset="0"/>
+            </a:pPr>
+            <a:r>
+              <a:rPr lang="en-US" altLang="en-US" sz="6000" b="1" dirty="0">
+                <a:solidFill>
+                  <a:srgbClr val="404040"/>
+                </a:solidFill>
+                <a:ea typeface="Calibri" panose="020F0502020204030204" pitchFamily="34" charset="0"/>
+              </a:rPr>
+              <a:t>Objective</a:t>
+            </a:r>
+            <a:endParaRPr lang="en-US" altLang="en-US" sz="6000" b="1" dirty="0">
+              <a:solidFill>
+                <a:srgbClr val="404040"/>
+              </a:solidFill>
+              <a:ea typeface="Calibri" panose="020F0502020204030204" pitchFamily="34" charset="0"/>
+            </a:endParaRPr>
+          </a:p>
+        </p:txBody>
+      </p:sp>
+      <p:sp>
+        <p:nvSpPr>
+          <p:cNvPr id="12" name="矩形 11"/>
+          <p:cNvSpPr/>
+          <p:nvPr/>
+        </p:nvSpPr>
+        <p:spPr>
+          <a:xfrm>
+            <a:off x="828675" y="1729105"/>
+            <a:ext cx="10515600" cy="4653280"/>
+          </a:xfrm>
+          <a:prstGeom prst="rect">
+            <a:avLst/>
+          </a:prstGeom>
+          <a:noFill/>
+          <a:ln>
+            <a:solidFill>
+              <a:schemeClr val="tx1"/>
+            </a:solidFill>
+          </a:ln>
+        </p:spPr>
+        <p:style>
+          <a:lnRef idx="2">
+            <a:schemeClr val="accent1">
+              <a:shade val="50000"/>
+            </a:schemeClr>
+          </a:lnRef>
+          <a:fillRef idx="1">
+            <a:schemeClr val="accent1"/>
+          </a:fillRef>
+          <a:effectRef idx="0">
+            <a:schemeClr val="accent1"/>
+          </a:effectRef>
+          <a:fontRef idx="minor">
+            <a:schemeClr val="lt1"/>
+          </a:fontRef>
+        </p:style>
+        <p:txBody>
+          <a:bodyPr anchor="ctr"/>
+          <a:lstStyle/>
+          <a:p>
+            <a:pPr marL="0" marR="0" lvl="0" indent="0" algn="ctr" defTabSz="914400" rtl="0" eaLnBrk="1" fontAlgn="auto" latinLnBrk="0" hangingPunct="1">
+              <a:lnSpc>
+                <a:spcPct val="100000"/>
+              </a:lnSpc>
+              <a:spcBef>
+                <a:spcPts val="0"/>
+              </a:spcBef>
+              <a:spcAft>
+                <a:spcPts val="0"/>
+              </a:spcAft>
+              <a:buClrTx/>
+              <a:buSzTx/>
+              <a:buFontTx/>
+              <a:buNone/>
+              <a:defRPr/>
+            </a:pPr>
+            <a:endParaRPr kumimoji="0" lang="zh-CN" altLang="en-US" sz="1800" b="0" i="0" u="none" strike="noStrike" kern="1200" cap="none" spc="0" normalizeH="0" baseline="0" noProof="0">
+              <a:ln>
+                <a:noFill/>
+              </a:ln>
+              <a:solidFill>
+                <a:schemeClr val="lt1"/>
+              </a:solidFill>
+              <a:effectLst/>
+              <a:uLnTx/>
+              <a:uFillTx/>
+              <a:latin typeface="+mn-lt"/>
+              <a:ea typeface="+mn-ea"/>
+              <a:cs typeface="+mn-cs"/>
+            </a:endParaRPr>
+          </a:p>
+        </p:txBody>
+      </p:sp>
+      <p:sp>
+        <p:nvSpPr>
+          <p:cNvPr id="10253" name="文本框 6"/>
+          <p:cNvSpPr txBox="1"/>
+          <p:nvPr/>
+        </p:nvSpPr>
+        <p:spPr>
+          <a:xfrm>
+            <a:off x="956945" y="3169920"/>
+            <a:ext cx="9671685" cy="929640"/>
+          </a:xfrm>
+          <a:prstGeom prst="rect">
+            <a:avLst/>
+          </a:prstGeom>
+          <a:noFill/>
+          <a:ln w="9525">
+            <a:noFill/>
+          </a:ln>
+        </p:spPr>
+        <p:txBody>
+          <a:bodyPr wrap="square" anchor="t">
+            <a:noAutofit/>
+          </a:bodyPr>
+          <a:p>
+            <a:pPr>
+              <a:buFont typeface="Arial" panose="020B0604020202090204" pitchFamily="34" charset="0"/>
+            </a:pPr>
+            <a:endParaRPr lang="en-US" altLang="en-US" sz="3200" b="1" dirty="0">
+              <a:solidFill>
+                <a:srgbClr val="404040"/>
+              </a:solidFill>
+              <a:ea typeface="Calibri" panose="020F0502020204030204" pitchFamily="34" charset="0"/>
+            </a:endParaRPr>
+          </a:p>
+        </p:txBody>
+      </p:sp>
+      <p:sp>
+        <p:nvSpPr>
+          <p:cNvPr id="10255" name="矩形 8"/>
+          <p:cNvSpPr/>
+          <p:nvPr/>
+        </p:nvSpPr>
+        <p:spPr>
+          <a:xfrm>
+            <a:off x="1082675" y="1889125"/>
+            <a:ext cx="10102215" cy="4272915"/>
+          </a:xfrm>
+          <a:prstGeom prst="rect">
+            <a:avLst/>
+          </a:prstGeom>
+          <a:noFill/>
+          <a:ln w="9525">
+            <a:noFill/>
+          </a:ln>
+        </p:spPr>
+        <p:txBody>
+          <a:bodyPr wrap="square" lIns="0" tIns="0" rIns="0" bIns="0" anchor="t">
+            <a:noAutofit/>
+          </a:bodyPr>
+          <a:p>
+            <a:pPr marL="457200" lvl="1" indent="457200" algn="l" defTabSz="1216025">
+              <a:lnSpc>
+                <a:spcPct val="130000"/>
+              </a:lnSpc>
+              <a:spcBef>
+                <a:spcPct val="20000"/>
+              </a:spcBef>
+              <a:buFont typeface="Arial" panose="020B0604020202090204" pitchFamily="34" charset="0"/>
+            </a:pPr>
+            <a:r>
+              <a:rPr lang="en-US" altLang="en-US" sz="3200" b="1" dirty="0">
+                <a:solidFill>
+                  <a:srgbClr val="404040"/>
+                </a:solidFill>
+                <a:ea typeface="Calibri" panose="020F0502020204030204" pitchFamily="34" charset="0"/>
+                <a:sym typeface="Arial" panose="020B0604020202090204" pitchFamily="34" charset="0"/>
+              </a:rPr>
+              <a:t>Part 1</a:t>
+            </a:r>
+            <a:r>
+              <a:rPr lang="en-US" altLang="en-US" sz="3200" dirty="0">
+                <a:solidFill>
+                  <a:srgbClr val="404040"/>
+                </a:solidFill>
+                <a:ea typeface="Calibri" panose="020F0502020204030204" pitchFamily="34" charset="0"/>
+                <a:sym typeface="Arial" panose="020B0604020202090204" pitchFamily="34" charset="0"/>
+              </a:rPr>
+              <a:t>: Clean and process the flight dataset</a:t>
+            </a:r>
+            <a:endParaRPr lang="en-US" altLang="en-US" sz="3200" dirty="0">
+              <a:solidFill>
+                <a:srgbClr val="404040"/>
+              </a:solidFill>
+              <a:ea typeface="Calibri" panose="020F0502020204030204" pitchFamily="34" charset="0"/>
+              <a:sym typeface="Arial" panose="020B0604020202090204" pitchFamily="34" charset="0"/>
+            </a:endParaRPr>
+          </a:p>
+          <a:p>
+            <a:pPr marL="457200" lvl="1" indent="457200" algn="l" defTabSz="1216025">
+              <a:lnSpc>
+                <a:spcPct val="130000"/>
+              </a:lnSpc>
+              <a:spcBef>
+                <a:spcPct val="20000"/>
+              </a:spcBef>
+              <a:buFont typeface="Arial" panose="020B0604020202090204" pitchFamily="34" charset="0"/>
+            </a:pPr>
+            <a:r>
+              <a:rPr lang="en-US" altLang="en-US" sz="3200" b="1" dirty="0">
+                <a:solidFill>
+                  <a:srgbClr val="404040"/>
+                </a:solidFill>
+                <a:ea typeface="Calibri" panose="020F0502020204030204" pitchFamily="34" charset="0"/>
+                <a:sym typeface="Arial" panose="020B0604020202090204" pitchFamily="34" charset="0"/>
+              </a:rPr>
+              <a:t>Part 2</a:t>
+            </a:r>
+            <a:r>
+              <a:rPr lang="en-US" altLang="en-US" sz="3200" dirty="0">
+                <a:solidFill>
+                  <a:srgbClr val="404040"/>
+                </a:solidFill>
+                <a:ea typeface="Calibri" panose="020F0502020204030204" pitchFamily="34" charset="0"/>
+                <a:sym typeface="Arial" panose="020B0604020202090204" pitchFamily="34" charset="0"/>
+              </a:rPr>
+              <a:t>: Identify the major causes of flight delays</a:t>
+            </a:r>
+            <a:endParaRPr lang="en-US" altLang="en-US" sz="3200" dirty="0">
+              <a:solidFill>
+                <a:srgbClr val="404040"/>
+              </a:solidFill>
+              <a:ea typeface="Calibri" panose="020F0502020204030204" pitchFamily="34" charset="0"/>
+              <a:sym typeface="Arial" panose="020B0604020202090204" pitchFamily="34" charset="0"/>
+            </a:endParaRPr>
+          </a:p>
+          <a:p>
+            <a:pPr marL="457200" lvl="1" indent="457200" algn="l" defTabSz="1216025">
+              <a:lnSpc>
+                <a:spcPct val="130000"/>
+              </a:lnSpc>
+              <a:spcBef>
+                <a:spcPct val="20000"/>
+              </a:spcBef>
+              <a:buFont typeface="Arial" panose="020B0604020202090204" pitchFamily="34" charset="0"/>
+            </a:pPr>
+            <a:r>
+              <a:rPr lang="en-US" altLang="en-US" sz="3200" b="1" dirty="0">
+                <a:solidFill>
+                  <a:srgbClr val="404040"/>
+                </a:solidFill>
+                <a:ea typeface="Calibri" panose="020F0502020204030204" pitchFamily="34" charset="0"/>
+                <a:sym typeface="Arial" panose="020B0604020202090204" pitchFamily="34" charset="0"/>
+              </a:rPr>
+              <a:t>Part 3</a:t>
+            </a:r>
+            <a:r>
+              <a:rPr lang="en-US" altLang="en-US" sz="3200" dirty="0">
+                <a:solidFill>
+                  <a:srgbClr val="404040"/>
+                </a:solidFill>
+                <a:ea typeface="Calibri" panose="020F0502020204030204" pitchFamily="34" charset="0"/>
+                <a:sym typeface="Arial" panose="020B0604020202090204" pitchFamily="34" charset="0"/>
+              </a:rPr>
+              <a:t>: Explore how factors like distance or weather influence delays</a:t>
+            </a:r>
+            <a:endParaRPr lang="en-US" altLang="en-US" sz="3200" dirty="0">
+              <a:solidFill>
+                <a:srgbClr val="404040"/>
+              </a:solidFill>
+              <a:ea typeface="Calibri" panose="020F0502020204030204" pitchFamily="34" charset="0"/>
+              <a:sym typeface="Arial" panose="020B0604020202090204" pitchFamily="34" charset="0"/>
+            </a:endParaRPr>
+          </a:p>
+          <a:p>
+            <a:pPr marL="457200" lvl="1" indent="457200" algn="l" defTabSz="1216025">
+              <a:lnSpc>
+                <a:spcPct val="130000"/>
+              </a:lnSpc>
+              <a:spcBef>
+                <a:spcPct val="20000"/>
+              </a:spcBef>
+              <a:buFont typeface="Arial" panose="020B0604020202090204" pitchFamily="34" charset="0"/>
+            </a:pPr>
+            <a:r>
+              <a:rPr lang="en-US" altLang="en-US" sz="3200" b="1" dirty="0">
+                <a:solidFill>
+                  <a:srgbClr val="404040"/>
+                </a:solidFill>
+                <a:ea typeface="Calibri" panose="020F0502020204030204" pitchFamily="34" charset="0"/>
+                <a:sym typeface="Arial" panose="020B0604020202090204" pitchFamily="34" charset="0"/>
+              </a:rPr>
+              <a:t>Part 4</a:t>
+            </a:r>
+            <a:r>
+              <a:rPr lang="en-US" altLang="en-US" sz="3200" dirty="0">
+                <a:solidFill>
+                  <a:srgbClr val="404040"/>
+                </a:solidFill>
+                <a:ea typeface="Calibri" panose="020F0502020204030204" pitchFamily="34" charset="0"/>
+                <a:sym typeface="Arial" panose="020B0604020202090204" pitchFamily="34" charset="0"/>
+              </a:rPr>
+              <a:t>: Visualize the delay patterns clearly</a:t>
+            </a:r>
+            <a:endParaRPr lang="en-US" altLang="en-US" sz="3200" dirty="0">
+              <a:solidFill>
+                <a:srgbClr val="404040"/>
+              </a:solidFill>
+              <a:ea typeface="Calibri" panose="020F0502020204030204" pitchFamily="34" charset="0"/>
+              <a:sym typeface="Arial" panose="020B0604020202090204" pitchFamily="34" charset="0"/>
+            </a:endParaRPr>
+          </a:p>
+        </p:txBody>
+      </p:sp>
+    </p:spTree>
+  </p:cSld>
+  <p:clrMapOvr>
+    <a:masterClrMapping/>
+  </p:clrMapOvr>
+  <p:transition spd="slow">
+    <p:wipe/>
+  </p:transition>
+</p:sld>
+</file>
+
+<file path=ppt/slides/slide3.xml><?xml version="1.0" encoding="utf-8"?>
+<p:sld xmlns:a="http://schemas.openxmlformats.org/drawingml/2006/main" xmlns:r="http://schemas.openxmlformats.org/officeDocument/2006/relationships" xmlns:p="http://schemas.openxmlformats.org/presentationml/2006/main">
+  <p:cSld>
+    <p:spTree>
+      <p:nvGrpSpPr>
+        <p:cNvPr id="1" name=""/>
+        <p:cNvGrpSpPr/>
+        <p:nvPr/>
+      </p:nvGrpSpPr>
+      <p:grpSpPr/>
+      <p:pic>
+        <p:nvPicPr>
+          <p:cNvPr id="10241" name="图片 3"/>
+          <p:cNvPicPr>
+            <a:picLocks noChangeAspect="1"/>
+          </p:cNvPicPr>
+          <p:nvPr/>
+        </p:nvPicPr>
+        <p:blipFill>
+          <a:blip r:embed="rId1"/>
+          <a:srcRect l="5727" r="16841" b="26530"/>
+          <a:stretch>
+            <a:fillRect/>
+          </a:stretch>
+        </p:blipFill>
+        <p:spPr>
+          <a:xfrm>
+            <a:off x="0" y="0"/>
+            <a:ext cx="12192000" cy="6858000"/>
+          </a:xfrm>
+          <a:prstGeom prst="rect">
+            <a:avLst/>
+          </a:prstGeom>
+          <a:noFill/>
+          <a:ln w="9525">
+            <a:noFill/>
+          </a:ln>
+        </p:spPr>
+      </p:pic>
+      <p:sp>
+        <p:nvSpPr>
+          <p:cNvPr id="10250" name="文本框 28"/>
+          <p:cNvSpPr txBox="1"/>
+          <p:nvPr/>
+        </p:nvSpPr>
+        <p:spPr>
+          <a:xfrm>
+            <a:off x="96520" y="90805"/>
+            <a:ext cx="3989070" cy="645160"/>
+          </a:xfrm>
+          <a:prstGeom prst="rect">
+            <a:avLst/>
+          </a:prstGeom>
+          <a:noFill/>
+          <a:ln w="9525">
+            <a:noFill/>
+          </a:ln>
+        </p:spPr>
+        <p:txBody>
+          <a:bodyPr wrap="square" anchor="t">
+            <a:spAutoFit/>
+          </a:bodyPr>
+          <a:p>
+            <a:pPr>
+              <a:buFont typeface="Arial" panose="020B0604020202090204" pitchFamily="34" charset="0"/>
+            </a:pPr>
+            <a:r>
+              <a:rPr lang="en-US" altLang="en-US" sz="3600" b="1" dirty="0">
+                <a:solidFill>
+                  <a:srgbClr val="404040"/>
+                </a:solidFill>
+                <a:ea typeface="Calibri" panose="020F0502020204030204" pitchFamily="34" charset="0"/>
+              </a:rPr>
+              <a:t>Data Preparation</a:t>
+            </a:r>
+            <a:endParaRPr lang="en-US" altLang="en-US" sz="3600" b="1" dirty="0">
+              <a:solidFill>
+                <a:srgbClr val="404040"/>
+              </a:solidFill>
+              <a:ea typeface="Calibri" panose="020F0502020204030204" pitchFamily="34" charset="0"/>
+            </a:endParaRPr>
+          </a:p>
+        </p:txBody>
+      </p:sp>
+      <p:sp>
+        <p:nvSpPr>
+          <p:cNvPr id="12" name="矩形 11"/>
+          <p:cNvSpPr/>
+          <p:nvPr/>
+        </p:nvSpPr>
+        <p:spPr>
+          <a:xfrm>
+            <a:off x="356870" y="857885"/>
+            <a:ext cx="11423015" cy="5657850"/>
+          </a:xfrm>
+          <a:prstGeom prst="rect">
+            <a:avLst/>
+          </a:prstGeom>
+          <a:noFill/>
+          <a:ln>
+            <a:solidFill>
+              <a:schemeClr val="tx1"/>
+            </a:solidFill>
+          </a:ln>
+        </p:spPr>
+        <p:style>
+          <a:lnRef idx="2">
+            <a:schemeClr val="accent1">
+              <a:shade val="50000"/>
+            </a:schemeClr>
+          </a:lnRef>
+          <a:fillRef idx="1">
+            <a:schemeClr val="accent1"/>
+          </a:fillRef>
+          <a:effectRef idx="0">
+            <a:schemeClr val="accent1"/>
+          </a:effectRef>
+          <a:fontRef idx="minor">
+            <a:schemeClr val="lt1"/>
+          </a:fontRef>
+        </p:style>
+        <p:txBody>
+          <a:bodyPr anchor="ctr"/>
+          <a:lstStyle/>
+          <a:p>
+            <a:pPr marL="0" marR="0" lvl="0" indent="0" algn="ctr" defTabSz="914400" rtl="0" eaLnBrk="1" fontAlgn="auto" latinLnBrk="0" hangingPunct="1">
+              <a:lnSpc>
+                <a:spcPct val="100000"/>
+              </a:lnSpc>
+              <a:spcBef>
+                <a:spcPts val="0"/>
+              </a:spcBef>
+              <a:spcAft>
+                <a:spcPts val="0"/>
+              </a:spcAft>
+              <a:buClrTx/>
+              <a:buSzTx/>
+              <a:buFontTx/>
+              <a:buNone/>
+              <a:defRPr/>
+            </a:pPr>
+            <a:endParaRPr kumimoji="0" lang="zh-CN" altLang="en-US" sz="1800" b="0" i="0" u="none" strike="noStrike" kern="1200" cap="none" spc="0" normalizeH="0" baseline="0" noProof="0">
+              <a:ln>
+                <a:noFill/>
+              </a:ln>
+              <a:solidFill>
+                <a:schemeClr val="lt1"/>
+              </a:solidFill>
+              <a:effectLst/>
+              <a:uLnTx/>
+              <a:uFillTx/>
+              <a:latin typeface="+mn-lt"/>
+              <a:ea typeface="+mn-ea"/>
+              <a:cs typeface="+mn-cs"/>
+            </a:endParaRPr>
+          </a:p>
+        </p:txBody>
+      </p:sp>
+      <p:sp>
+        <p:nvSpPr>
+          <p:cNvPr id="10253" name="文本框 6"/>
+          <p:cNvSpPr txBox="1"/>
+          <p:nvPr/>
+        </p:nvSpPr>
+        <p:spPr>
+          <a:xfrm>
+            <a:off x="956945" y="1922780"/>
+            <a:ext cx="9671685" cy="735965"/>
+          </a:xfrm>
+          <a:prstGeom prst="rect">
+            <a:avLst/>
+          </a:prstGeom>
+          <a:noFill/>
+          <a:ln w="9525">
+            <a:noFill/>
+          </a:ln>
+        </p:spPr>
+        <p:txBody>
+          <a:bodyPr wrap="square" anchor="t">
+            <a:noAutofit/>
+          </a:bodyPr>
+          <a:p>
+            <a:pPr>
+              <a:buFont typeface="Arial" panose="020B0604020202090204" pitchFamily="34" charset="0"/>
+            </a:pPr>
+            <a:endParaRPr lang="en-US" altLang="en-US" sz="3200" b="1" dirty="0">
+              <a:solidFill>
+                <a:srgbClr val="404040"/>
+              </a:solidFill>
+              <a:ea typeface="Calibri" panose="020F0502020204030204" pitchFamily="34" charset="0"/>
+            </a:endParaRPr>
+          </a:p>
+        </p:txBody>
+      </p:sp>
+      <p:sp>
+        <p:nvSpPr>
+          <p:cNvPr id="10255" name="矩形 8"/>
+          <p:cNvSpPr/>
+          <p:nvPr/>
+        </p:nvSpPr>
+        <p:spPr>
+          <a:xfrm>
+            <a:off x="550545" y="1143635"/>
+            <a:ext cx="11118215" cy="5241925"/>
+          </a:xfrm>
+          <a:prstGeom prst="rect">
+            <a:avLst/>
+          </a:prstGeom>
+          <a:noFill/>
+          <a:ln w="9525">
+            <a:noFill/>
+          </a:ln>
+        </p:spPr>
+        <p:txBody>
+          <a:bodyPr wrap="square" lIns="0" tIns="0" rIns="0" bIns="0" anchor="t">
+            <a:noAutofit/>
+          </a:bodyPr>
+          <a:p>
+            <a:pPr marL="457200" lvl="1" indent="457200" algn="l" defTabSz="1216025">
+              <a:lnSpc>
+                <a:spcPct val="90000"/>
+              </a:lnSpc>
+              <a:spcBef>
+                <a:spcPct val="20000"/>
+              </a:spcBef>
+              <a:buFont typeface="Arial" panose="020B0604020202090204" pitchFamily="34" charset="0"/>
+            </a:pPr>
+            <a:r>
+              <a:rPr lang="en-US" altLang="en-US" sz="2400" dirty="0">
+                <a:solidFill>
+                  <a:srgbClr val="404040"/>
+                </a:solidFill>
+                <a:ea typeface="Calibri" panose="020F0502020204030204" pitchFamily="34" charset="0"/>
+                <a:sym typeface="Arial" panose="020B0604020202090204" pitchFamily="34" charset="0"/>
+              </a:rPr>
+              <a:t>Dataset Overview: Where I got the dataset?</a:t>
+            </a:r>
+            <a:endParaRPr lang="en-US" altLang="en-US" sz="2400" dirty="0">
+              <a:solidFill>
+                <a:srgbClr val="404040"/>
+              </a:solidFill>
+              <a:ea typeface="Calibri" panose="020F0502020204030204" pitchFamily="34" charset="0"/>
+              <a:sym typeface="Arial" panose="020B0604020202090204" pitchFamily="34" charset="0"/>
+            </a:endParaRPr>
+          </a:p>
+          <a:p>
+            <a:pPr marL="457200" lvl="1" indent="457200" algn="l" defTabSz="1216025">
+              <a:lnSpc>
+                <a:spcPct val="90000"/>
+              </a:lnSpc>
+              <a:spcBef>
+                <a:spcPct val="20000"/>
+              </a:spcBef>
+              <a:buFont typeface="Arial" panose="020B0604020202090204" pitchFamily="34" charset="0"/>
+            </a:pPr>
+            <a:r>
+              <a:rPr lang="en-US" altLang="en-US" sz="1800" dirty="0">
+                <a:solidFill>
+                  <a:srgbClr val="404040"/>
+                </a:solidFill>
+                <a:ea typeface="Calibri" panose="020F0502020204030204" pitchFamily="34" charset="0"/>
+                <a:sym typeface="Arial" panose="020B0604020202090204" pitchFamily="34" charset="0"/>
+              </a:rPr>
+              <a:t>Link: https://www.kaggle.com/code/fabiendaniel/predicting-flight-delays-tutorial</a:t>
+            </a:r>
+            <a:endParaRPr lang="en-US" altLang="en-US" sz="1800" dirty="0">
+              <a:solidFill>
+                <a:srgbClr val="404040"/>
+              </a:solidFill>
+              <a:ea typeface="Calibri" panose="020F0502020204030204" pitchFamily="34" charset="0"/>
+              <a:sym typeface="Arial" panose="020B0604020202090204" pitchFamily="34" charset="0"/>
+            </a:endParaRPr>
+          </a:p>
+          <a:p>
+            <a:pPr marL="457200" lvl="1" indent="457200" algn="l" defTabSz="1216025">
+              <a:lnSpc>
+                <a:spcPct val="90000"/>
+              </a:lnSpc>
+              <a:spcBef>
+                <a:spcPct val="20000"/>
+              </a:spcBef>
+              <a:buFont typeface="Arial" panose="020B0604020202090204" pitchFamily="34" charset="0"/>
+            </a:pPr>
+            <a:endParaRPr lang="en-US" altLang="en-US" sz="2400" dirty="0">
+              <a:solidFill>
+                <a:srgbClr val="404040"/>
+              </a:solidFill>
+              <a:ea typeface="Calibri" panose="020F0502020204030204" pitchFamily="34" charset="0"/>
+              <a:sym typeface="Arial" panose="020B0604020202090204" pitchFamily="34" charset="0"/>
+            </a:endParaRPr>
+          </a:p>
+          <a:p>
+            <a:pPr marL="457200" lvl="1" indent="457200" algn="l" defTabSz="1216025">
+              <a:lnSpc>
+                <a:spcPct val="90000"/>
+              </a:lnSpc>
+              <a:spcBef>
+                <a:spcPct val="20000"/>
+              </a:spcBef>
+              <a:buFont typeface="Arial" panose="020B0604020202090204" pitchFamily="34" charset="0"/>
+            </a:pPr>
+            <a:endParaRPr lang="en-US" altLang="en-US" sz="2400" dirty="0">
+              <a:solidFill>
+                <a:srgbClr val="404040"/>
+              </a:solidFill>
+              <a:ea typeface="Calibri" panose="020F0502020204030204" pitchFamily="34" charset="0"/>
+              <a:sym typeface="Arial" panose="020B0604020202090204" pitchFamily="34" charset="0"/>
+            </a:endParaRPr>
+          </a:p>
+        </p:txBody>
+      </p:sp>
+      <p:pic>
+        <p:nvPicPr>
+          <p:cNvPr id="2" name="Picture 1" descr="Screenshot 2025-11-04 at 5.09.03 PM"/>
+          <p:cNvPicPr>
+            <a:picLocks noChangeAspect="1"/>
+          </p:cNvPicPr>
+          <p:nvPr/>
+        </p:nvPicPr>
+        <p:blipFill>
+          <a:blip r:embed="rId2"/>
+          <a:stretch>
+            <a:fillRect/>
+          </a:stretch>
+        </p:blipFill>
+        <p:spPr>
+          <a:xfrm>
+            <a:off x="956945" y="1864995"/>
+            <a:ext cx="7232650" cy="4520565"/>
+          </a:xfrm>
+          <a:prstGeom prst="rect">
+            <a:avLst/>
+          </a:prstGeom>
+          <a:ln>
+            <a:solidFill>
+              <a:schemeClr val="accent1"/>
+            </a:solidFill>
+          </a:ln>
+        </p:spPr>
+      </p:pic>
+      <p:pic>
+        <p:nvPicPr>
+          <p:cNvPr id="3" name="Picture 2" descr="Screenshot 2025-11-04 at 5.10.40 PM"/>
+          <p:cNvPicPr>
+            <a:picLocks noChangeAspect="1"/>
+          </p:cNvPicPr>
+          <p:nvPr/>
+        </p:nvPicPr>
+        <p:blipFill>
+          <a:blip r:embed="rId3"/>
+          <a:stretch>
+            <a:fillRect/>
+          </a:stretch>
+        </p:blipFill>
+        <p:spPr>
+          <a:xfrm>
+            <a:off x="7907020" y="2499995"/>
+            <a:ext cx="3491230" cy="3250565"/>
+          </a:xfrm>
+          <a:prstGeom prst="rect">
+            <a:avLst/>
+          </a:prstGeom>
+          <a:ln>
+            <a:solidFill>
+              <a:schemeClr val="accent1"/>
+            </a:solidFill>
+          </a:ln>
+        </p:spPr>
+      </p:pic>
+    </p:spTree>
+  </p:cSld>
+  <p:clrMapOvr>
+    <a:masterClrMapping/>
+  </p:clrMapOvr>
+  <p:transition spd="slow">
+    <p:wipe/>
+  </p:transition>
+</p:sld>
+</file>
+
+<file path=ppt/slides/slide4.xml><?xml version="1.0" encoding="utf-8"?>
+<p:sld xmlns:a="http://schemas.openxmlformats.org/drawingml/2006/main" xmlns:r="http://schemas.openxmlformats.org/officeDocument/2006/relationships" xmlns:p="http://schemas.openxmlformats.org/presentationml/2006/main">
+  <p:cSld>
+    <p:spTree>
+      <p:nvGrpSpPr>
+        <p:cNvPr id="1" name=""/>
+        <p:cNvGrpSpPr/>
+        <p:nvPr/>
+      </p:nvGrpSpPr>
+      <p:grpSpPr/>
+      <p:pic>
+        <p:nvPicPr>
+          <p:cNvPr id="10241" name="图片 3"/>
+          <p:cNvPicPr>
+            <a:picLocks noChangeAspect="1"/>
+          </p:cNvPicPr>
+          <p:nvPr/>
+        </p:nvPicPr>
+        <p:blipFill>
+          <a:blip r:embed="rId1"/>
+          <a:srcRect l="5727" r="16841" b="26530"/>
+          <a:stretch>
+            <a:fillRect/>
+          </a:stretch>
+        </p:blipFill>
+        <p:spPr>
+          <a:xfrm>
+            <a:off x="0" y="0"/>
+            <a:ext cx="12192000" cy="6858000"/>
+          </a:xfrm>
+          <a:prstGeom prst="rect">
+            <a:avLst/>
+          </a:prstGeom>
+          <a:noFill/>
+          <a:ln w="9525">
+            <a:noFill/>
+          </a:ln>
+        </p:spPr>
+      </p:pic>
+      <p:sp>
+        <p:nvSpPr>
+          <p:cNvPr id="10250" name="文本框 28"/>
+          <p:cNvSpPr txBox="1"/>
+          <p:nvPr/>
+        </p:nvSpPr>
+        <p:spPr>
+          <a:xfrm>
+            <a:off x="96520" y="90805"/>
+            <a:ext cx="3989070" cy="645160"/>
+          </a:xfrm>
+          <a:prstGeom prst="rect">
+            <a:avLst/>
+          </a:prstGeom>
+          <a:noFill/>
+          <a:ln w="9525">
+            <a:noFill/>
+          </a:ln>
+        </p:spPr>
+        <p:txBody>
+          <a:bodyPr wrap="square" anchor="t">
+            <a:spAutoFit/>
+          </a:bodyPr>
+          <a:p>
+            <a:pPr>
+              <a:buFont typeface="Arial" panose="020B0604020202090204" pitchFamily="34" charset="0"/>
+            </a:pPr>
+            <a:r>
+              <a:rPr lang="en-US" altLang="en-US" sz="3600" b="1" dirty="0">
+                <a:solidFill>
+                  <a:srgbClr val="404040"/>
+                </a:solidFill>
+                <a:ea typeface="Calibri" panose="020F0502020204030204" pitchFamily="34" charset="0"/>
+              </a:rPr>
+              <a:t>Data Preparation</a:t>
+            </a:r>
+            <a:endParaRPr lang="en-US" altLang="en-US" sz="3600" b="1" dirty="0">
+              <a:solidFill>
+                <a:srgbClr val="404040"/>
+              </a:solidFill>
+              <a:ea typeface="Calibri" panose="020F0502020204030204" pitchFamily="34" charset="0"/>
+            </a:endParaRPr>
+          </a:p>
+        </p:txBody>
+      </p:sp>
+      <p:sp>
+        <p:nvSpPr>
+          <p:cNvPr id="12" name="矩形 11"/>
+          <p:cNvSpPr/>
+          <p:nvPr/>
+        </p:nvSpPr>
+        <p:spPr>
+          <a:xfrm>
+            <a:off x="356870" y="857885"/>
+            <a:ext cx="11423015" cy="5657850"/>
+          </a:xfrm>
+          <a:prstGeom prst="rect">
+            <a:avLst/>
+          </a:prstGeom>
+          <a:noFill/>
+          <a:ln>
+            <a:solidFill>
+              <a:schemeClr val="tx1"/>
+            </a:solidFill>
+          </a:ln>
+        </p:spPr>
+        <p:style>
+          <a:lnRef idx="2">
+            <a:schemeClr val="accent1">
+              <a:shade val="50000"/>
+            </a:schemeClr>
+          </a:lnRef>
+          <a:fillRef idx="1">
+            <a:schemeClr val="accent1"/>
+          </a:fillRef>
+          <a:effectRef idx="0">
+            <a:schemeClr val="accent1"/>
+          </a:effectRef>
+          <a:fontRef idx="minor">
+            <a:schemeClr val="lt1"/>
+          </a:fontRef>
+        </p:style>
+        <p:txBody>
+          <a:bodyPr anchor="ctr"/>
+          <a:lstStyle/>
+          <a:p>
+            <a:pPr marL="0" marR="0" lvl="0" indent="0" algn="ctr" defTabSz="914400" rtl="0" eaLnBrk="1" fontAlgn="auto" latinLnBrk="0" hangingPunct="1">
+              <a:lnSpc>
+                <a:spcPct val="100000"/>
+              </a:lnSpc>
+              <a:spcBef>
+                <a:spcPts val="0"/>
+              </a:spcBef>
+              <a:spcAft>
+                <a:spcPts val="0"/>
+              </a:spcAft>
+              <a:buClrTx/>
+              <a:buSzTx/>
+              <a:buFontTx/>
+              <a:buNone/>
+              <a:defRPr/>
+            </a:pPr>
+            <a:endParaRPr kumimoji="0" lang="zh-CN" altLang="en-US" sz="1800" b="0" i="0" u="none" strike="noStrike" kern="1200" cap="none" spc="0" normalizeH="0" baseline="0" noProof="0">
+              <a:ln>
+                <a:noFill/>
+              </a:ln>
+              <a:solidFill>
+                <a:schemeClr val="lt1"/>
+              </a:solidFill>
+              <a:effectLst/>
+              <a:uLnTx/>
+              <a:uFillTx/>
+              <a:latin typeface="+mn-lt"/>
+              <a:ea typeface="+mn-ea"/>
+              <a:cs typeface="+mn-cs"/>
+            </a:endParaRPr>
+          </a:p>
+        </p:txBody>
+      </p:sp>
+      <p:sp>
+        <p:nvSpPr>
+          <p:cNvPr id="10253" name="文本框 6"/>
+          <p:cNvSpPr txBox="1"/>
+          <p:nvPr/>
+        </p:nvSpPr>
+        <p:spPr>
+          <a:xfrm>
+            <a:off x="956945" y="1922780"/>
+            <a:ext cx="9671685" cy="735965"/>
+          </a:xfrm>
+          <a:prstGeom prst="rect">
+            <a:avLst/>
+          </a:prstGeom>
+          <a:noFill/>
+          <a:ln w="9525">
+            <a:noFill/>
+          </a:ln>
+        </p:spPr>
+        <p:txBody>
+          <a:bodyPr wrap="square" anchor="t">
+            <a:noAutofit/>
+          </a:bodyPr>
+          <a:p>
+            <a:pPr>
+              <a:buFont typeface="Arial" panose="020B0604020202090204" pitchFamily="34" charset="0"/>
+            </a:pPr>
+            <a:endParaRPr lang="en-US" altLang="en-US" sz="3200" b="1" dirty="0">
+              <a:solidFill>
+                <a:srgbClr val="404040"/>
+              </a:solidFill>
+              <a:ea typeface="Calibri" panose="020F0502020204030204" pitchFamily="34" charset="0"/>
+            </a:endParaRPr>
+          </a:p>
+        </p:txBody>
+      </p:sp>
+      <p:sp>
+        <p:nvSpPr>
+          <p:cNvPr id="10255" name="矩形 8"/>
+          <p:cNvSpPr/>
+          <p:nvPr/>
+        </p:nvSpPr>
+        <p:spPr>
+          <a:xfrm>
+            <a:off x="550545" y="1022985"/>
+            <a:ext cx="11118215" cy="5362575"/>
+          </a:xfrm>
+          <a:prstGeom prst="rect">
+            <a:avLst/>
+          </a:prstGeom>
+          <a:noFill/>
+          <a:ln w="9525">
+            <a:noFill/>
+          </a:ln>
+        </p:spPr>
+        <p:txBody>
+          <a:bodyPr wrap="square" lIns="0" tIns="0" rIns="0" bIns="0" anchor="t">
+            <a:noAutofit/>
+          </a:bodyPr>
+          <a:p>
+            <a:pPr marL="457200" lvl="1" indent="457200" algn="l" defTabSz="1216025">
+              <a:lnSpc>
+                <a:spcPct val="90000"/>
+              </a:lnSpc>
+              <a:spcBef>
+                <a:spcPct val="20000"/>
+              </a:spcBef>
+              <a:buFont typeface="Arial" panose="020B0604020202090204" pitchFamily="34" charset="0"/>
+            </a:pPr>
+            <a:r>
+              <a:rPr lang="en-US" altLang="en-US" sz="2400" dirty="0">
+                <a:solidFill>
+                  <a:srgbClr val="404040"/>
+                </a:solidFill>
+                <a:ea typeface="Calibri" panose="020F0502020204030204" pitchFamily="34" charset="0"/>
+                <a:sym typeface="Arial" panose="020B0604020202090204" pitchFamily="34" charset="0"/>
+              </a:rPr>
+              <a:t>What’s inside?</a:t>
+            </a:r>
+            <a:endParaRPr lang="en-US" altLang="en-US" sz="2400" dirty="0">
+              <a:solidFill>
+                <a:srgbClr val="404040"/>
+              </a:solidFill>
+              <a:ea typeface="Calibri" panose="020F0502020204030204" pitchFamily="34" charset="0"/>
+              <a:sym typeface="Arial" panose="020B0604020202090204" pitchFamily="34" charset="0"/>
+            </a:endParaRPr>
+          </a:p>
+        </p:txBody>
+      </p:sp>
+      <p:pic>
+        <p:nvPicPr>
+          <p:cNvPr id="3" name="Picture 2" descr="Screenshot 2025-11-04 at 5.11.43 PM"/>
+          <p:cNvPicPr>
+            <a:picLocks noChangeAspect="1"/>
+          </p:cNvPicPr>
+          <p:nvPr/>
+        </p:nvPicPr>
+        <p:blipFill>
+          <a:blip r:embed="rId2"/>
+          <a:srcRect b="55466"/>
+          <a:stretch>
+            <a:fillRect/>
+          </a:stretch>
+        </p:blipFill>
+        <p:spPr>
+          <a:xfrm>
+            <a:off x="6626860" y="1092835"/>
+            <a:ext cx="5279390" cy="4286885"/>
+          </a:xfrm>
+          <a:prstGeom prst="rect">
+            <a:avLst/>
+          </a:prstGeom>
+          <a:ln>
+            <a:solidFill>
+              <a:schemeClr val="accent1"/>
+            </a:solidFill>
+          </a:ln>
+        </p:spPr>
+      </p:pic>
+      <p:sp>
+        <p:nvSpPr>
+          <p:cNvPr id="4" name="Rectangles 3"/>
+          <p:cNvSpPr/>
+          <p:nvPr/>
+        </p:nvSpPr>
+        <p:spPr>
+          <a:xfrm>
+            <a:off x="8373745" y="3612515"/>
+            <a:ext cx="1578610" cy="256540"/>
+          </a:xfrm>
+          <a:prstGeom prst="rect">
+            <a:avLst/>
+          </a:prstGeom>
+          <a:noFill/>
+          <a:ln w="28575">
+            <a:solidFill>
+              <a:srgbClr val="FF0000"/>
+            </a:solidFill>
+          </a:ln>
+          <a:extLst>
+            <a:ext uri="{909E8E84-426E-40DD-AFC4-6F175D3DCCD1}">
+              <a14:hiddenFill xmlns:a14="http://schemas.microsoft.com/office/drawing/2010/main">
+                <a:solidFill>
+                  <a:schemeClr val="accent1"/>
+                </a:solidFill>
+              </a14:hiddenFill>
+            </a:ext>
+          </a:extLst>
+        </p:spPr>
+        <p:style>
+          <a:lnRef idx="2">
+            <a:schemeClr val="accent1">
+              <a:lumMod val="75000"/>
+            </a:schemeClr>
+          </a:lnRef>
+          <a:fillRef idx="1">
+            <a:schemeClr val="accent1"/>
+          </a:fillRef>
+          <a:effectRef idx="0">
+            <a:srgbClr val="FFFFFF"/>
+          </a:effectRef>
+          <a:fontRef idx="minor">
+            <a:schemeClr val="lt1"/>
+          </a:fontRef>
+        </p:style>
+        <p:txBody>
+          <a:bodyPr rtlCol="0" anchor="ctr"/>
+          <a:p>
+            <a:pPr algn="ctr"/>
+            <a:endParaRPr lang="en-US"/>
+          </a:p>
+        </p:txBody>
+      </p:sp>
+      <p:pic>
+        <p:nvPicPr>
+          <p:cNvPr id="5" name="Picture 4" descr="Screenshot 2025-11-04 at 5.12.52 PM"/>
+          <p:cNvPicPr>
+            <a:picLocks noChangeAspect="1"/>
+          </p:cNvPicPr>
+          <p:nvPr/>
+        </p:nvPicPr>
+        <p:blipFill>
+          <a:blip r:embed="rId3"/>
+          <a:stretch>
+            <a:fillRect/>
+          </a:stretch>
+        </p:blipFill>
+        <p:spPr>
+          <a:xfrm>
+            <a:off x="1023620" y="4449445"/>
+            <a:ext cx="6179820" cy="1254125"/>
+          </a:xfrm>
+          <a:prstGeom prst="rect">
+            <a:avLst/>
+          </a:prstGeom>
+          <a:ln w="28575">
+            <a:solidFill>
+              <a:srgbClr val="FF0000"/>
+            </a:solidFill>
+          </a:ln>
+        </p:spPr>
+      </p:pic>
+      <p:cxnSp>
+        <p:nvCxnSpPr>
+          <p:cNvPr id="6" name="Straight Connector 5"/>
+          <p:cNvCxnSpPr/>
+          <p:nvPr/>
+        </p:nvCxnSpPr>
+        <p:spPr>
+          <a:xfrm flipH="1">
+            <a:off x="7226846" y="3638391"/>
+            <a:ext cx="1180465" cy="820420"/>
+          </a:xfrm>
+          <a:prstGeom prst="line">
+            <a:avLst/>
+          </a:prstGeom>
+          <a:ln w="28575" cap="flat" cmpd="sng">
+            <a:solidFill>
+              <a:srgbClr val="FF0000"/>
+            </a:solidFill>
+            <a:prstDash val="solid"/>
+            <a:miter lim="800000"/>
+            <a:headEnd type="none"/>
+            <a:tailEnd type="none"/>
+          </a:ln>
+        </p:spPr>
+        <p:style>
+          <a:lnRef idx="2">
+            <a:schemeClr val="accent1"/>
+          </a:lnRef>
+          <a:fillRef idx="0">
+            <a:srgbClr val="FFFFFF"/>
+          </a:fillRef>
+          <a:effectRef idx="0">
+            <a:srgbClr val="FFFFFF"/>
+          </a:effectRef>
+          <a:fontRef idx="minor">
+            <a:schemeClr val="tx1"/>
+          </a:fontRef>
+        </p:style>
+      </p:cxnSp>
+      <p:cxnSp>
+        <p:nvCxnSpPr>
+          <p:cNvPr id="7" name="Straight Connector 6"/>
+          <p:cNvCxnSpPr/>
+          <p:nvPr/>
+        </p:nvCxnSpPr>
+        <p:spPr>
+          <a:xfrm flipH="1">
+            <a:off x="7240181" y="3858736"/>
+            <a:ext cx="1151255" cy="1811020"/>
+          </a:xfrm>
+          <a:prstGeom prst="line">
+            <a:avLst/>
+          </a:prstGeom>
+          <a:ln w="28575" cap="flat" cmpd="sng">
+            <a:solidFill>
+              <a:srgbClr val="FF0000"/>
+            </a:solidFill>
+            <a:prstDash val="solid"/>
+            <a:miter lim="800000"/>
+            <a:headEnd type="none"/>
+            <a:tailEnd type="none"/>
+          </a:ln>
+        </p:spPr>
+        <p:style>
+          <a:lnRef idx="2">
+            <a:schemeClr val="accent1"/>
+          </a:lnRef>
+          <a:fillRef idx="0">
+            <a:srgbClr val="FFFFFF"/>
+          </a:fillRef>
+          <a:effectRef idx="0">
+            <a:srgbClr val="FFFFFF"/>
+          </a:effectRef>
+          <a:fontRef idx="minor">
+            <a:schemeClr val="tx1"/>
+          </a:fontRef>
+        </p:style>
+      </p:cxnSp>
+      <p:pic>
+        <p:nvPicPr>
+          <p:cNvPr id="8" name="Picture 7" descr="Screenshot 2025-11-04 at 5.20.59 PM"/>
+          <p:cNvPicPr>
+            <a:picLocks noChangeAspect="1"/>
+          </p:cNvPicPr>
+          <p:nvPr/>
+        </p:nvPicPr>
+        <p:blipFill>
+          <a:blip r:embed="rId4"/>
+          <a:stretch>
+            <a:fillRect/>
+          </a:stretch>
+        </p:blipFill>
+        <p:spPr>
+          <a:xfrm>
+            <a:off x="789305" y="1696085"/>
+            <a:ext cx="5306695" cy="2061845"/>
+          </a:xfrm>
+          <a:prstGeom prst="rect">
+            <a:avLst/>
+          </a:prstGeom>
+          <a:ln>
+            <a:solidFill>
+              <a:schemeClr val="accent1"/>
+            </a:solidFill>
+          </a:ln>
+        </p:spPr>
+      </p:pic>
+    </p:spTree>
+  </p:cSld>
+  <p:clrMapOvr>
+    <a:masterClrMapping/>
+  </p:clrMapOvr>
+  <p:transition spd="slow">
+    <p:wipe/>
+  </p:transition>
+</p:sld>
+</file>
+
+<file path=ppt/slides/slide5.xml><?xml version="1.0" encoding="utf-8"?>
+<p:sld xmlns:a="http://schemas.openxmlformats.org/drawingml/2006/main" xmlns:r="http://schemas.openxmlformats.org/officeDocument/2006/relationships" xmlns:p="http://schemas.openxmlformats.org/presentationml/2006/main">
+  <p:cSld>
+    <p:spTree>
+      <p:nvGrpSpPr>
+        <p:cNvPr id="1" name=""/>
+        <p:cNvGrpSpPr/>
+        <p:nvPr/>
+      </p:nvGrpSpPr>
+      <p:grpSpPr/>
+      <p:pic>
+        <p:nvPicPr>
+          <p:cNvPr id="10241" name="图片 3"/>
+          <p:cNvPicPr>
+            <a:picLocks noChangeAspect="1"/>
+          </p:cNvPicPr>
+          <p:nvPr/>
+        </p:nvPicPr>
+        <p:blipFill>
+          <a:blip r:embed="rId1"/>
+          <a:srcRect l="5727" r="16841" b="26530"/>
+          <a:stretch>
+            <a:fillRect/>
+          </a:stretch>
+        </p:blipFill>
+        <p:spPr>
+          <a:xfrm>
+            <a:off x="0" y="0"/>
+            <a:ext cx="12192000" cy="6858000"/>
+          </a:xfrm>
+          <a:prstGeom prst="rect">
+            <a:avLst/>
+          </a:prstGeom>
+          <a:noFill/>
+          <a:ln w="9525">
+            <a:noFill/>
+          </a:ln>
+        </p:spPr>
+      </p:pic>
+      <p:sp>
+        <p:nvSpPr>
+          <p:cNvPr id="10250" name="文本框 28"/>
+          <p:cNvSpPr txBox="1"/>
+          <p:nvPr/>
+        </p:nvSpPr>
+        <p:spPr>
+          <a:xfrm>
+            <a:off x="96520" y="90805"/>
+            <a:ext cx="3989070" cy="645160"/>
+          </a:xfrm>
+          <a:prstGeom prst="rect">
+            <a:avLst/>
+          </a:prstGeom>
+          <a:noFill/>
+          <a:ln w="9525">
+            <a:noFill/>
+          </a:ln>
+        </p:spPr>
+        <p:txBody>
+          <a:bodyPr wrap="square" anchor="t">
+            <a:spAutoFit/>
+          </a:bodyPr>
+          <a:p>
+            <a:pPr>
+              <a:buFont typeface="Arial" panose="020B0604020202090204" pitchFamily="34" charset="0"/>
+            </a:pPr>
+            <a:r>
+              <a:rPr lang="en-US" altLang="en-US" sz="3600" b="1" dirty="0">
+                <a:solidFill>
+                  <a:srgbClr val="404040"/>
+                </a:solidFill>
+                <a:ea typeface="Calibri" panose="020F0502020204030204" pitchFamily="34" charset="0"/>
+              </a:rPr>
+              <a:t>Data Preparation</a:t>
+            </a:r>
+            <a:endParaRPr lang="en-US" altLang="en-US" sz="3600" b="1" dirty="0">
+              <a:solidFill>
+                <a:srgbClr val="404040"/>
+              </a:solidFill>
+              <a:ea typeface="Calibri" panose="020F0502020204030204" pitchFamily="34" charset="0"/>
+            </a:endParaRPr>
+          </a:p>
+        </p:txBody>
+      </p:sp>
+      <p:sp>
+        <p:nvSpPr>
+          <p:cNvPr id="12" name="矩形 11"/>
+          <p:cNvSpPr/>
+          <p:nvPr/>
+        </p:nvSpPr>
+        <p:spPr>
+          <a:xfrm>
+            <a:off x="356870" y="857885"/>
+            <a:ext cx="11423015" cy="5657850"/>
+          </a:xfrm>
+          <a:prstGeom prst="rect">
+            <a:avLst/>
+          </a:prstGeom>
+          <a:noFill/>
+          <a:ln>
+            <a:solidFill>
+              <a:schemeClr val="tx1"/>
+            </a:solidFill>
+          </a:ln>
+        </p:spPr>
+        <p:style>
+          <a:lnRef idx="2">
+            <a:schemeClr val="accent1">
+              <a:shade val="50000"/>
+            </a:schemeClr>
+          </a:lnRef>
+          <a:fillRef idx="1">
+            <a:schemeClr val="accent1"/>
+          </a:fillRef>
+          <a:effectRef idx="0">
+            <a:schemeClr val="accent1"/>
+          </a:effectRef>
+          <a:fontRef idx="minor">
+            <a:schemeClr val="lt1"/>
+          </a:fontRef>
+        </p:style>
+        <p:txBody>
+          <a:bodyPr anchor="ctr"/>
+          <a:lstStyle/>
+          <a:p>
+            <a:pPr marL="0" marR="0" lvl="0" indent="0" algn="ctr" defTabSz="914400" rtl="0" eaLnBrk="1" fontAlgn="auto" latinLnBrk="0" hangingPunct="1">
+              <a:lnSpc>
+                <a:spcPct val="100000"/>
+              </a:lnSpc>
+              <a:spcBef>
+                <a:spcPts val="0"/>
+              </a:spcBef>
+              <a:spcAft>
+                <a:spcPts val="0"/>
+              </a:spcAft>
+              <a:buClrTx/>
+              <a:buSzTx/>
+              <a:buFontTx/>
+              <a:buNone/>
+              <a:defRPr/>
+            </a:pPr>
+            <a:endParaRPr kumimoji="0" lang="zh-CN" altLang="en-US" sz="1800" b="0" i="0" u="none" strike="noStrike" kern="1200" cap="none" spc="0" normalizeH="0" baseline="0" noProof="0">
+              <a:ln>
+                <a:noFill/>
+              </a:ln>
+              <a:solidFill>
+                <a:schemeClr val="lt1"/>
+              </a:solidFill>
+              <a:effectLst/>
+              <a:uLnTx/>
+              <a:uFillTx/>
+              <a:latin typeface="+mn-lt"/>
+              <a:ea typeface="+mn-ea"/>
+              <a:cs typeface="+mn-cs"/>
+            </a:endParaRPr>
+          </a:p>
+        </p:txBody>
+      </p:sp>
+      <p:sp>
+        <p:nvSpPr>
+          <p:cNvPr id="10253" name="文本框 6"/>
+          <p:cNvSpPr txBox="1"/>
+          <p:nvPr/>
+        </p:nvSpPr>
+        <p:spPr>
+          <a:xfrm>
+            <a:off x="956945" y="1922780"/>
+            <a:ext cx="9671685" cy="735965"/>
+          </a:xfrm>
+          <a:prstGeom prst="rect">
+            <a:avLst/>
+          </a:prstGeom>
+          <a:noFill/>
+          <a:ln w="9525">
+            <a:noFill/>
+          </a:ln>
+        </p:spPr>
+        <p:txBody>
+          <a:bodyPr wrap="square" anchor="t">
+            <a:noAutofit/>
+          </a:bodyPr>
+          <a:p>
+            <a:pPr>
+              <a:buFont typeface="Arial" panose="020B0604020202090204" pitchFamily="34" charset="0"/>
+            </a:pPr>
+            <a:endParaRPr lang="en-US" altLang="en-US" sz="3200" b="1" dirty="0">
+              <a:solidFill>
+                <a:srgbClr val="404040"/>
+              </a:solidFill>
+              <a:ea typeface="Calibri" panose="020F0502020204030204" pitchFamily="34" charset="0"/>
+            </a:endParaRPr>
+          </a:p>
+        </p:txBody>
+      </p:sp>
+      <p:sp>
+        <p:nvSpPr>
+          <p:cNvPr id="10255" name="矩形 8"/>
+          <p:cNvSpPr/>
+          <p:nvPr/>
+        </p:nvSpPr>
+        <p:spPr>
+          <a:xfrm>
+            <a:off x="550545" y="1022985"/>
+            <a:ext cx="11118215" cy="5362575"/>
+          </a:xfrm>
+          <a:prstGeom prst="rect">
+            <a:avLst/>
+          </a:prstGeom>
+          <a:noFill/>
+          <a:ln w="9525">
+            <a:noFill/>
+          </a:ln>
+        </p:spPr>
+        <p:txBody>
+          <a:bodyPr wrap="square" lIns="0" tIns="0" rIns="0" bIns="0" anchor="t">
+            <a:noAutofit/>
+          </a:bodyPr>
+          <a:p>
+            <a:pPr marL="457200" lvl="1" indent="457200" algn="l" defTabSz="1216025">
+              <a:lnSpc>
+                <a:spcPct val="90000"/>
+              </a:lnSpc>
+              <a:spcBef>
+                <a:spcPct val="20000"/>
+              </a:spcBef>
+              <a:buFont typeface="Arial" panose="020B0604020202090204" pitchFamily="34" charset="0"/>
+            </a:pPr>
+            <a:r>
+              <a:rPr lang="en-US" altLang="en-US" sz="2400" dirty="0">
+                <a:solidFill>
+                  <a:srgbClr val="404040"/>
+                </a:solidFill>
+                <a:ea typeface="Calibri" panose="020F0502020204030204" pitchFamily="34" charset="0"/>
+                <a:sym typeface="Arial" panose="020B0604020202090204" pitchFamily="34" charset="0"/>
+              </a:rPr>
+              <a:t>Trimming &amp; Creating a new file to work with</a:t>
+            </a:r>
+            <a:endParaRPr lang="en-US" altLang="en-US" sz="2400" dirty="0">
+              <a:solidFill>
+                <a:srgbClr val="404040"/>
+              </a:solidFill>
+              <a:ea typeface="Calibri" panose="020F0502020204030204" pitchFamily="34" charset="0"/>
+              <a:sym typeface="Arial" panose="020B0604020202090204" pitchFamily="34" charset="0"/>
+            </a:endParaRPr>
+          </a:p>
+        </p:txBody>
+      </p:sp>
+      <p:pic>
+        <p:nvPicPr>
+          <p:cNvPr id="2" name="Picture 1" descr="Screenshot 2025-11-04 at 5.17.34 PM"/>
+          <p:cNvPicPr>
+            <a:picLocks noChangeAspect="1"/>
+          </p:cNvPicPr>
+          <p:nvPr/>
+        </p:nvPicPr>
+        <p:blipFill>
+          <a:blip r:embed="rId2"/>
+          <a:stretch>
+            <a:fillRect/>
+          </a:stretch>
+        </p:blipFill>
+        <p:spPr>
+          <a:xfrm>
+            <a:off x="469900" y="1762760"/>
+            <a:ext cx="5349875" cy="3332480"/>
+          </a:xfrm>
+          <a:prstGeom prst="rect">
+            <a:avLst/>
+          </a:prstGeom>
+          <a:ln>
+            <a:solidFill>
+              <a:schemeClr val="accent1"/>
+            </a:solidFill>
+          </a:ln>
+        </p:spPr>
+      </p:pic>
+      <p:sp>
+        <p:nvSpPr>
+          <p:cNvPr id="4" name="Rectangles 3"/>
+          <p:cNvSpPr/>
+          <p:nvPr/>
+        </p:nvSpPr>
+        <p:spPr>
+          <a:xfrm>
+            <a:off x="1781175" y="3287395"/>
+            <a:ext cx="1578610" cy="256540"/>
+          </a:xfrm>
+          <a:prstGeom prst="rect">
+            <a:avLst/>
+          </a:prstGeom>
+          <a:noFill/>
+          <a:ln w="28575">
+            <a:solidFill>
+              <a:srgbClr val="FF0000"/>
+            </a:solidFill>
+          </a:ln>
+          <a:extLst>
+            <a:ext uri="{909E8E84-426E-40DD-AFC4-6F175D3DCCD1}">
+              <a14:hiddenFill xmlns:a14="http://schemas.microsoft.com/office/drawing/2010/main">
+                <a:solidFill>
+                  <a:schemeClr val="accent1"/>
+                </a:solidFill>
+              </a14:hiddenFill>
+            </a:ext>
+          </a:extLst>
+        </p:spPr>
+        <p:style>
+          <a:lnRef idx="2">
+            <a:schemeClr val="accent1">
+              <a:lumMod val="75000"/>
+            </a:schemeClr>
+          </a:lnRef>
+          <a:fillRef idx="1">
+            <a:schemeClr val="accent1"/>
+          </a:fillRef>
+          <a:effectRef idx="0">
+            <a:srgbClr val="FFFFFF"/>
+          </a:effectRef>
+          <a:fontRef idx="minor">
+            <a:schemeClr val="lt1"/>
+          </a:fontRef>
+        </p:style>
+        <p:txBody>
+          <a:bodyPr rtlCol="0" anchor="ctr"/>
+          <a:p>
+            <a:pPr algn="ctr"/>
+            <a:endParaRPr lang="en-US"/>
+          </a:p>
+        </p:txBody>
+      </p:sp>
+      <p:pic>
+        <p:nvPicPr>
+          <p:cNvPr id="8" name="Picture 7" descr="Screenshot 2025-11-04 at 5.18.35 PM"/>
+          <p:cNvPicPr>
+            <a:picLocks noChangeAspect="1"/>
+          </p:cNvPicPr>
+          <p:nvPr/>
+        </p:nvPicPr>
+        <p:blipFill>
+          <a:blip r:embed="rId3"/>
+          <a:stretch>
+            <a:fillRect/>
+          </a:stretch>
+        </p:blipFill>
+        <p:spPr>
+          <a:xfrm>
+            <a:off x="6280150" y="1416685"/>
+            <a:ext cx="4686300" cy="889000"/>
+          </a:xfrm>
+          <a:prstGeom prst="rect">
+            <a:avLst/>
+          </a:prstGeom>
+          <a:ln>
+            <a:solidFill>
+              <a:schemeClr val="accent1"/>
+            </a:solidFill>
+          </a:ln>
+        </p:spPr>
+      </p:pic>
+      <p:pic>
+        <p:nvPicPr>
+          <p:cNvPr id="10" name="Picture 9" descr="Screenshot 2025-11-04 at 5.21.26 PM"/>
+          <p:cNvPicPr>
+            <a:picLocks noChangeAspect="1"/>
+          </p:cNvPicPr>
+          <p:nvPr/>
+        </p:nvPicPr>
+        <p:blipFill>
+          <a:blip r:embed="rId4"/>
+          <a:stretch>
+            <a:fillRect/>
+          </a:stretch>
+        </p:blipFill>
+        <p:spPr>
+          <a:xfrm>
+            <a:off x="6280150" y="2489200"/>
+            <a:ext cx="4686300" cy="3333115"/>
+          </a:xfrm>
+          <a:prstGeom prst="rect">
+            <a:avLst/>
+          </a:prstGeom>
+          <a:ln>
+            <a:solidFill>
+              <a:schemeClr val="accent1"/>
+            </a:solidFill>
+          </a:ln>
+        </p:spPr>
+      </p:pic>
+    </p:spTree>
+  </p:cSld>
+  <p:clrMapOvr>
+    <a:masterClrMapping/>
+  </p:clrMapOvr>
+  <p:transition spd="slow">
+    <p:wipe/>
+  </p:transition>
+</p:sld>
+</file>
+
+<file path=ppt/slides/slide6.xml><?xml version="1.0" encoding="utf-8"?>
+<p:sld xmlns:a="http://schemas.openxmlformats.org/drawingml/2006/main" xmlns:r="http://schemas.openxmlformats.org/officeDocument/2006/relationships" xmlns:p="http://schemas.openxmlformats.org/presentationml/2006/main">
+  <p:cSld>
+    <p:spTree>
+      <p:nvGrpSpPr>
+        <p:cNvPr id="1" name=""/>
+        <p:cNvGrpSpPr/>
+        <p:nvPr/>
+      </p:nvGrpSpPr>
+      <p:grpSpPr/>
+      <p:pic>
+        <p:nvPicPr>
+          <p:cNvPr id="10241" name="图片 3"/>
+          <p:cNvPicPr>
+            <a:picLocks noChangeAspect="1"/>
+          </p:cNvPicPr>
+          <p:nvPr/>
+        </p:nvPicPr>
+        <p:blipFill>
+          <a:blip r:embed="rId1"/>
+          <a:srcRect l="5727" r="16841" b="26530"/>
+          <a:stretch>
+            <a:fillRect/>
+          </a:stretch>
+        </p:blipFill>
+        <p:spPr>
+          <a:xfrm>
+            <a:off x="0" y="0"/>
+            <a:ext cx="12192000" cy="6858000"/>
+          </a:xfrm>
+          <a:prstGeom prst="rect">
+            <a:avLst/>
+          </a:prstGeom>
+          <a:noFill/>
+          <a:ln w="9525">
+            <a:noFill/>
+          </a:ln>
+        </p:spPr>
+      </p:pic>
+      <p:sp>
+        <p:nvSpPr>
+          <p:cNvPr id="10250" name="文本框 28"/>
+          <p:cNvSpPr txBox="1"/>
+          <p:nvPr/>
+        </p:nvSpPr>
+        <p:spPr>
+          <a:xfrm>
+            <a:off x="96520" y="90805"/>
+            <a:ext cx="3989070" cy="645160"/>
+          </a:xfrm>
+          <a:prstGeom prst="rect">
+            <a:avLst/>
+          </a:prstGeom>
+          <a:noFill/>
+          <a:ln w="9525">
+            <a:noFill/>
+          </a:ln>
+        </p:spPr>
+        <p:txBody>
+          <a:bodyPr wrap="square" anchor="t">
+            <a:spAutoFit/>
+          </a:bodyPr>
+          <a:p>
+            <a:pPr>
+              <a:buFont typeface="Arial" panose="020B0604020202090204" pitchFamily="34" charset="0"/>
+            </a:pPr>
+            <a:r>
+              <a:rPr lang="en-US" altLang="en-US" sz="3600" b="1" dirty="0">
+                <a:solidFill>
+                  <a:srgbClr val="404040"/>
+                </a:solidFill>
+                <a:ea typeface="Calibri" panose="020F0502020204030204" pitchFamily="34" charset="0"/>
+              </a:rPr>
+              <a:t>Data Preparation</a:t>
+            </a:r>
+            <a:endParaRPr lang="en-US" altLang="en-US" sz="3600" b="1" dirty="0">
+              <a:solidFill>
+                <a:srgbClr val="404040"/>
+              </a:solidFill>
+              <a:ea typeface="Calibri" panose="020F0502020204030204" pitchFamily="34" charset="0"/>
+            </a:endParaRPr>
+          </a:p>
+        </p:txBody>
+      </p:sp>
+      <p:sp>
+        <p:nvSpPr>
+          <p:cNvPr id="10253" name="文本框 6"/>
+          <p:cNvSpPr txBox="1"/>
+          <p:nvPr/>
+        </p:nvSpPr>
+        <p:spPr>
+          <a:xfrm>
+            <a:off x="956945" y="1922780"/>
+            <a:ext cx="9671685" cy="735965"/>
+          </a:xfrm>
+          <a:prstGeom prst="rect">
+            <a:avLst/>
+          </a:prstGeom>
+          <a:noFill/>
+          <a:ln w="9525">
+            <a:noFill/>
+          </a:ln>
+        </p:spPr>
+        <p:txBody>
+          <a:bodyPr wrap="square" anchor="t">
+            <a:noAutofit/>
+          </a:bodyPr>
+          <a:p>
+            <a:pPr>
+              <a:buFont typeface="Arial" panose="020B0604020202090204" pitchFamily="34" charset="0"/>
+            </a:pPr>
+            <a:endParaRPr lang="en-US" altLang="en-US" sz="3200" b="1" dirty="0">
+              <a:solidFill>
+                <a:srgbClr val="404040"/>
+              </a:solidFill>
+              <a:ea typeface="Calibri" panose="020F0502020204030204" pitchFamily="34" charset="0"/>
+            </a:endParaRPr>
+          </a:p>
+        </p:txBody>
+      </p:sp>
+      <p:sp>
+        <p:nvSpPr>
+          <p:cNvPr id="10255" name="矩形 8"/>
+          <p:cNvSpPr/>
+          <p:nvPr/>
+        </p:nvSpPr>
+        <p:spPr>
+          <a:xfrm>
+            <a:off x="550545" y="1022985"/>
+            <a:ext cx="11118215" cy="5362575"/>
+          </a:xfrm>
+          <a:prstGeom prst="rect">
+            <a:avLst/>
+          </a:prstGeom>
+          <a:noFill/>
+          <a:ln w="9525">
+            <a:noFill/>
+          </a:ln>
+        </p:spPr>
+        <p:txBody>
+          <a:bodyPr wrap="square" lIns="0" tIns="0" rIns="0" bIns="0" anchor="t">
+            <a:noAutofit/>
+          </a:bodyPr>
+          <a:p>
+            <a:pPr marL="457200" lvl="1" indent="457200" algn="l" defTabSz="1216025">
+              <a:lnSpc>
+                <a:spcPct val="90000"/>
+              </a:lnSpc>
+              <a:spcBef>
+                <a:spcPct val="20000"/>
+              </a:spcBef>
+              <a:buFont typeface="Arial" panose="020B0604020202090204" pitchFamily="34" charset="0"/>
+            </a:pPr>
+            <a:r>
+              <a:rPr lang="en-US" altLang="en-US" sz="2400" dirty="0">
+                <a:solidFill>
+                  <a:srgbClr val="404040"/>
+                </a:solidFill>
+                <a:ea typeface="Calibri" panose="020F0502020204030204" pitchFamily="34" charset="0"/>
+                <a:sym typeface="Arial" panose="020B0604020202090204" pitchFamily="34" charset="0"/>
+              </a:rPr>
+              <a:t>Working on a new file:</a:t>
+            </a:r>
+            <a:endParaRPr lang="en-US" altLang="en-US" sz="2400" dirty="0">
+              <a:solidFill>
+                <a:srgbClr val="404040"/>
+              </a:solidFill>
+              <a:ea typeface="Calibri" panose="020F0502020204030204" pitchFamily="34" charset="0"/>
+              <a:sym typeface="Arial" panose="020B0604020202090204" pitchFamily="34" charset="0"/>
+            </a:endParaRPr>
+          </a:p>
+        </p:txBody>
+      </p:sp>
+      <p:pic>
+        <p:nvPicPr>
+          <p:cNvPr id="3" name="Picture 2" descr="Screenshot 2025-11-04 at 5.24.01 PM"/>
+          <p:cNvPicPr>
+            <a:picLocks noChangeAspect="1"/>
+          </p:cNvPicPr>
+          <p:nvPr/>
+        </p:nvPicPr>
+        <p:blipFill>
+          <a:blip r:embed="rId2"/>
+          <a:stretch>
+            <a:fillRect/>
+          </a:stretch>
+        </p:blipFill>
+        <p:spPr>
+          <a:xfrm>
+            <a:off x="311785" y="1598930"/>
+            <a:ext cx="4620895" cy="3630930"/>
+          </a:xfrm>
+          <a:prstGeom prst="rect">
+            <a:avLst/>
+          </a:prstGeom>
+        </p:spPr>
+      </p:pic>
+      <p:pic>
+        <p:nvPicPr>
+          <p:cNvPr id="5" name="Picture 4" descr="Screenshot 2025-11-04 at 5.24.15 PM"/>
+          <p:cNvPicPr>
+            <a:picLocks noChangeAspect="1"/>
+          </p:cNvPicPr>
+          <p:nvPr/>
+        </p:nvPicPr>
+        <p:blipFill>
+          <a:blip r:embed="rId3"/>
+          <a:srcRect r="44860"/>
+          <a:stretch>
+            <a:fillRect/>
+          </a:stretch>
+        </p:blipFill>
+        <p:spPr>
+          <a:xfrm>
+            <a:off x="5204460" y="1598930"/>
+            <a:ext cx="6668770" cy="3675380"/>
+          </a:xfrm>
+          <a:prstGeom prst="rect">
+            <a:avLst/>
+          </a:prstGeom>
+        </p:spPr>
+      </p:pic>
+    </p:spTree>
+  </p:cSld>
+  <p:clrMapOvr>
+    <a:masterClrMapping/>
+  </p:clrMapOvr>
+  <p:transition spd="slow">
+    <p:wipe/>
+  </p:transition>
+</p:sld>
+</file>
+
+<file path=ppt/slides/slide7.xml><?xml version="1.0" encoding="utf-8"?>
+<p:sld xmlns:a="http://schemas.openxmlformats.org/drawingml/2006/main" xmlns:r="http://schemas.openxmlformats.org/officeDocument/2006/relationships" xmlns:p="http://schemas.openxmlformats.org/presentationml/2006/main">
+  <p:cSld>
+    <p:spTree>
+      <p:nvGrpSpPr>
+        <p:cNvPr id="1" name=""/>
+        <p:cNvGrpSpPr/>
+        <p:nvPr/>
+      </p:nvGrpSpPr>
+      <p:grpSpPr/>
+      <p:pic>
+        <p:nvPicPr>
+          <p:cNvPr id="10241" name="图片 3"/>
+          <p:cNvPicPr>
+            <a:picLocks noChangeAspect="1"/>
+          </p:cNvPicPr>
+          <p:nvPr/>
+        </p:nvPicPr>
+        <p:blipFill>
+          <a:blip r:embed="rId1"/>
+          <a:srcRect l="5727" r="16841" b="26530"/>
+          <a:stretch>
+            <a:fillRect/>
+          </a:stretch>
+        </p:blipFill>
+        <p:spPr>
+          <a:xfrm>
+            <a:off x="0" y="0"/>
+            <a:ext cx="12192000" cy="6858000"/>
+          </a:xfrm>
+          <a:prstGeom prst="rect">
+            <a:avLst/>
+          </a:prstGeom>
+          <a:noFill/>
+          <a:ln w="9525">
+            <a:noFill/>
+          </a:ln>
+        </p:spPr>
+      </p:pic>
+      <p:sp>
+        <p:nvSpPr>
+          <p:cNvPr id="10250" name="文本框 28"/>
+          <p:cNvSpPr txBox="1"/>
+          <p:nvPr/>
+        </p:nvSpPr>
+        <p:spPr>
+          <a:xfrm>
+            <a:off x="96520" y="90805"/>
+            <a:ext cx="3989070" cy="645160"/>
+          </a:xfrm>
+          <a:prstGeom prst="rect">
+            <a:avLst/>
+          </a:prstGeom>
+          <a:noFill/>
+          <a:ln w="9525">
+            <a:noFill/>
+          </a:ln>
+        </p:spPr>
+        <p:txBody>
+          <a:bodyPr wrap="square" anchor="t">
+            <a:spAutoFit/>
+          </a:bodyPr>
+          <a:p>
+            <a:pPr>
+              <a:buFont typeface="Arial" panose="020B0604020202090204" pitchFamily="34" charset="0"/>
+            </a:pPr>
+            <a:r>
+              <a:rPr lang="en-US" altLang="en-US" sz="3600" b="1" dirty="0">
+                <a:solidFill>
+                  <a:srgbClr val="404040"/>
+                </a:solidFill>
+                <a:ea typeface="Calibri" panose="020F0502020204030204" pitchFamily="34" charset="0"/>
+              </a:rPr>
+              <a:t>Data Preparation</a:t>
+            </a:r>
+            <a:endParaRPr lang="en-US" altLang="en-US" sz="3600" b="1" dirty="0">
+              <a:solidFill>
+                <a:srgbClr val="404040"/>
+              </a:solidFill>
+              <a:ea typeface="Calibri" panose="020F0502020204030204" pitchFamily="34" charset="0"/>
+            </a:endParaRPr>
+          </a:p>
+        </p:txBody>
+      </p:sp>
+      <p:sp>
+        <p:nvSpPr>
+          <p:cNvPr id="10253" name="文本框 6"/>
+          <p:cNvSpPr txBox="1"/>
+          <p:nvPr/>
+        </p:nvSpPr>
+        <p:spPr>
+          <a:xfrm>
+            <a:off x="956945" y="1922780"/>
+            <a:ext cx="9671685" cy="735965"/>
+          </a:xfrm>
+          <a:prstGeom prst="rect">
+            <a:avLst/>
+          </a:prstGeom>
+          <a:noFill/>
+          <a:ln w="9525">
+            <a:noFill/>
+          </a:ln>
+        </p:spPr>
+        <p:txBody>
+          <a:bodyPr wrap="square" anchor="t">
+            <a:noAutofit/>
+          </a:bodyPr>
+          <a:p>
+            <a:pPr>
+              <a:buFont typeface="Arial" panose="020B0604020202090204" pitchFamily="34" charset="0"/>
+            </a:pPr>
+            <a:endParaRPr lang="en-US" altLang="en-US" sz="3200" b="1" dirty="0">
+              <a:solidFill>
+                <a:srgbClr val="404040"/>
+              </a:solidFill>
+              <a:ea typeface="Calibri" panose="020F0502020204030204" pitchFamily="34" charset="0"/>
+            </a:endParaRPr>
+          </a:p>
+        </p:txBody>
+      </p:sp>
+      <p:sp>
+        <p:nvSpPr>
+          <p:cNvPr id="10255" name="矩形 8"/>
+          <p:cNvSpPr/>
+          <p:nvPr/>
+        </p:nvSpPr>
+        <p:spPr>
+          <a:xfrm>
+            <a:off x="202565" y="1022985"/>
+            <a:ext cx="10509250" cy="1496695"/>
+          </a:xfrm>
+          <a:prstGeom prst="rect">
+            <a:avLst/>
+          </a:prstGeom>
+          <a:noFill/>
+          <a:ln w="9525">
+            <a:noFill/>
+          </a:ln>
+        </p:spPr>
+        <p:txBody>
+          <a:bodyPr wrap="square" lIns="0" tIns="0" rIns="0" bIns="0" anchor="t">
+            <a:noAutofit/>
+          </a:bodyPr>
+          <a:p>
+            <a:pPr marL="457200" lvl="1" indent="457200" algn="l" defTabSz="1216025">
+              <a:lnSpc>
+                <a:spcPct val="90000"/>
+              </a:lnSpc>
+              <a:spcBef>
+                <a:spcPct val="20000"/>
+              </a:spcBef>
+              <a:buFont typeface="Arial" panose="020B0604020202090204" pitchFamily="34" charset="0"/>
+            </a:pPr>
+            <a:r>
+              <a:rPr lang="en-US" altLang="en-US" sz="2000" dirty="0">
+                <a:solidFill>
+                  <a:srgbClr val="404040"/>
+                </a:solidFill>
+                <a:ea typeface="Calibri" panose="020F0502020204030204" pitchFamily="34" charset="0"/>
+                <a:sym typeface="Arial" panose="020B0604020202090204" pitchFamily="34" charset="0"/>
+              </a:rPr>
+              <a:t>I removed unnecessary columns such as ‘Year’, ‘Month’, and ‘UniqueCarrier’ since they had the same values for all flights.</a:t>
+            </a:r>
+            <a:endParaRPr lang="en-US" altLang="en-US" sz="2000" dirty="0">
+              <a:solidFill>
+                <a:srgbClr val="404040"/>
+              </a:solidFill>
+              <a:ea typeface="Calibri" panose="020F0502020204030204" pitchFamily="34" charset="0"/>
+              <a:sym typeface="Arial" panose="020B0604020202090204" pitchFamily="34" charset="0"/>
+            </a:endParaRPr>
+          </a:p>
+          <a:p>
+            <a:pPr marL="457200" lvl="1" indent="457200" algn="l" defTabSz="1216025">
+              <a:lnSpc>
+                <a:spcPct val="90000"/>
+              </a:lnSpc>
+              <a:spcBef>
+                <a:spcPct val="20000"/>
+              </a:spcBef>
+              <a:buFont typeface="Arial" panose="020B0604020202090204" pitchFamily="34" charset="0"/>
+            </a:pPr>
+            <a:r>
+              <a:rPr lang="en-US" altLang="en-US" sz="2000" dirty="0">
+                <a:solidFill>
+                  <a:srgbClr val="404040"/>
+                </a:solidFill>
+                <a:ea typeface="Calibri" panose="020F0502020204030204" pitchFamily="34" charset="0"/>
+                <a:sym typeface="Arial" panose="020B0604020202090204" pitchFamily="34" charset="0"/>
+              </a:rPr>
+              <a:t>I also checked for missing values and handled them properly.</a:t>
+            </a:r>
+            <a:endParaRPr lang="en-US" altLang="en-US" sz="2000" dirty="0">
+              <a:solidFill>
+                <a:srgbClr val="404040"/>
+              </a:solidFill>
+              <a:ea typeface="Calibri" panose="020F0502020204030204" pitchFamily="34" charset="0"/>
+              <a:sym typeface="Arial" panose="020B0604020202090204" pitchFamily="34" charset="0"/>
+            </a:endParaRPr>
+          </a:p>
+        </p:txBody>
+      </p:sp>
+      <p:pic>
+        <p:nvPicPr>
+          <p:cNvPr id="2" name="Picture 1" descr="Screenshot 2025-11-04 at 5.28.22 PM"/>
+          <p:cNvPicPr>
+            <a:picLocks noChangeAspect="1"/>
+          </p:cNvPicPr>
+          <p:nvPr/>
+        </p:nvPicPr>
+        <p:blipFill>
+          <a:blip r:embed="rId2"/>
+          <a:stretch>
+            <a:fillRect/>
+          </a:stretch>
+        </p:blipFill>
+        <p:spPr>
+          <a:xfrm>
+            <a:off x="942975" y="1964690"/>
+            <a:ext cx="10012680" cy="1129665"/>
+          </a:xfrm>
+          <a:prstGeom prst="rect">
+            <a:avLst/>
+          </a:prstGeom>
+        </p:spPr>
+      </p:pic>
+      <p:pic>
+        <p:nvPicPr>
+          <p:cNvPr id="6" name="Picture 5" descr="Screenshot 2025-11-04 at 5.28.58 PM"/>
+          <p:cNvPicPr>
+            <a:picLocks noChangeAspect="1"/>
+          </p:cNvPicPr>
+          <p:nvPr/>
+        </p:nvPicPr>
+        <p:blipFill>
+          <a:blip r:embed="rId3"/>
+          <a:stretch>
+            <a:fillRect/>
+          </a:stretch>
+        </p:blipFill>
+        <p:spPr>
+          <a:xfrm>
+            <a:off x="5831205" y="3175635"/>
+            <a:ext cx="6264275" cy="2758440"/>
+          </a:xfrm>
+          <a:prstGeom prst="rect">
+            <a:avLst/>
+          </a:prstGeom>
+        </p:spPr>
+      </p:pic>
+      <p:pic>
+        <p:nvPicPr>
+          <p:cNvPr id="7" name="Picture 6" descr="Screenshot 2025-11-04 at 5.30.02 PM"/>
+          <p:cNvPicPr>
+            <a:picLocks noChangeAspect="1"/>
+          </p:cNvPicPr>
+          <p:nvPr/>
+        </p:nvPicPr>
+        <p:blipFill>
+          <a:blip r:embed="rId4"/>
+          <a:stretch>
+            <a:fillRect/>
+          </a:stretch>
+        </p:blipFill>
+        <p:spPr>
+          <a:xfrm>
+            <a:off x="248920" y="3175635"/>
+            <a:ext cx="5475605" cy="3283585"/>
+          </a:xfrm>
+          <a:prstGeom prst="rect">
+            <a:avLst/>
+          </a:prstGeom>
+        </p:spPr>
+      </p:pic>
+      <p:sp>
+        <p:nvSpPr>
+          <p:cNvPr id="8" name="Rectangles 7"/>
+          <p:cNvSpPr/>
+          <p:nvPr/>
+        </p:nvSpPr>
+        <p:spPr>
+          <a:xfrm>
+            <a:off x="248920" y="6202680"/>
+            <a:ext cx="1468120" cy="256540"/>
+          </a:xfrm>
+          <a:prstGeom prst="rect">
+            <a:avLst/>
+          </a:prstGeom>
+          <a:noFill/>
+          <a:ln w="28575">
+            <a:solidFill>
+              <a:srgbClr val="FF0000"/>
+            </a:solidFill>
+          </a:ln>
+          <a:extLst>
+            <a:ext uri="{909E8E84-426E-40DD-AFC4-6F175D3DCCD1}">
+              <a14:hiddenFill xmlns:a14="http://schemas.microsoft.com/office/drawing/2010/main">
+                <a:solidFill>
+                  <a:schemeClr val="accent1"/>
+                </a:solidFill>
+              </a14:hiddenFill>
+            </a:ext>
+          </a:extLst>
+        </p:spPr>
+        <p:style>
+          <a:lnRef idx="2">
+            <a:schemeClr val="accent1">
+              <a:lumMod val="75000"/>
+            </a:schemeClr>
+          </a:lnRef>
+          <a:fillRef idx="1">
+            <a:schemeClr val="accent1"/>
+          </a:fillRef>
+          <a:effectRef idx="0">
+            <a:srgbClr val="FFFFFF"/>
+          </a:effectRef>
+          <a:fontRef idx="minor">
+            <a:schemeClr val="lt1"/>
+          </a:fontRef>
+        </p:style>
+        <p:txBody>
+          <a:bodyPr rtlCol="0" anchor="ctr"/>
+          <a:p>
+            <a:pPr algn="ctr"/>
+            <a:endParaRPr lang="en-US"/>
+          </a:p>
+        </p:txBody>
+      </p:sp>
+      <p:sp>
+        <p:nvSpPr>
+          <p:cNvPr id="4" name="Rectangles 3"/>
+          <p:cNvSpPr/>
+          <p:nvPr/>
+        </p:nvSpPr>
+        <p:spPr>
+          <a:xfrm>
+            <a:off x="5831205" y="5677535"/>
+            <a:ext cx="1370330" cy="256540"/>
+          </a:xfrm>
+          <a:prstGeom prst="rect">
+            <a:avLst/>
+          </a:prstGeom>
+          <a:noFill/>
+          <a:ln w="28575">
+            <a:solidFill>
+              <a:srgbClr val="FF0000"/>
+            </a:solidFill>
+          </a:ln>
+          <a:extLst>
+            <a:ext uri="{909E8E84-426E-40DD-AFC4-6F175D3DCCD1}">
+              <a14:hiddenFill xmlns:a14="http://schemas.microsoft.com/office/drawing/2010/main">
+                <a:solidFill>
+                  <a:schemeClr val="accent1"/>
+                </a:solidFill>
+              </a14:hiddenFill>
+            </a:ext>
+          </a:extLst>
+        </p:spPr>
+        <p:style>
+          <a:lnRef idx="2">
+            <a:schemeClr val="accent1">
+              <a:lumMod val="75000"/>
+            </a:schemeClr>
+          </a:lnRef>
+          <a:fillRef idx="1">
+            <a:schemeClr val="accent1"/>
+          </a:fillRef>
+          <a:effectRef idx="0">
+            <a:srgbClr val="FFFFFF"/>
+          </a:effectRef>
+          <a:fontRef idx="minor">
+            <a:schemeClr val="lt1"/>
+          </a:fontRef>
+        </p:style>
+        <p:txBody>
+          <a:bodyPr rtlCol="0" anchor="ctr"/>
+          <a:p>
+            <a:pPr algn="ctr"/>
+            <a:endParaRPr lang="en-US"/>
+          </a:p>
+        </p:txBody>
+      </p:sp>
+    </p:spTree>
+  </p:cSld>
+  <p:clrMapOvr>
+    <a:masterClrMapping/>
+  </p:clrMapOvr>
+  <p:transition spd="slow">
+    <p:wipe/>
+  </p:transition>
+</p:sld>
+</file>
+
+<file path=ppt/slides/slide8.xml><?xml version="1.0" encoding="utf-8"?>
+<p:sld xmlns:a="http://schemas.openxmlformats.org/drawingml/2006/main" xmlns:r="http://schemas.openxmlformats.org/officeDocument/2006/relationships" xmlns:p="http://schemas.openxmlformats.org/presentationml/2006/main">
+  <p:cSld>
+    <p:spTree>
+      <p:nvGrpSpPr>
+        <p:cNvPr id="1" name=""/>
+        <p:cNvGrpSpPr/>
+        <p:nvPr/>
+      </p:nvGrpSpPr>
+      <p:grpSpPr/>
+      <p:pic>
+        <p:nvPicPr>
+          <p:cNvPr id="10241" name="图片 3"/>
+          <p:cNvPicPr>
+            <a:picLocks noChangeAspect="1"/>
+          </p:cNvPicPr>
+          <p:nvPr/>
+        </p:nvPicPr>
+        <p:blipFill>
+          <a:blip r:embed="rId1"/>
+          <a:srcRect l="5727" r="16841" b="26530"/>
+          <a:stretch>
+            <a:fillRect/>
+          </a:stretch>
+        </p:blipFill>
+        <p:spPr>
+          <a:xfrm>
+            <a:off x="0" y="0"/>
+            <a:ext cx="12192000" cy="6858000"/>
+          </a:xfrm>
+          <a:prstGeom prst="rect">
+            <a:avLst/>
+          </a:prstGeom>
+          <a:noFill/>
+          <a:ln w="9525">
+            <a:noFill/>
+          </a:ln>
+        </p:spPr>
+      </p:pic>
+      <p:sp>
+        <p:nvSpPr>
+          <p:cNvPr id="10255" name="矩形 8"/>
+          <p:cNvSpPr/>
+          <p:nvPr/>
+        </p:nvSpPr>
+        <p:spPr>
+          <a:xfrm>
+            <a:off x="6988175" y="200660"/>
+            <a:ext cx="5019675" cy="1223010"/>
+          </a:xfrm>
+          <a:prstGeom prst="rect">
+            <a:avLst/>
+          </a:prstGeom>
+          <a:noFill/>
+          <a:ln w="9525">
+            <a:noFill/>
+          </a:ln>
+        </p:spPr>
+        <p:txBody>
+          <a:bodyPr wrap="square" lIns="0" tIns="0" rIns="0" bIns="0" anchor="t">
+            <a:noAutofit/>
+          </a:bodyPr>
+          <a:p>
+            <a:pPr marL="457200" lvl="1" indent="457200" algn="l" defTabSz="1216025">
+              <a:lnSpc>
+                <a:spcPct val="90000"/>
+              </a:lnSpc>
+              <a:spcBef>
+                <a:spcPct val="20000"/>
+              </a:spcBef>
+              <a:buFont typeface="Arial" panose="020B0604020202090204" pitchFamily="34" charset="0"/>
+            </a:pPr>
+            <a:r>
+              <a:rPr lang="en-US" altLang="en-US" sz="3200" dirty="0">
+                <a:solidFill>
+                  <a:srgbClr val="404040"/>
+                </a:solidFill>
+                <a:ea typeface="Calibri" panose="020F0502020204030204" pitchFamily="34" charset="0"/>
+                <a:sym typeface="Arial" panose="020B0604020202090204" pitchFamily="34" charset="0"/>
+              </a:rPr>
+              <a:t>What are we gonna do with the same values?</a:t>
+            </a:r>
+            <a:endParaRPr lang="en-US" altLang="en-US" sz="3200" dirty="0">
+              <a:solidFill>
+                <a:srgbClr val="404040"/>
+              </a:solidFill>
+              <a:ea typeface="Calibri" panose="020F0502020204030204" pitchFamily="34" charset="0"/>
+              <a:sym typeface="Arial" panose="020B0604020202090204" pitchFamily="34" charset="0"/>
+            </a:endParaRPr>
+          </a:p>
+        </p:txBody>
+      </p:sp>
+      <p:pic>
+        <p:nvPicPr>
+          <p:cNvPr id="3" name="Picture 2" descr="Screenshot 2025-11-04 at 5.32.35 PM"/>
+          <p:cNvPicPr>
+            <a:picLocks noChangeAspect="1"/>
+          </p:cNvPicPr>
+          <p:nvPr/>
+        </p:nvPicPr>
+        <p:blipFill>
+          <a:blip r:embed="rId2"/>
+          <a:stretch>
+            <a:fillRect/>
+          </a:stretch>
+        </p:blipFill>
+        <p:spPr>
+          <a:xfrm>
+            <a:off x="277495" y="187325"/>
+            <a:ext cx="6710680" cy="6576695"/>
+          </a:xfrm>
+          <a:prstGeom prst="rect">
+            <a:avLst/>
+          </a:prstGeom>
+        </p:spPr>
+      </p:pic>
+      <p:sp>
+        <p:nvSpPr>
+          <p:cNvPr id="8" name="Rectangles 7"/>
+          <p:cNvSpPr/>
+          <p:nvPr/>
+        </p:nvSpPr>
+        <p:spPr>
+          <a:xfrm>
+            <a:off x="3718560" y="1022985"/>
+            <a:ext cx="2468880" cy="3220720"/>
+          </a:xfrm>
+          <a:prstGeom prst="rect">
+            <a:avLst/>
+          </a:prstGeom>
+          <a:noFill/>
+          <a:ln w="28575">
+            <a:solidFill>
+              <a:srgbClr val="FF0000"/>
+            </a:solidFill>
+          </a:ln>
+          <a:extLst>
+            <a:ext uri="{909E8E84-426E-40DD-AFC4-6F175D3DCCD1}">
+              <a14:hiddenFill xmlns:a14="http://schemas.microsoft.com/office/drawing/2010/main">
+                <a:solidFill>
+                  <a:schemeClr val="accent1"/>
+                </a:solidFill>
+              </a14:hiddenFill>
+            </a:ext>
+          </a:extLst>
+        </p:spPr>
+        <p:style>
+          <a:lnRef idx="2">
+            <a:schemeClr val="accent1">
+              <a:lumMod val="75000"/>
+            </a:schemeClr>
+          </a:lnRef>
+          <a:fillRef idx="1">
+            <a:schemeClr val="accent1"/>
+          </a:fillRef>
+          <a:effectRef idx="0">
+            <a:srgbClr val="FFFFFF"/>
+          </a:effectRef>
+          <a:fontRef idx="minor">
+            <a:schemeClr val="lt1"/>
+          </a:fontRef>
+        </p:style>
+        <p:txBody>
+          <a:bodyPr rtlCol="0" anchor="ctr"/>
+          <a:p>
+            <a:pPr algn="ctr"/>
+            <a:endParaRPr lang="en-US"/>
+          </a:p>
+        </p:txBody>
+      </p:sp>
+      <p:sp>
+        <p:nvSpPr>
+          <p:cNvPr id="5" name="Rectangles 4"/>
+          <p:cNvSpPr/>
+          <p:nvPr/>
+        </p:nvSpPr>
+        <p:spPr>
+          <a:xfrm>
+            <a:off x="347345" y="6154420"/>
+            <a:ext cx="768985" cy="495300"/>
+          </a:xfrm>
+          <a:prstGeom prst="rect">
+            <a:avLst/>
+          </a:prstGeom>
+          <a:noFill/>
+          <a:ln w="28575">
+            <a:solidFill>
+              <a:srgbClr val="FF0000"/>
+            </a:solidFill>
+          </a:ln>
+          <a:extLst>
+            <a:ext uri="{909E8E84-426E-40DD-AFC4-6F175D3DCCD1}">
+              <a14:hiddenFill xmlns:a14="http://schemas.microsoft.com/office/drawing/2010/main">
+                <a:solidFill>
+                  <a:schemeClr val="accent1"/>
+                </a:solidFill>
+              </a14:hiddenFill>
+            </a:ext>
+          </a:extLst>
+        </p:spPr>
+        <p:style>
+          <a:lnRef idx="2">
+            <a:schemeClr val="accent1">
+              <a:lumMod val="75000"/>
+            </a:schemeClr>
+          </a:lnRef>
+          <a:fillRef idx="1">
+            <a:schemeClr val="accent1"/>
+          </a:fillRef>
+          <a:effectRef idx="0">
+            <a:srgbClr val="FFFFFF"/>
+          </a:effectRef>
+          <a:fontRef idx="minor">
+            <a:schemeClr val="lt1"/>
+          </a:fontRef>
+        </p:style>
+        <p:txBody>
+          <a:bodyPr rtlCol="0" anchor="ctr"/>
+          <a:p>
+            <a:pPr algn="ctr"/>
+            <a:endParaRPr lang="en-US"/>
+          </a:p>
+        </p:txBody>
+      </p:sp>
+      <p:pic>
+        <p:nvPicPr>
+          <p:cNvPr id="9" name="Picture 8" descr="Screenshot 2025-11-04 at 5.34.39 PM"/>
+          <p:cNvPicPr>
+            <a:picLocks noChangeAspect="1"/>
+          </p:cNvPicPr>
+          <p:nvPr/>
+        </p:nvPicPr>
+        <p:blipFill>
+          <a:blip r:embed="rId3"/>
+          <a:stretch>
+            <a:fillRect/>
+          </a:stretch>
+        </p:blipFill>
+        <p:spPr>
+          <a:xfrm>
+            <a:off x="7145655" y="1158240"/>
+            <a:ext cx="4833620" cy="4269740"/>
+          </a:xfrm>
+          <a:prstGeom prst="rect">
+            <a:avLst/>
+          </a:prstGeom>
+        </p:spPr>
+      </p:pic>
+      <p:pic>
+        <p:nvPicPr>
+          <p:cNvPr id="2" name="Picture 1" descr="Screenshot 2025-11-04 at 5.38.19 PM"/>
+          <p:cNvPicPr>
+            <a:picLocks noChangeAspect="1"/>
+          </p:cNvPicPr>
+          <p:nvPr/>
+        </p:nvPicPr>
+        <p:blipFill>
+          <a:blip r:embed="rId4"/>
+          <a:stretch>
+            <a:fillRect/>
+          </a:stretch>
+        </p:blipFill>
+        <p:spPr>
+          <a:xfrm>
+            <a:off x="7841615" y="5481320"/>
+            <a:ext cx="3441700" cy="1168400"/>
+          </a:xfrm>
+          <a:prstGeom prst="rect">
+            <a:avLst/>
+          </a:prstGeom>
+        </p:spPr>
+      </p:pic>
+      <p:cxnSp>
+        <p:nvCxnSpPr>
+          <p:cNvPr id="4" name="Curved Connector 3"/>
+          <p:cNvCxnSpPr/>
+          <p:nvPr/>
+        </p:nvCxnSpPr>
+        <p:spPr>
+          <a:xfrm rot="16200000" flipV="1">
+            <a:off x="6289675" y="4697095"/>
+            <a:ext cx="1708785" cy="1081405"/>
+          </a:xfrm>
+          <a:prstGeom prst="curvedConnector3">
+            <a:avLst>
+              <a:gd name="adj1" fmla="val -3455"/>
+            </a:avLst>
+          </a:prstGeom>
+          <a:ln w="44450">
+            <a:solidFill>
+              <a:srgbClr val="FF0000"/>
+            </a:solidFill>
+            <a:tailEnd type="arrow" w="med" len="med"/>
+          </a:ln>
+        </p:spPr>
+        <p:style>
+          <a:lnRef idx="3">
+            <a:schemeClr val="accent1"/>
+          </a:lnRef>
+          <a:fillRef idx="0">
+            <a:srgbClr val="FFFFFF"/>
+          </a:fillRef>
+          <a:effectRef idx="0">
+            <a:srgbClr val="FFFFFF"/>
+          </a:effectRef>
+          <a:fontRef idx="minor">
+            <a:schemeClr val="tx1"/>
+          </a:fontRef>
+        </p:style>
+      </p:cxnSp>
+    </p:spTree>
+  </p:cSld>
+  <p:clrMapOvr>
+    <a:masterClrMapping/>
+  </p:clrMapOvr>
+  <p:transition spd="slow">
+    <p:wipe/>
+  </p:transition>
+</p:sld>
+</file>
+
+<file path=ppt/slides/slide9.xml><?xml version="1.0" encoding="utf-8"?>
+<p:sld xmlns:a="http://schemas.openxmlformats.org/drawingml/2006/main" xmlns:r="http://schemas.openxmlformats.org/officeDocument/2006/relationships" xmlns:p="http://schemas.openxmlformats.org/presentationml/2006/main">
+  <p:cSld>
+    <p:spTree>
+      <p:nvGrpSpPr>
+        <p:cNvPr id="1" name=""/>
+        <p:cNvGrpSpPr/>
+        <p:nvPr/>
+      </p:nvGrpSpPr>
+      <p:grpSpPr/>
+      <p:pic>
+        <p:nvPicPr>
+          <p:cNvPr id="10241" name="图片 3"/>
+          <p:cNvPicPr>
+            <a:picLocks noChangeAspect="1"/>
+          </p:cNvPicPr>
+          <p:nvPr/>
+        </p:nvPicPr>
+        <p:blipFill>
+          <a:blip r:embed="rId1"/>
+          <a:srcRect l="5727" r="16841" b="26530"/>
+          <a:stretch>
+            <a:fillRect/>
+          </a:stretch>
+        </p:blipFill>
+        <p:spPr>
+          <a:xfrm>
+            <a:off x="0" y="0"/>
+            <a:ext cx="12192000" cy="6858000"/>
+          </a:xfrm>
+          <a:prstGeom prst="rect">
+            <a:avLst/>
+          </a:prstGeom>
+          <a:noFill/>
+          <a:ln w="9525">
+            <a:noFill/>
+          </a:ln>
+        </p:spPr>
+      </p:pic>
+      <p:sp>
+        <p:nvSpPr>
+          <p:cNvPr id="10255" name="矩形 8"/>
+          <p:cNvSpPr/>
+          <p:nvPr/>
+        </p:nvSpPr>
+        <p:spPr>
+          <a:xfrm>
+            <a:off x="96520" y="1494790"/>
+            <a:ext cx="4700905" cy="1533525"/>
+          </a:xfrm>
+          <a:prstGeom prst="rect">
+            <a:avLst/>
+          </a:prstGeom>
+          <a:noFill/>
+          <a:ln w="9525">
+            <a:noFill/>
+          </a:ln>
+        </p:spPr>
+        <p:txBody>
+          <a:bodyPr wrap="square" lIns="0" tIns="0" rIns="0" bIns="0" anchor="t">
+            <a:noAutofit/>
+          </a:bodyPr>
+          <a:p>
+            <a:pPr marL="457200" lvl="1" indent="457200" algn="l" defTabSz="1216025">
+              <a:lnSpc>
+                <a:spcPct val="90000"/>
+              </a:lnSpc>
+              <a:spcBef>
+                <a:spcPct val="20000"/>
+              </a:spcBef>
+              <a:buFont typeface="Arial" panose="020B0604020202090204" pitchFamily="34" charset="0"/>
+            </a:pPr>
+            <a:r>
+              <a:rPr lang="en-US" altLang="en-US" sz="3200" dirty="0">
+                <a:solidFill>
+                  <a:srgbClr val="404040"/>
+                </a:solidFill>
+                <a:ea typeface="Calibri" panose="020F0502020204030204" pitchFamily="34" charset="0"/>
+                <a:sym typeface="Arial" panose="020B0604020202090204" pitchFamily="34" charset="0"/>
+              </a:rPr>
+              <a:t>Let’s check if the are more columns to get rid of</a:t>
+            </a:r>
+            <a:endParaRPr lang="en-US" altLang="en-US" sz="3200" dirty="0">
+              <a:solidFill>
+                <a:srgbClr val="404040"/>
+              </a:solidFill>
+              <a:ea typeface="Calibri" panose="020F0502020204030204" pitchFamily="34" charset="0"/>
+              <a:sym typeface="Arial" panose="020B0604020202090204" pitchFamily="34" charset="0"/>
+            </a:endParaRPr>
+          </a:p>
+        </p:txBody>
+      </p:sp>
+      <p:sp>
+        <p:nvSpPr>
+          <p:cNvPr id="10250" name="文本框 28"/>
+          <p:cNvSpPr txBox="1"/>
+          <p:nvPr/>
+        </p:nvSpPr>
+        <p:spPr>
+          <a:xfrm>
+            <a:off x="96520" y="90805"/>
+            <a:ext cx="3989070" cy="645160"/>
+          </a:xfrm>
+          <a:prstGeom prst="rect">
+            <a:avLst/>
+          </a:prstGeom>
+          <a:noFill/>
+          <a:ln w="9525">
+            <a:noFill/>
+          </a:ln>
+        </p:spPr>
+        <p:txBody>
+          <a:bodyPr wrap="square" anchor="t">
+            <a:spAutoFit/>
+          </a:bodyPr>
+          <a:p>
+            <a:pPr>
+              <a:buFont typeface="Arial" panose="020B0604020202090204" pitchFamily="34" charset="0"/>
+            </a:pPr>
+            <a:r>
+              <a:rPr lang="en-US" altLang="en-US" sz="3600" b="1" dirty="0">
+                <a:solidFill>
+                  <a:srgbClr val="404040"/>
+                </a:solidFill>
+                <a:ea typeface="Calibri" panose="020F0502020204030204" pitchFamily="34" charset="0"/>
+              </a:rPr>
+              <a:t>Data Preparation</a:t>
+            </a:r>
+            <a:endParaRPr lang="en-US" altLang="en-US" sz="3600" b="1" dirty="0">
+              <a:solidFill>
+                <a:srgbClr val="404040"/>
+              </a:solidFill>
+              <a:ea typeface="Calibri" panose="020F0502020204030204" pitchFamily="34" charset="0"/>
+            </a:endParaRPr>
+          </a:p>
+        </p:txBody>
+      </p:sp>
+      <p:pic>
+        <p:nvPicPr>
+          <p:cNvPr id="7" name="Picture 6" descr="Screenshot 2025-11-04 at 5.43.48 PM"/>
+          <p:cNvPicPr>
+            <a:picLocks noChangeAspect="1"/>
+          </p:cNvPicPr>
+          <p:nvPr/>
+        </p:nvPicPr>
+        <p:blipFill>
+          <a:blip r:embed="rId2"/>
+          <a:stretch>
+            <a:fillRect/>
+          </a:stretch>
+        </p:blipFill>
+        <p:spPr>
+          <a:xfrm>
+            <a:off x="6141720" y="332105"/>
+            <a:ext cx="5088255" cy="6193155"/>
+          </a:xfrm>
+          <a:prstGeom prst="rect">
+            <a:avLst/>
+          </a:prstGeom>
+        </p:spPr>
+      </p:pic>
     </p:spTree>
   </p:cSld>
   <p:clrMapOvr>

--- a/Final_Project.pptx
+++ b/Final_Project.pptx
@@ -5,10 +5,10 @@
     <p:sldMasterId id="2147483648" r:id="rId1"/>
   </p:sldMasterIdLst>
   <p:notesMasterIdLst>
-    <p:notesMasterId r:id="rId14"/>
+    <p:notesMasterId r:id="rId24"/>
   </p:notesMasterIdLst>
   <p:handoutMasterIdLst>
-    <p:handoutMasterId r:id="rId15"/>
+    <p:handoutMasterId r:id="rId25"/>
   </p:handoutMasterIdLst>
   <p:sldIdLst>
     <p:sldId id="256" r:id="rId3"/>
@@ -21,7 +21,17 @@
     <p:sldId id="311" r:id="rId10"/>
     <p:sldId id="312" r:id="rId11"/>
     <p:sldId id="313" r:id="rId12"/>
-    <p:sldId id="285" r:id="rId13"/>
+    <p:sldId id="314" r:id="rId13"/>
+    <p:sldId id="315" r:id="rId14"/>
+    <p:sldId id="316" r:id="rId15"/>
+    <p:sldId id="317" r:id="rId16"/>
+    <p:sldId id="318" r:id="rId17"/>
+    <p:sldId id="319" r:id="rId18"/>
+    <p:sldId id="320" r:id="rId19"/>
+    <p:sldId id="321" r:id="rId20"/>
+    <p:sldId id="322" r:id="rId21"/>
+    <p:sldId id="323" r:id="rId22"/>
+    <p:sldId id="285" r:id="rId23"/>
   </p:sldIdLst>
   <p:sldSz cx="12192000" cy="6858000"/>
   <p:notesSz cx="9144000" cy="6858000"/>
@@ -227,7 +237,7 @@
             <a:srgbClr val="A4A3A4"/>
           </p15:clr>
         </p15:guide>
-        <p15:guide id="2" pos="3840" userDrawn="1">
+        <p15:guide id="2" pos="3798" userDrawn="1">
           <p15:clr>
             <a:srgbClr val="A4A3A4"/>
           </p15:clr>
@@ -2551,6 +2561,3099 @@
       <p:grpSpPr/>
       <p:pic>
         <p:nvPicPr>
+          <p:cNvPr id="10241" name="图片 3"/>
+          <p:cNvPicPr>
+            <a:picLocks noChangeAspect="1"/>
+          </p:cNvPicPr>
+          <p:nvPr/>
+        </p:nvPicPr>
+        <p:blipFill>
+          <a:blip r:embed="rId1"/>
+          <a:srcRect l="5727" r="16841" b="26530"/>
+          <a:stretch>
+            <a:fillRect/>
+          </a:stretch>
+        </p:blipFill>
+        <p:spPr>
+          <a:xfrm>
+            <a:off x="0" y="0"/>
+            <a:ext cx="12192000" cy="6858000"/>
+          </a:xfrm>
+          <a:prstGeom prst="rect">
+            <a:avLst/>
+          </a:prstGeom>
+          <a:noFill/>
+          <a:ln w="9525">
+            <a:noFill/>
+          </a:ln>
+        </p:spPr>
+      </p:pic>
+      <p:sp>
+        <p:nvSpPr>
+          <p:cNvPr id="10255" name="矩形 8"/>
+          <p:cNvSpPr/>
+          <p:nvPr/>
+        </p:nvSpPr>
+        <p:spPr>
+          <a:xfrm>
+            <a:off x="96520" y="1102360"/>
+            <a:ext cx="5431155" cy="1533525"/>
+          </a:xfrm>
+          <a:prstGeom prst="rect">
+            <a:avLst/>
+          </a:prstGeom>
+          <a:noFill/>
+          <a:ln w="9525">
+            <a:noFill/>
+          </a:ln>
+        </p:spPr>
+        <p:txBody>
+          <a:bodyPr wrap="square" lIns="0" tIns="0" rIns="0" bIns="0" anchor="t">
+            <a:noAutofit/>
+          </a:bodyPr>
+          <a:p>
+            <a:pPr marL="0" lvl="0" indent="457200" algn="l" defTabSz="1216025">
+              <a:lnSpc>
+                <a:spcPct val="90000"/>
+              </a:lnSpc>
+              <a:spcBef>
+                <a:spcPct val="20000"/>
+              </a:spcBef>
+              <a:buFont typeface="Arial" panose="020B0604020202090204" pitchFamily="34" charset="0"/>
+            </a:pPr>
+            <a:r>
+              <a:rPr lang="en-US" altLang="en-US" sz="2400" dirty="0">
+                <a:solidFill>
+                  <a:srgbClr val="404040"/>
+                </a:solidFill>
+                <a:ea typeface="Calibri" panose="020F0502020204030204" pitchFamily="34" charset="0"/>
+                <a:sym typeface="Arial" panose="020B0604020202090204" pitchFamily="34" charset="0"/>
+              </a:rPr>
+              <a:t>Visualizing the missing values using </a:t>
+            </a:r>
+            <a:r>
+              <a:rPr lang="en-US" altLang="en-US" sz="2400" b="1" dirty="0">
+                <a:solidFill>
+                  <a:srgbClr val="404040"/>
+                </a:solidFill>
+                <a:ea typeface="Calibri" panose="020F0502020204030204" pitchFamily="34" charset="0"/>
+                <a:sym typeface="Arial" panose="020B0604020202090204" pitchFamily="34" charset="0"/>
+              </a:rPr>
+              <a:t>Seaborn</a:t>
+            </a:r>
+            <a:endParaRPr lang="en-US" altLang="en-US" sz="2400" b="1" dirty="0">
+              <a:solidFill>
+                <a:srgbClr val="404040"/>
+              </a:solidFill>
+              <a:ea typeface="Calibri" panose="020F0502020204030204" pitchFamily="34" charset="0"/>
+              <a:sym typeface="Arial" panose="020B0604020202090204" pitchFamily="34" charset="0"/>
+            </a:endParaRPr>
+          </a:p>
+        </p:txBody>
+      </p:sp>
+      <p:sp>
+        <p:nvSpPr>
+          <p:cNvPr id="10250" name="文本框 28"/>
+          <p:cNvSpPr txBox="1"/>
+          <p:nvPr/>
+        </p:nvSpPr>
+        <p:spPr>
+          <a:xfrm>
+            <a:off x="96520" y="90805"/>
+            <a:ext cx="5998845" cy="706755"/>
+          </a:xfrm>
+          <a:prstGeom prst="rect">
+            <a:avLst/>
+          </a:prstGeom>
+          <a:noFill/>
+          <a:ln w="9525">
+            <a:noFill/>
+          </a:ln>
+        </p:spPr>
+        <p:txBody>
+          <a:bodyPr wrap="square" anchor="t">
+            <a:spAutoFit/>
+          </a:bodyPr>
+          <a:p>
+            <a:pPr>
+              <a:buFont typeface="Arial" panose="020B0604020202090204" pitchFamily="34" charset="0"/>
+            </a:pPr>
+            <a:r>
+              <a:rPr lang="en-US" altLang="en-US" sz="4000" b="1" dirty="0">
+                <a:solidFill>
+                  <a:srgbClr val="404040"/>
+                </a:solidFill>
+                <a:ea typeface="Calibri" panose="020F0502020204030204" pitchFamily="34" charset="0"/>
+              </a:rPr>
+              <a:t>Data Preparation</a:t>
+            </a:r>
+            <a:endParaRPr lang="en-US" altLang="en-US" sz="4000" b="1" dirty="0">
+              <a:solidFill>
+                <a:srgbClr val="404040"/>
+              </a:solidFill>
+              <a:ea typeface="Calibri" panose="020F0502020204030204" pitchFamily="34" charset="0"/>
+            </a:endParaRPr>
+          </a:p>
+        </p:txBody>
+      </p:sp>
+      <p:pic>
+        <p:nvPicPr>
+          <p:cNvPr id="5" name="Picture 4" descr="Screenshot 2025-11-05 at 5.11.05 PM"/>
+          <p:cNvPicPr>
+            <a:picLocks noChangeAspect="1"/>
+          </p:cNvPicPr>
+          <p:nvPr/>
+        </p:nvPicPr>
+        <p:blipFill>
+          <a:blip r:embed="rId2"/>
+          <a:srcRect t="23065"/>
+          <a:stretch>
+            <a:fillRect/>
+          </a:stretch>
+        </p:blipFill>
+        <p:spPr>
+          <a:xfrm>
+            <a:off x="6010275" y="450850"/>
+            <a:ext cx="5893435" cy="5956935"/>
+          </a:xfrm>
+          <a:prstGeom prst="rect">
+            <a:avLst/>
+          </a:prstGeom>
+        </p:spPr>
+      </p:pic>
+      <p:pic>
+        <p:nvPicPr>
+          <p:cNvPr id="7" name="Picture 6" descr="Screenshot 2025-11-05 at 5.11.05 PM"/>
+          <p:cNvPicPr>
+            <a:picLocks noChangeAspect="1"/>
+          </p:cNvPicPr>
+          <p:nvPr/>
+        </p:nvPicPr>
+        <p:blipFill>
+          <a:blip r:embed="rId2"/>
+          <a:srcRect b="82019"/>
+          <a:stretch>
+            <a:fillRect/>
+          </a:stretch>
+        </p:blipFill>
+        <p:spPr>
+          <a:xfrm>
+            <a:off x="96520" y="5039360"/>
+            <a:ext cx="5791835" cy="1368425"/>
+          </a:xfrm>
+          <a:prstGeom prst="rect">
+            <a:avLst/>
+          </a:prstGeom>
+        </p:spPr>
+      </p:pic>
+      <p:pic>
+        <p:nvPicPr>
+          <p:cNvPr id="8" name="Picture 7" descr="Screenshot 2025-11-04 at 5.50.42 PM"/>
+          <p:cNvPicPr>
+            <a:picLocks noChangeAspect="1"/>
+          </p:cNvPicPr>
+          <p:nvPr/>
+        </p:nvPicPr>
+        <p:blipFill>
+          <a:blip r:embed="rId3"/>
+          <a:stretch>
+            <a:fillRect/>
+          </a:stretch>
+        </p:blipFill>
+        <p:spPr>
+          <a:xfrm>
+            <a:off x="766445" y="2357120"/>
+            <a:ext cx="4267200" cy="2145030"/>
+          </a:xfrm>
+          <a:prstGeom prst="rect">
+            <a:avLst/>
+          </a:prstGeom>
+        </p:spPr>
+      </p:pic>
+    </p:spTree>
+  </p:cSld>
+  <p:clrMapOvr>
+    <a:masterClrMapping/>
+  </p:clrMapOvr>
+  <p:transition spd="slow">
+    <p:wipe/>
+  </p:transition>
+</p:sld>
+</file>
+
+<file path=ppt/slides/slide12.xml><?xml version="1.0" encoding="utf-8"?>
+<p:sld xmlns:a="http://schemas.openxmlformats.org/drawingml/2006/main" xmlns:r="http://schemas.openxmlformats.org/officeDocument/2006/relationships" xmlns:p="http://schemas.openxmlformats.org/presentationml/2006/main">
+  <p:cSld>
+    <p:spTree>
+      <p:nvGrpSpPr>
+        <p:cNvPr id="1" name=""/>
+        <p:cNvGrpSpPr/>
+        <p:nvPr/>
+      </p:nvGrpSpPr>
+      <p:grpSpPr/>
+      <p:pic>
+        <p:nvPicPr>
+          <p:cNvPr id="10241" name="图片 3"/>
+          <p:cNvPicPr>
+            <a:picLocks noChangeAspect="1"/>
+          </p:cNvPicPr>
+          <p:nvPr/>
+        </p:nvPicPr>
+        <p:blipFill>
+          <a:blip r:embed="rId1"/>
+          <a:srcRect l="5727" r="16841" b="26530"/>
+          <a:stretch>
+            <a:fillRect/>
+          </a:stretch>
+        </p:blipFill>
+        <p:spPr>
+          <a:xfrm>
+            <a:off x="0" y="0"/>
+            <a:ext cx="12192000" cy="6858000"/>
+          </a:xfrm>
+          <a:prstGeom prst="rect">
+            <a:avLst/>
+          </a:prstGeom>
+          <a:noFill/>
+          <a:ln w="9525">
+            <a:noFill/>
+          </a:ln>
+        </p:spPr>
+      </p:pic>
+      <p:sp>
+        <p:nvSpPr>
+          <p:cNvPr id="10255" name="矩形 8"/>
+          <p:cNvSpPr/>
+          <p:nvPr/>
+        </p:nvSpPr>
+        <p:spPr>
+          <a:xfrm>
+            <a:off x="574040" y="1249045"/>
+            <a:ext cx="10724515" cy="1062355"/>
+          </a:xfrm>
+          <a:prstGeom prst="rect">
+            <a:avLst/>
+          </a:prstGeom>
+          <a:noFill/>
+          <a:ln w="9525">
+            <a:noFill/>
+          </a:ln>
+        </p:spPr>
+        <p:txBody>
+          <a:bodyPr wrap="square" lIns="0" tIns="0" rIns="0" bIns="0" anchor="t">
+            <a:noAutofit/>
+          </a:bodyPr>
+          <a:p>
+            <a:pPr marL="0" lvl="0" indent="457200" algn="l" defTabSz="1216025">
+              <a:lnSpc>
+                <a:spcPct val="90000"/>
+              </a:lnSpc>
+              <a:spcBef>
+                <a:spcPct val="20000"/>
+              </a:spcBef>
+              <a:buFont typeface="Arial" panose="020B0604020202090204" pitchFamily="34" charset="0"/>
+            </a:pPr>
+            <a:r>
+              <a:rPr lang="en-US" altLang="en-US" sz="2400" dirty="0">
+                <a:solidFill>
+                  <a:srgbClr val="404040"/>
+                </a:solidFill>
+                <a:ea typeface="Calibri" panose="020F0502020204030204" pitchFamily="34" charset="0"/>
+                <a:sym typeface="Arial" panose="020B0604020202090204" pitchFamily="34" charset="0"/>
+              </a:rPr>
+              <a:t>Most flight delays came from late aircraft arrivals and airline issues, while weather and security delays were rare. This shows that delays mostly happen because of internal scheduling problems, not external conditions.</a:t>
+            </a:r>
+            <a:endParaRPr lang="en-US" altLang="en-US" sz="2400" dirty="0">
+              <a:solidFill>
+                <a:srgbClr val="404040"/>
+              </a:solidFill>
+              <a:ea typeface="Calibri" panose="020F0502020204030204" pitchFamily="34" charset="0"/>
+              <a:sym typeface="Arial" panose="020B0604020202090204" pitchFamily="34" charset="0"/>
+            </a:endParaRPr>
+          </a:p>
+        </p:txBody>
+      </p:sp>
+      <p:sp>
+        <p:nvSpPr>
+          <p:cNvPr id="10250" name="文本框 28"/>
+          <p:cNvSpPr txBox="1"/>
+          <p:nvPr/>
+        </p:nvSpPr>
+        <p:spPr>
+          <a:xfrm>
+            <a:off x="96520" y="90805"/>
+            <a:ext cx="5998845" cy="706755"/>
+          </a:xfrm>
+          <a:prstGeom prst="rect">
+            <a:avLst/>
+          </a:prstGeom>
+          <a:noFill/>
+          <a:ln w="9525">
+            <a:noFill/>
+          </a:ln>
+        </p:spPr>
+        <p:txBody>
+          <a:bodyPr wrap="square" anchor="t">
+            <a:spAutoFit/>
+          </a:bodyPr>
+          <a:p>
+            <a:pPr>
+              <a:buFont typeface="Arial" panose="020B0604020202090204" pitchFamily="34" charset="0"/>
+            </a:pPr>
+            <a:r>
+              <a:rPr lang="en-US" altLang="en-US" sz="4000" b="1" dirty="0">
+                <a:solidFill>
+                  <a:srgbClr val="404040"/>
+                </a:solidFill>
+                <a:ea typeface="Calibri" panose="020F0502020204030204" pitchFamily="34" charset="0"/>
+              </a:rPr>
+              <a:t>Data Preparation</a:t>
+            </a:r>
+            <a:endParaRPr lang="en-US" altLang="en-US" sz="4000" b="1" dirty="0">
+              <a:solidFill>
+                <a:srgbClr val="404040"/>
+              </a:solidFill>
+              <a:ea typeface="Calibri" panose="020F0502020204030204" pitchFamily="34" charset="0"/>
+            </a:endParaRPr>
+          </a:p>
+        </p:txBody>
+      </p:sp>
+      <p:pic>
+        <p:nvPicPr>
+          <p:cNvPr id="4" name="Picture 3" descr="Screenshot 2025-11-05 at 5.20.14 PM"/>
+          <p:cNvPicPr>
+            <a:picLocks noChangeAspect="1"/>
+          </p:cNvPicPr>
+          <p:nvPr/>
+        </p:nvPicPr>
+        <p:blipFill>
+          <a:blip r:embed="rId2"/>
+          <a:srcRect b="65236"/>
+          <a:stretch>
+            <a:fillRect/>
+          </a:stretch>
+        </p:blipFill>
+        <p:spPr>
+          <a:xfrm>
+            <a:off x="1029335" y="2731770"/>
+            <a:ext cx="9690100" cy="843280"/>
+          </a:xfrm>
+          <a:prstGeom prst="rect">
+            <a:avLst/>
+          </a:prstGeom>
+        </p:spPr>
+      </p:pic>
+      <p:pic>
+        <p:nvPicPr>
+          <p:cNvPr id="6" name="Picture 5" descr="Screenshot 2025-11-05 at 5.20.31 PM"/>
+          <p:cNvPicPr>
+            <a:picLocks noChangeAspect="1"/>
+          </p:cNvPicPr>
+          <p:nvPr/>
+        </p:nvPicPr>
+        <p:blipFill>
+          <a:blip r:embed="rId3"/>
+          <a:srcRect t="8994"/>
+          <a:stretch>
+            <a:fillRect/>
+          </a:stretch>
+        </p:blipFill>
+        <p:spPr>
+          <a:xfrm>
+            <a:off x="1029335" y="3562985"/>
+            <a:ext cx="9690735" cy="1355725"/>
+          </a:xfrm>
+          <a:prstGeom prst="rect">
+            <a:avLst/>
+          </a:prstGeom>
+        </p:spPr>
+      </p:pic>
+    </p:spTree>
+  </p:cSld>
+  <p:clrMapOvr>
+    <a:masterClrMapping/>
+  </p:clrMapOvr>
+  <p:transition spd="slow">
+    <p:wipe/>
+  </p:transition>
+</p:sld>
+</file>
+
+<file path=ppt/slides/slide13.xml><?xml version="1.0" encoding="utf-8"?>
+<p:sld xmlns:a="http://schemas.openxmlformats.org/drawingml/2006/main" xmlns:r="http://schemas.openxmlformats.org/officeDocument/2006/relationships" xmlns:p="http://schemas.openxmlformats.org/presentationml/2006/main">
+  <p:cSld>
+    <p:spTree>
+      <p:nvGrpSpPr>
+        <p:cNvPr id="1" name=""/>
+        <p:cNvGrpSpPr/>
+        <p:nvPr/>
+      </p:nvGrpSpPr>
+      <p:grpSpPr/>
+      <p:pic>
+        <p:nvPicPr>
+          <p:cNvPr id="10241" name="图片 3"/>
+          <p:cNvPicPr>
+            <a:picLocks noChangeAspect="1"/>
+          </p:cNvPicPr>
+          <p:nvPr/>
+        </p:nvPicPr>
+        <p:blipFill>
+          <a:blip r:embed="rId1"/>
+          <a:srcRect l="5727" r="16841" b="26530"/>
+          <a:stretch>
+            <a:fillRect/>
+          </a:stretch>
+        </p:blipFill>
+        <p:spPr>
+          <a:xfrm>
+            <a:off x="0" y="0"/>
+            <a:ext cx="12192000" cy="6858000"/>
+          </a:xfrm>
+          <a:prstGeom prst="rect">
+            <a:avLst/>
+          </a:prstGeom>
+          <a:noFill/>
+          <a:ln w="9525">
+            <a:noFill/>
+          </a:ln>
+        </p:spPr>
+      </p:pic>
+      <p:sp>
+        <p:nvSpPr>
+          <p:cNvPr id="10255" name="矩形 8"/>
+          <p:cNvSpPr/>
+          <p:nvPr/>
+        </p:nvSpPr>
+        <p:spPr>
+          <a:xfrm>
+            <a:off x="574040" y="1249045"/>
+            <a:ext cx="10724515" cy="1062355"/>
+          </a:xfrm>
+          <a:prstGeom prst="rect">
+            <a:avLst/>
+          </a:prstGeom>
+          <a:noFill/>
+          <a:ln w="9525">
+            <a:noFill/>
+          </a:ln>
+        </p:spPr>
+        <p:txBody>
+          <a:bodyPr wrap="square" lIns="0" tIns="0" rIns="0" bIns="0" anchor="t">
+            <a:noAutofit/>
+          </a:bodyPr>
+          <a:p>
+            <a:pPr marL="0" lvl="0" indent="457200" algn="l" defTabSz="1216025">
+              <a:lnSpc>
+                <a:spcPct val="90000"/>
+              </a:lnSpc>
+              <a:spcBef>
+                <a:spcPct val="20000"/>
+              </a:spcBef>
+              <a:buFont typeface="Arial" panose="020B0604020202090204" pitchFamily="34" charset="0"/>
+            </a:pPr>
+            <a:r>
+              <a:rPr lang="en-US" altLang="en-US" sz="2400" dirty="0">
+                <a:solidFill>
+                  <a:srgbClr val="404040"/>
+                </a:solidFill>
+                <a:ea typeface="Calibri" panose="020F0502020204030204" pitchFamily="34" charset="0"/>
+                <a:sym typeface="Arial" panose="020B0604020202090204" pitchFamily="34" charset="0"/>
+              </a:rPr>
+              <a:t>We replaced missing delay values with 0 because in this dataset, missing means no delay. This helps make the analysis accurate and prevents errors when calculating averages.</a:t>
+            </a:r>
+            <a:endParaRPr lang="en-US" altLang="en-US" sz="2400" dirty="0">
+              <a:solidFill>
+                <a:srgbClr val="404040"/>
+              </a:solidFill>
+              <a:ea typeface="Calibri" panose="020F0502020204030204" pitchFamily="34" charset="0"/>
+              <a:sym typeface="Arial" panose="020B0604020202090204" pitchFamily="34" charset="0"/>
+            </a:endParaRPr>
+          </a:p>
+        </p:txBody>
+      </p:sp>
+      <p:sp>
+        <p:nvSpPr>
+          <p:cNvPr id="10250" name="文本框 28"/>
+          <p:cNvSpPr txBox="1"/>
+          <p:nvPr/>
+        </p:nvSpPr>
+        <p:spPr>
+          <a:xfrm>
+            <a:off x="96520" y="90805"/>
+            <a:ext cx="5998845" cy="706755"/>
+          </a:xfrm>
+          <a:prstGeom prst="rect">
+            <a:avLst/>
+          </a:prstGeom>
+          <a:noFill/>
+          <a:ln w="9525">
+            <a:noFill/>
+          </a:ln>
+        </p:spPr>
+        <p:txBody>
+          <a:bodyPr wrap="square" anchor="t">
+            <a:spAutoFit/>
+          </a:bodyPr>
+          <a:p>
+            <a:pPr>
+              <a:buFont typeface="Arial" panose="020B0604020202090204" pitchFamily="34" charset="0"/>
+            </a:pPr>
+            <a:r>
+              <a:rPr lang="en-US" altLang="en-US" sz="4000" b="1" dirty="0">
+                <a:solidFill>
+                  <a:srgbClr val="404040"/>
+                </a:solidFill>
+                <a:ea typeface="Calibri" panose="020F0502020204030204" pitchFamily="34" charset="0"/>
+              </a:rPr>
+              <a:t>Data Preparation</a:t>
+            </a:r>
+            <a:endParaRPr lang="en-US" altLang="en-US" sz="4000" b="1" dirty="0">
+              <a:solidFill>
+                <a:srgbClr val="404040"/>
+              </a:solidFill>
+              <a:ea typeface="Calibri" panose="020F0502020204030204" pitchFamily="34" charset="0"/>
+            </a:endParaRPr>
+          </a:p>
+        </p:txBody>
+      </p:sp>
+      <p:pic>
+        <p:nvPicPr>
+          <p:cNvPr id="2" name="Picture 1" descr="Screenshot 2025-11-05 at 5.22.37 PM"/>
+          <p:cNvPicPr>
+            <a:picLocks noChangeAspect="1"/>
+          </p:cNvPicPr>
+          <p:nvPr/>
+        </p:nvPicPr>
+        <p:blipFill>
+          <a:blip r:embed="rId2"/>
+          <a:stretch>
+            <a:fillRect/>
+          </a:stretch>
+        </p:blipFill>
+        <p:spPr>
+          <a:xfrm>
+            <a:off x="967740" y="2571115"/>
+            <a:ext cx="9232900" cy="3632200"/>
+          </a:xfrm>
+          <a:prstGeom prst="rect">
+            <a:avLst/>
+          </a:prstGeom>
+        </p:spPr>
+      </p:pic>
+    </p:spTree>
+  </p:cSld>
+  <p:clrMapOvr>
+    <a:masterClrMapping/>
+  </p:clrMapOvr>
+  <p:transition spd="slow">
+    <p:wipe/>
+  </p:transition>
+</p:sld>
+</file>
+
+<file path=ppt/slides/slide14.xml><?xml version="1.0" encoding="utf-8"?>
+<p:sld xmlns:a="http://schemas.openxmlformats.org/drawingml/2006/main" xmlns:r="http://schemas.openxmlformats.org/officeDocument/2006/relationships" xmlns:p="http://schemas.openxmlformats.org/presentationml/2006/main">
+  <p:cSld>
+    <p:spTree>
+      <p:nvGrpSpPr>
+        <p:cNvPr id="1" name=""/>
+        <p:cNvGrpSpPr/>
+        <p:nvPr/>
+      </p:nvGrpSpPr>
+      <p:grpSpPr/>
+      <p:pic>
+        <p:nvPicPr>
+          <p:cNvPr id="10241" name="图片 3"/>
+          <p:cNvPicPr>
+            <a:picLocks noChangeAspect="1"/>
+          </p:cNvPicPr>
+          <p:nvPr/>
+        </p:nvPicPr>
+        <p:blipFill>
+          <a:blip r:embed="rId1"/>
+          <a:srcRect l="5727" r="16841" b="26530"/>
+          <a:stretch>
+            <a:fillRect/>
+          </a:stretch>
+        </p:blipFill>
+        <p:spPr>
+          <a:xfrm>
+            <a:off x="0" y="0"/>
+            <a:ext cx="12192000" cy="6858000"/>
+          </a:xfrm>
+          <a:prstGeom prst="rect">
+            <a:avLst/>
+          </a:prstGeom>
+          <a:noFill/>
+          <a:ln w="9525">
+            <a:noFill/>
+          </a:ln>
+        </p:spPr>
+      </p:pic>
+      <p:sp>
+        <p:nvSpPr>
+          <p:cNvPr id="10255" name="矩形 8"/>
+          <p:cNvSpPr/>
+          <p:nvPr/>
+        </p:nvSpPr>
+        <p:spPr>
+          <a:xfrm>
+            <a:off x="574040" y="1249045"/>
+            <a:ext cx="10724515" cy="1062355"/>
+          </a:xfrm>
+          <a:prstGeom prst="rect">
+            <a:avLst/>
+          </a:prstGeom>
+          <a:noFill/>
+          <a:ln w="9525">
+            <a:noFill/>
+          </a:ln>
+        </p:spPr>
+        <p:txBody>
+          <a:bodyPr wrap="square" lIns="0" tIns="0" rIns="0" bIns="0" anchor="t">
+            <a:noAutofit/>
+          </a:bodyPr>
+          <a:p>
+            <a:pPr marL="0" lvl="0" indent="457200" algn="l" defTabSz="1216025">
+              <a:lnSpc>
+                <a:spcPct val="90000"/>
+              </a:lnSpc>
+              <a:spcBef>
+                <a:spcPct val="20000"/>
+              </a:spcBef>
+              <a:buFont typeface="Arial" panose="020B0604020202090204" pitchFamily="34" charset="0"/>
+            </a:pPr>
+            <a:r>
+              <a:rPr lang="en-US" altLang="en-US" sz="2400" dirty="0">
+                <a:solidFill>
+                  <a:srgbClr val="404040"/>
+                </a:solidFill>
+                <a:ea typeface="Calibri" panose="020F0502020204030204" pitchFamily="34" charset="0"/>
+                <a:sym typeface="Arial" panose="020B0604020202090204" pitchFamily="34" charset="0"/>
+              </a:rPr>
+              <a:t>This code adds up all delay minutes by cause and shows which reason caused the most total delay.</a:t>
+            </a:r>
+            <a:endParaRPr lang="en-US" altLang="en-US" sz="2400" dirty="0">
+              <a:solidFill>
+                <a:srgbClr val="404040"/>
+              </a:solidFill>
+              <a:ea typeface="Calibri" panose="020F0502020204030204" pitchFamily="34" charset="0"/>
+              <a:sym typeface="Arial" panose="020B0604020202090204" pitchFamily="34" charset="0"/>
+            </a:endParaRPr>
+          </a:p>
+        </p:txBody>
+      </p:sp>
+      <p:sp>
+        <p:nvSpPr>
+          <p:cNvPr id="10250" name="文本框 28"/>
+          <p:cNvSpPr txBox="1"/>
+          <p:nvPr/>
+        </p:nvSpPr>
+        <p:spPr>
+          <a:xfrm>
+            <a:off x="96520" y="90805"/>
+            <a:ext cx="11864340" cy="706755"/>
+          </a:xfrm>
+          <a:prstGeom prst="rect">
+            <a:avLst/>
+          </a:prstGeom>
+          <a:noFill/>
+          <a:ln w="9525">
+            <a:noFill/>
+          </a:ln>
+        </p:spPr>
+        <p:txBody>
+          <a:bodyPr wrap="square" anchor="t">
+            <a:spAutoFit/>
+          </a:bodyPr>
+          <a:p>
+            <a:pPr>
+              <a:buFont typeface="Arial" panose="020B0604020202090204" pitchFamily="34" charset="0"/>
+            </a:pPr>
+            <a:r>
+              <a:rPr lang="en-US" altLang="en-US" sz="4000" b="1" dirty="0">
+                <a:solidFill>
+                  <a:srgbClr val="404040"/>
+                </a:solidFill>
+                <a:ea typeface="Calibri" panose="020F0502020204030204" pitchFamily="34" charset="0"/>
+                <a:sym typeface="Arial" panose="020B0604020202090204" pitchFamily="34" charset="0"/>
+              </a:rPr>
+              <a:t>Part 2: Identify the major causes of flight delays</a:t>
+            </a:r>
+            <a:endParaRPr lang="en-US" altLang="en-US" sz="4000" b="1" dirty="0">
+              <a:solidFill>
+                <a:srgbClr val="404040"/>
+              </a:solidFill>
+              <a:ea typeface="Calibri" panose="020F0502020204030204" pitchFamily="34" charset="0"/>
+            </a:endParaRPr>
+          </a:p>
+        </p:txBody>
+      </p:sp>
+      <p:pic>
+        <p:nvPicPr>
+          <p:cNvPr id="3" name="Picture 2" descr="Screenshot 2025-11-05 at 5.24.36 PM"/>
+          <p:cNvPicPr>
+            <a:picLocks noChangeAspect="1"/>
+          </p:cNvPicPr>
+          <p:nvPr/>
+        </p:nvPicPr>
+        <p:blipFill>
+          <a:blip r:embed="rId2"/>
+          <a:stretch>
+            <a:fillRect/>
+          </a:stretch>
+        </p:blipFill>
+        <p:spPr>
+          <a:xfrm>
+            <a:off x="755015" y="2762885"/>
+            <a:ext cx="10363200" cy="3200400"/>
+          </a:xfrm>
+          <a:prstGeom prst="rect">
+            <a:avLst/>
+          </a:prstGeom>
+        </p:spPr>
+      </p:pic>
+    </p:spTree>
+  </p:cSld>
+  <p:clrMapOvr>
+    <a:masterClrMapping/>
+  </p:clrMapOvr>
+  <p:transition spd="slow">
+    <p:wipe/>
+  </p:transition>
+</p:sld>
+</file>
+
+<file path=ppt/slides/slide15.xml><?xml version="1.0" encoding="utf-8"?>
+<p:sld xmlns:a="http://schemas.openxmlformats.org/drawingml/2006/main" xmlns:r="http://schemas.openxmlformats.org/officeDocument/2006/relationships" xmlns:p="http://schemas.openxmlformats.org/presentationml/2006/main">
+  <p:cSld>
+    <p:spTree>
+      <p:nvGrpSpPr>
+        <p:cNvPr id="1" name=""/>
+        <p:cNvGrpSpPr/>
+        <p:nvPr/>
+      </p:nvGrpSpPr>
+      <p:grpSpPr/>
+      <p:pic>
+        <p:nvPicPr>
+          <p:cNvPr id="10241" name="图片 3"/>
+          <p:cNvPicPr>
+            <a:picLocks noChangeAspect="1"/>
+          </p:cNvPicPr>
+          <p:nvPr/>
+        </p:nvPicPr>
+        <p:blipFill>
+          <a:blip r:embed="rId1"/>
+          <a:srcRect l="5727" r="16841" b="26530"/>
+          <a:stretch>
+            <a:fillRect/>
+          </a:stretch>
+        </p:blipFill>
+        <p:spPr>
+          <a:xfrm>
+            <a:off x="0" y="0"/>
+            <a:ext cx="12192000" cy="6858000"/>
+          </a:xfrm>
+          <a:prstGeom prst="rect">
+            <a:avLst/>
+          </a:prstGeom>
+          <a:noFill/>
+          <a:ln w="9525">
+            <a:noFill/>
+          </a:ln>
+        </p:spPr>
+      </p:pic>
+      <p:sp>
+        <p:nvSpPr>
+          <p:cNvPr id="10255" name="矩形 8"/>
+          <p:cNvSpPr/>
+          <p:nvPr/>
+        </p:nvSpPr>
+        <p:spPr>
+          <a:xfrm>
+            <a:off x="574040" y="1052830"/>
+            <a:ext cx="10724515" cy="1062355"/>
+          </a:xfrm>
+          <a:prstGeom prst="rect">
+            <a:avLst/>
+          </a:prstGeom>
+          <a:noFill/>
+          <a:ln w="9525">
+            <a:noFill/>
+          </a:ln>
+        </p:spPr>
+        <p:txBody>
+          <a:bodyPr wrap="square" lIns="0" tIns="0" rIns="0" bIns="0" anchor="t">
+            <a:noAutofit/>
+          </a:bodyPr>
+          <a:p>
+            <a:pPr marL="0" lvl="0" indent="457200" algn="l" defTabSz="1216025">
+              <a:lnSpc>
+                <a:spcPct val="90000"/>
+              </a:lnSpc>
+              <a:spcBef>
+                <a:spcPct val="20000"/>
+              </a:spcBef>
+              <a:buFont typeface="Arial" panose="020B0604020202090204" pitchFamily="34" charset="0"/>
+            </a:pPr>
+            <a:r>
+              <a:rPr lang="en-US" altLang="en-US" sz="2400" dirty="0">
+                <a:solidFill>
+                  <a:srgbClr val="404040"/>
+                </a:solidFill>
+                <a:ea typeface="Calibri" panose="020F0502020204030204" pitchFamily="34" charset="0"/>
+                <a:sym typeface="Arial" panose="020B0604020202090204" pitchFamily="34" charset="0"/>
+              </a:rPr>
+              <a:t>Insight from the plot</a:t>
+            </a:r>
+            <a:endParaRPr lang="en-US" altLang="en-US" sz="2400" dirty="0">
+              <a:solidFill>
+                <a:srgbClr val="404040"/>
+              </a:solidFill>
+              <a:ea typeface="Calibri" panose="020F0502020204030204" pitchFamily="34" charset="0"/>
+              <a:sym typeface="Arial" panose="020B0604020202090204" pitchFamily="34" charset="0"/>
+            </a:endParaRPr>
+          </a:p>
+          <a:p>
+            <a:pPr marL="0" lvl="0" indent="457200" algn="l" defTabSz="1216025">
+              <a:lnSpc>
+                <a:spcPct val="90000"/>
+              </a:lnSpc>
+              <a:spcBef>
+                <a:spcPct val="20000"/>
+              </a:spcBef>
+              <a:buFont typeface="Arial" panose="020B0604020202090204" pitchFamily="34" charset="0"/>
+            </a:pPr>
+            <a:r>
+              <a:rPr lang="en-US" altLang="en-US" sz="2400" dirty="0">
+                <a:solidFill>
+                  <a:srgbClr val="404040"/>
+                </a:solidFill>
+                <a:ea typeface="Calibri" panose="020F0502020204030204" pitchFamily="34" charset="0"/>
+                <a:sym typeface="Arial" panose="020B0604020202090204" pitchFamily="34" charset="0"/>
+              </a:rPr>
+              <a:t>Late aircraft arrivals and carrier operational issues are the dominant causes of flight delays, together accounting for nearly 90% of total delay time.</a:t>
+            </a:r>
+            <a:endParaRPr lang="en-US" altLang="en-US" sz="2400" dirty="0">
+              <a:solidFill>
+                <a:srgbClr val="404040"/>
+              </a:solidFill>
+              <a:ea typeface="Calibri" panose="020F0502020204030204" pitchFamily="34" charset="0"/>
+              <a:sym typeface="Arial" panose="020B0604020202090204" pitchFamily="34" charset="0"/>
+            </a:endParaRPr>
+          </a:p>
+        </p:txBody>
+      </p:sp>
+      <p:sp>
+        <p:nvSpPr>
+          <p:cNvPr id="10250" name="文本框 28"/>
+          <p:cNvSpPr txBox="1"/>
+          <p:nvPr/>
+        </p:nvSpPr>
+        <p:spPr>
+          <a:xfrm>
+            <a:off x="96520" y="90805"/>
+            <a:ext cx="11864340" cy="706755"/>
+          </a:xfrm>
+          <a:prstGeom prst="rect">
+            <a:avLst/>
+          </a:prstGeom>
+          <a:noFill/>
+          <a:ln w="9525">
+            <a:noFill/>
+          </a:ln>
+        </p:spPr>
+        <p:txBody>
+          <a:bodyPr wrap="square" anchor="t">
+            <a:spAutoFit/>
+          </a:bodyPr>
+          <a:p>
+            <a:pPr>
+              <a:buFont typeface="Arial" panose="020B0604020202090204" pitchFamily="34" charset="0"/>
+            </a:pPr>
+            <a:r>
+              <a:rPr lang="en-US" altLang="en-US" sz="4000" b="1" dirty="0">
+                <a:solidFill>
+                  <a:srgbClr val="404040"/>
+                </a:solidFill>
+                <a:ea typeface="Calibri" panose="020F0502020204030204" pitchFamily="34" charset="0"/>
+                <a:sym typeface="Arial" panose="020B0604020202090204" pitchFamily="34" charset="0"/>
+              </a:rPr>
+              <a:t>Part 2: Identify the major causes of flight delays</a:t>
+            </a:r>
+            <a:endParaRPr lang="en-US" altLang="en-US" sz="4000" b="1" dirty="0">
+              <a:solidFill>
+                <a:srgbClr val="404040"/>
+              </a:solidFill>
+              <a:ea typeface="Calibri" panose="020F0502020204030204" pitchFamily="34" charset="0"/>
+            </a:endParaRPr>
+          </a:p>
+        </p:txBody>
+      </p:sp>
+      <p:pic>
+        <p:nvPicPr>
+          <p:cNvPr id="2" name="Picture 1" descr="Screenshot 2025-11-05 at 5.29.04 PM"/>
+          <p:cNvPicPr>
+            <a:picLocks noChangeAspect="1"/>
+          </p:cNvPicPr>
+          <p:nvPr/>
+        </p:nvPicPr>
+        <p:blipFill>
+          <a:blip r:embed="rId2"/>
+          <a:stretch>
+            <a:fillRect/>
+          </a:stretch>
+        </p:blipFill>
+        <p:spPr>
+          <a:xfrm>
+            <a:off x="231140" y="2877820"/>
+            <a:ext cx="5054600" cy="2400300"/>
+          </a:xfrm>
+          <a:prstGeom prst="rect">
+            <a:avLst/>
+          </a:prstGeom>
+        </p:spPr>
+      </p:pic>
+      <p:pic>
+        <p:nvPicPr>
+          <p:cNvPr id="4" name="Picture 3" descr="Screenshot 2025-11-05 at 5.29.29 PM"/>
+          <p:cNvPicPr>
+            <a:picLocks noChangeAspect="1"/>
+          </p:cNvPicPr>
+          <p:nvPr/>
+        </p:nvPicPr>
+        <p:blipFill>
+          <a:blip r:embed="rId3"/>
+          <a:stretch>
+            <a:fillRect/>
+          </a:stretch>
+        </p:blipFill>
+        <p:spPr>
+          <a:xfrm>
+            <a:off x="5904865" y="2370455"/>
+            <a:ext cx="5741035" cy="4254500"/>
+          </a:xfrm>
+          <a:prstGeom prst="rect">
+            <a:avLst/>
+          </a:prstGeom>
+        </p:spPr>
+      </p:pic>
+    </p:spTree>
+  </p:cSld>
+  <p:clrMapOvr>
+    <a:masterClrMapping/>
+  </p:clrMapOvr>
+  <p:transition spd="slow">
+    <p:wipe/>
+  </p:transition>
+</p:sld>
+</file>
+
+<file path=ppt/slides/slide16.xml><?xml version="1.0" encoding="utf-8"?>
+<p:sld xmlns:a="http://schemas.openxmlformats.org/drawingml/2006/main" xmlns:r="http://schemas.openxmlformats.org/officeDocument/2006/relationships" xmlns:p="http://schemas.openxmlformats.org/presentationml/2006/main">
+  <p:cSld>
+    <p:spTree>
+      <p:nvGrpSpPr>
+        <p:cNvPr id="1" name=""/>
+        <p:cNvGrpSpPr/>
+        <p:nvPr/>
+      </p:nvGrpSpPr>
+      <p:grpSpPr/>
+      <p:pic>
+        <p:nvPicPr>
+          <p:cNvPr id="10241" name="图片 3"/>
+          <p:cNvPicPr>
+            <a:picLocks noChangeAspect="1"/>
+          </p:cNvPicPr>
+          <p:nvPr/>
+        </p:nvPicPr>
+        <p:blipFill>
+          <a:blip r:embed="rId1"/>
+          <a:srcRect l="5727" r="16841" b="26530"/>
+          <a:stretch>
+            <a:fillRect/>
+          </a:stretch>
+        </p:blipFill>
+        <p:spPr>
+          <a:xfrm>
+            <a:off x="0" y="0"/>
+            <a:ext cx="12192000" cy="6858000"/>
+          </a:xfrm>
+          <a:prstGeom prst="rect">
+            <a:avLst/>
+          </a:prstGeom>
+          <a:noFill/>
+          <a:ln w="9525">
+            <a:noFill/>
+          </a:ln>
+        </p:spPr>
+      </p:pic>
+      <p:sp>
+        <p:nvSpPr>
+          <p:cNvPr id="10255" name="矩形 8"/>
+          <p:cNvSpPr/>
+          <p:nvPr/>
+        </p:nvSpPr>
+        <p:spPr>
+          <a:xfrm>
+            <a:off x="574040" y="1052830"/>
+            <a:ext cx="10724515" cy="1062355"/>
+          </a:xfrm>
+          <a:prstGeom prst="rect">
+            <a:avLst/>
+          </a:prstGeom>
+          <a:noFill/>
+          <a:ln w="9525">
+            <a:noFill/>
+          </a:ln>
+        </p:spPr>
+        <p:txBody>
+          <a:bodyPr wrap="square" lIns="0" tIns="0" rIns="0" bIns="0" anchor="t">
+            <a:noAutofit/>
+          </a:bodyPr>
+          <a:p>
+            <a:pPr marL="0" lvl="0" indent="457200" algn="l" defTabSz="1216025">
+              <a:lnSpc>
+                <a:spcPct val="90000"/>
+              </a:lnSpc>
+              <a:spcBef>
+                <a:spcPct val="20000"/>
+              </a:spcBef>
+              <a:buFont typeface="Arial" panose="020B0604020202090204" pitchFamily="34" charset="0"/>
+            </a:pPr>
+            <a:r>
+              <a:rPr lang="en-US" altLang="en-US" sz="2400" dirty="0">
+                <a:solidFill>
+                  <a:srgbClr val="404040"/>
+                </a:solidFill>
+                <a:ea typeface="Calibri" panose="020F0502020204030204" pitchFamily="34" charset="0"/>
+                <a:sym typeface="Arial" panose="020B0604020202090204" pitchFamily="34" charset="0"/>
+              </a:rPr>
+              <a:t>This is plot representing Distance vs Arrival Delay</a:t>
+            </a:r>
+            <a:endParaRPr lang="en-US" altLang="en-US" sz="2400" dirty="0">
+              <a:solidFill>
+                <a:srgbClr val="404040"/>
+              </a:solidFill>
+              <a:ea typeface="Calibri" panose="020F0502020204030204" pitchFamily="34" charset="0"/>
+              <a:sym typeface="Arial" panose="020B0604020202090204" pitchFamily="34" charset="0"/>
+            </a:endParaRPr>
+          </a:p>
+        </p:txBody>
+      </p:sp>
+      <p:sp>
+        <p:nvSpPr>
+          <p:cNvPr id="10250" name="文本框 28"/>
+          <p:cNvSpPr txBox="1"/>
+          <p:nvPr/>
+        </p:nvSpPr>
+        <p:spPr>
+          <a:xfrm>
+            <a:off x="48260" y="90805"/>
+            <a:ext cx="11864340" cy="706755"/>
+          </a:xfrm>
+          <a:prstGeom prst="rect">
+            <a:avLst/>
+          </a:prstGeom>
+          <a:noFill/>
+          <a:ln w="9525">
+            <a:noFill/>
+          </a:ln>
+        </p:spPr>
+        <p:txBody>
+          <a:bodyPr wrap="square" anchor="t">
+            <a:spAutoFit/>
+          </a:bodyPr>
+          <a:p>
+            <a:pPr>
+              <a:buFont typeface="Arial" panose="020B0604020202090204" pitchFamily="34" charset="0"/>
+            </a:pPr>
+            <a:r>
+              <a:rPr lang="en-US" altLang="en-US" sz="4000" b="1" dirty="0">
+                <a:solidFill>
+                  <a:srgbClr val="404040"/>
+                </a:solidFill>
+                <a:ea typeface="Calibri" panose="020F0502020204030204" pitchFamily="34" charset="0"/>
+                <a:sym typeface="Arial" panose="020B0604020202090204" pitchFamily="34" charset="0"/>
+              </a:rPr>
+              <a:t>Part 3: Exploring how other factors effect delays </a:t>
+            </a:r>
+            <a:endParaRPr lang="en-US" altLang="en-US" sz="4000" b="1" dirty="0">
+              <a:solidFill>
+                <a:srgbClr val="404040"/>
+              </a:solidFill>
+              <a:ea typeface="Calibri" panose="020F0502020204030204" pitchFamily="34" charset="0"/>
+            </a:endParaRPr>
+          </a:p>
+        </p:txBody>
+      </p:sp>
+      <p:pic>
+        <p:nvPicPr>
+          <p:cNvPr id="3" name="Picture 2" descr="Screenshot 2025-11-05 at 5.30.24 PM"/>
+          <p:cNvPicPr>
+            <a:picLocks noChangeAspect="1"/>
+          </p:cNvPicPr>
+          <p:nvPr/>
+        </p:nvPicPr>
+        <p:blipFill>
+          <a:blip r:embed="rId2"/>
+          <a:stretch>
+            <a:fillRect/>
+          </a:stretch>
+        </p:blipFill>
+        <p:spPr>
+          <a:xfrm>
+            <a:off x="303530" y="3492500"/>
+            <a:ext cx="5347335" cy="1666240"/>
+          </a:xfrm>
+          <a:prstGeom prst="rect">
+            <a:avLst/>
+          </a:prstGeom>
+        </p:spPr>
+      </p:pic>
+      <p:pic>
+        <p:nvPicPr>
+          <p:cNvPr id="5" name="Picture 4" descr="Screenshot 2025-11-05 at 5.30.56 PM"/>
+          <p:cNvPicPr>
+            <a:picLocks noChangeAspect="1"/>
+          </p:cNvPicPr>
+          <p:nvPr/>
+        </p:nvPicPr>
+        <p:blipFill>
+          <a:blip r:embed="rId3"/>
+          <a:stretch>
+            <a:fillRect/>
+          </a:stretch>
+        </p:blipFill>
+        <p:spPr>
+          <a:xfrm>
+            <a:off x="5765165" y="2235200"/>
+            <a:ext cx="6195695" cy="4209415"/>
+          </a:xfrm>
+          <a:prstGeom prst="rect">
+            <a:avLst/>
+          </a:prstGeom>
+        </p:spPr>
+      </p:pic>
+      <p:sp>
+        <p:nvSpPr>
+          <p:cNvPr id="6" name="Oval 5"/>
+          <p:cNvSpPr/>
+          <p:nvPr/>
+        </p:nvSpPr>
+        <p:spPr>
+          <a:xfrm>
+            <a:off x="6433820" y="4568825"/>
+            <a:ext cx="2880360" cy="1343660"/>
+          </a:xfrm>
+          <a:prstGeom prst="ellipse">
+            <a:avLst/>
+          </a:prstGeom>
+          <a:noFill/>
+          <a:ln w="57150">
+            <a:solidFill>
+              <a:srgbClr val="FF0000"/>
+            </a:solidFill>
+          </a:ln>
+          <a:extLst>
+            <a:ext uri="{909E8E84-426E-40DD-AFC4-6F175D3DCCD1}">
+              <a14:hiddenFill xmlns:a14="http://schemas.microsoft.com/office/drawing/2010/main">
+                <a:solidFill>
+                  <a:schemeClr val="accent1"/>
+                </a:solidFill>
+              </a14:hiddenFill>
+            </a:ext>
+          </a:extLst>
+        </p:spPr>
+        <p:style>
+          <a:lnRef idx="2">
+            <a:schemeClr val="accent1">
+              <a:lumMod val="75000"/>
+            </a:schemeClr>
+          </a:lnRef>
+          <a:fillRef idx="1">
+            <a:schemeClr val="accent1"/>
+          </a:fillRef>
+          <a:effectRef idx="0">
+            <a:srgbClr val="FFFFFF"/>
+          </a:effectRef>
+          <a:fontRef idx="minor">
+            <a:schemeClr val="lt1"/>
+          </a:fontRef>
+        </p:style>
+        <p:txBody>
+          <a:bodyPr rtlCol="0" anchor="ctr"/>
+          <a:p>
+            <a:pPr algn="ctr"/>
+            <a:endParaRPr lang="en-US"/>
+          </a:p>
+        </p:txBody>
+      </p:sp>
+    </p:spTree>
+  </p:cSld>
+  <p:clrMapOvr>
+    <a:masterClrMapping/>
+  </p:clrMapOvr>
+  <p:transition spd="slow">
+    <p:wipe/>
+  </p:transition>
+</p:sld>
+</file>
+
+<file path=ppt/slides/slide17.xml><?xml version="1.0" encoding="utf-8"?>
+<p:sld xmlns:a="http://schemas.openxmlformats.org/drawingml/2006/main" xmlns:r="http://schemas.openxmlformats.org/officeDocument/2006/relationships" xmlns:p="http://schemas.openxmlformats.org/presentationml/2006/main">
+  <p:cSld>
+    <p:spTree>
+      <p:nvGrpSpPr>
+        <p:cNvPr id="1" name=""/>
+        <p:cNvGrpSpPr/>
+        <p:nvPr/>
+      </p:nvGrpSpPr>
+      <p:grpSpPr/>
+      <p:pic>
+        <p:nvPicPr>
+          <p:cNvPr id="10241" name="图片 3"/>
+          <p:cNvPicPr>
+            <a:picLocks noChangeAspect="1"/>
+          </p:cNvPicPr>
+          <p:nvPr/>
+        </p:nvPicPr>
+        <p:blipFill>
+          <a:blip r:embed="rId1"/>
+          <a:srcRect l="5727" r="16841" b="26530"/>
+          <a:stretch>
+            <a:fillRect/>
+          </a:stretch>
+        </p:blipFill>
+        <p:spPr>
+          <a:xfrm>
+            <a:off x="0" y="0"/>
+            <a:ext cx="12192000" cy="6858000"/>
+          </a:xfrm>
+          <a:prstGeom prst="rect">
+            <a:avLst/>
+          </a:prstGeom>
+          <a:noFill/>
+          <a:ln w="9525">
+            <a:noFill/>
+          </a:ln>
+        </p:spPr>
+      </p:pic>
+      <p:sp>
+        <p:nvSpPr>
+          <p:cNvPr id="10255" name="矩形 8"/>
+          <p:cNvSpPr/>
+          <p:nvPr/>
+        </p:nvSpPr>
+        <p:spPr>
+          <a:xfrm>
+            <a:off x="333375" y="4337050"/>
+            <a:ext cx="4782185" cy="1062355"/>
+          </a:xfrm>
+          <a:prstGeom prst="rect">
+            <a:avLst/>
+          </a:prstGeom>
+          <a:noFill/>
+          <a:ln w="9525">
+            <a:noFill/>
+          </a:ln>
+        </p:spPr>
+        <p:txBody>
+          <a:bodyPr wrap="square" lIns="0" tIns="0" rIns="0" bIns="0" anchor="t">
+            <a:noAutofit/>
+          </a:bodyPr>
+          <a:p>
+            <a:pPr marL="0" lvl="0" indent="457200" algn="l" defTabSz="1216025">
+              <a:lnSpc>
+                <a:spcPct val="90000"/>
+              </a:lnSpc>
+              <a:spcBef>
+                <a:spcPct val="20000"/>
+              </a:spcBef>
+              <a:buFont typeface="Arial" panose="020B0604020202090204" pitchFamily="34" charset="0"/>
+            </a:pPr>
+            <a:r>
+              <a:rPr lang="en-US" altLang="en-US" sz="2400" dirty="0">
+                <a:solidFill>
+                  <a:srgbClr val="404040"/>
+                </a:solidFill>
+                <a:ea typeface="Calibri" panose="020F0502020204030204" pitchFamily="34" charset="0"/>
+                <a:sym typeface="Arial" panose="020B0604020202090204" pitchFamily="34" charset="0"/>
+              </a:rPr>
+              <a:t>Let’s see the most busy part closer</a:t>
+            </a:r>
+            <a:endParaRPr lang="en-US" altLang="en-US" sz="2400" dirty="0">
+              <a:solidFill>
+                <a:srgbClr val="404040"/>
+              </a:solidFill>
+              <a:ea typeface="Calibri" panose="020F0502020204030204" pitchFamily="34" charset="0"/>
+              <a:sym typeface="Arial" panose="020B0604020202090204" pitchFamily="34" charset="0"/>
+            </a:endParaRPr>
+          </a:p>
+        </p:txBody>
+      </p:sp>
+      <p:sp>
+        <p:nvSpPr>
+          <p:cNvPr id="10250" name="文本框 28"/>
+          <p:cNvSpPr txBox="1"/>
+          <p:nvPr/>
+        </p:nvSpPr>
+        <p:spPr>
+          <a:xfrm>
+            <a:off x="96520" y="90805"/>
+            <a:ext cx="11864340" cy="706755"/>
+          </a:xfrm>
+          <a:prstGeom prst="rect">
+            <a:avLst/>
+          </a:prstGeom>
+          <a:noFill/>
+          <a:ln w="9525">
+            <a:noFill/>
+          </a:ln>
+        </p:spPr>
+        <p:txBody>
+          <a:bodyPr wrap="square" anchor="t">
+            <a:spAutoFit/>
+          </a:bodyPr>
+          <a:p>
+            <a:pPr>
+              <a:buFont typeface="Arial" panose="020B0604020202090204" pitchFamily="34" charset="0"/>
+            </a:pPr>
+            <a:r>
+              <a:rPr lang="en-US" altLang="en-US" sz="4000" b="1" dirty="0">
+                <a:solidFill>
+                  <a:srgbClr val="404040"/>
+                </a:solidFill>
+                <a:ea typeface="Calibri" panose="020F0502020204030204" pitchFamily="34" charset="0"/>
+                <a:sym typeface="Arial" panose="020B0604020202090204" pitchFamily="34" charset="0"/>
+              </a:rPr>
+              <a:t>Part 3: Exploring how other factors effect delays </a:t>
+            </a:r>
+            <a:endParaRPr lang="en-US" altLang="en-US" sz="4000" b="1" dirty="0">
+              <a:solidFill>
+                <a:srgbClr val="404040"/>
+              </a:solidFill>
+              <a:ea typeface="Calibri" panose="020F0502020204030204" pitchFamily="34" charset="0"/>
+            </a:endParaRPr>
+          </a:p>
+        </p:txBody>
+      </p:sp>
+      <p:pic>
+        <p:nvPicPr>
+          <p:cNvPr id="2" name="Picture 1" descr="Screenshot 2025-11-05 at 5.35.25 PM"/>
+          <p:cNvPicPr>
+            <a:picLocks noChangeAspect="1"/>
+          </p:cNvPicPr>
+          <p:nvPr/>
+        </p:nvPicPr>
+        <p:blipFill>
+          <a:blip r:embed="rId2"/>
+          <a:stretch>
+            <a:fillRect/>
+          </a:stretch>
+        </p:blipFill>
+        <p:spPr>
+          <a:xfrm>
+            <a:off x="96520" y="1460500"/>
+            <a:ext cx="5715000" cy="1968500"/>
+          </a:xfrm>
+          <a:prstGeom prst="rect">
+            <a:avLst/>
+          </a:prstGeom>
+        </p:spPr>
+      </p:pic>
+      <p:pic>
+        <p:nvPicPr>
+          <p:cNvPr id="4" name="Picture 3" descr="Screenshot 2025-11-05 at 5.35.37 PM"/>
+          <p:cNvPicPr>
+            <a:picLocks noChangeAspect="1"/>
+          </p:cNvPicPr>
+          <p:nvPr/>
+        </p:nvPicPr>
+        <p:blipFill>
+          <a:blip r:embed="rId3"/>
+          <a:stretch>
+            <a:fillRect/>
+          </a:stretch>
+        </p:blipFill>
+        <p:spPr>
+          <a:xfrm>
+            <a:off x="5115560" y="1994535"/>
+            <a:ext cx="6953885" cy="4655185"/>
+          </a:xfrm>
+          <a:prstGeom prst="rect">
+            <a:avLst/>
+          </a:prstGeom>
+        </p:spPr>
+      </p:pic>
+      <p:cxnSp>
+        <p:nvCxnSpPr>
+          <p:cNvPr id="7" name="Straight Connector 6"/>
+          <p:cNvCxnSpPr/>
+          <p:nvPr/>
+        </p:nvCxnSpPr>
+        <p:spPr>
+          <a:xfrm>
+            <a:off x="6750685" y="4825365"/>
+            <a:ext cx="5085080" cy="0"/>
+          </a:xfrm>
+          <a:prstGeom prst="line">
+            <a:avLst/>
+          </a:prstGeom>
+          <a:ln w="57150">
+            <a:solidFill>
+              <a:srgbClr val="FF0000"/>
+            </a:solidFill>
+          </a:ln>
+        </p:spPr>
+        <p:style>
+          <a:lnRef idx="3">
+            <a:schemeClr val="accent1"/>
+          </a:lnRef>
+          <a:fillRef idx="0">
+            <a:srgbClr val="FFFFFF"/>
+          </a:fillRef>
+          <a:effectRef idx="0">
+            <a:srgbClr val="FFFFFF"/>
+          </a:effectRef>
+          <a:fontRef idx="minor">
+            <a:schemeClr val="tx1"/>
+          </a:fontRef>
+        </p:style>
+      </p:cxnSp>
+      <p:sp>
+        <p:nvSpPr>
+          <p:cNvPr id="8" name="Rectangles 7"/>
+          <p:cNvSpPr/>
+          <p:nvPr/>
+        </p:nvSpPr>
+        <p:spPr>
+          <a:xfrm>
+            <a:off x="611505" y="2864485"/>
+            <a:ext cx="1727835" cy="490220"/>
+          </a:xfrm>
+          <a:prstGeom prst="rect">
+            <a:avLst/>
+          </a:prstGeom>
+          <a:noFill/>
+          <a:ln w="38100">
+            <a:solidFill>
+              <a:srgbClr val="FF0000"/>
+            </a:solidFill>
+          </a:ln>
+          <a:extLst>
+            <a:ext uri="{909E8E84-426E-40DD-AFC4-6F175D3DCCD1}">
+              <a14:hiddenFill xmlns:a14="http://schemas.microsoft.com/office/drawing/2010/main">
+                <a:solidFill>
+                  <a:schemeClr val="accent1"/>
+                </a:solidFill>
+              </a14:hiddenFill>
+            </a:ext>
+          </a:extLst>
+        </p:spPr>
+        <p:style>
+          <a:lnRef idx="2">
+            <a:schemeClr val="accent1">
+              <a:lumMod val="75000"/>
+            </a:schemeClr>
+          </a:lnRef>
+          <a:fillRef idx="1">
+            <a:schemeClr val="accent1"/>
+          </a:fillRef>
+          <a:effectRef idx="0">
+            <a:srgbClr val="FFFFFF"/>
+          </a:effectRef>
+          <a:fontRef idx="minor">
+            <a:schemeClr val="lt1"/>
+          </a:fontRef>
+        </p:style>
+        <p:txBody>
+          <a:bodyPr rtlCol="0" anchor="ctr"/>
+          <a:p>
+            <a:pPr algn="ctr"/>
+            <a:endParaRPr lang="en-US"/>
+          </a:p>
+        </p:txBody>
+      </p:sp>
+    </p:spTree>
+  </p:cSld>
+  <p:clrMapOvr>
+    <a:masterClrMapping/>
+  </p:clrMapOvr>
+  <p:transition spd="slow">
+    <p:wipe/>
+  </p:transition>
+</p:sld>
+</file>
+
+<file path=ppt/slides/slide18.xml><?xml version="1.0" encoding="utf-8"?>
+<p:sld xmlns:a="http://schemas.openxmlformats.org/drawingml/2006/main" xmlns:r="http://schemas.openxmlformats.org/officeDocument/2006/relationships" xmlns:p="http://schemas.openxmlformats.org/presentationml/2006/main">
+  <p:cSld>
+    <p:spTree>
+      <p:nvGrpSpPr>
+        <p:cNvPr id="1" name=""/>
+        <p:cNvGrpSpPr/>
+        <p:nvPr/>
+      </p:nvGrpSpPr>
+      <p:grpSpPr/>
+      <p:pic>
+        <p:nvPicPr>
+          <p:cNvPr id="10241" name="图片 3"/>
+          <p:cNvPicPr>
+            <a:picLocks noChangeAspect="1"/>
+          </p:cNvPicPr>
+          <p:nvPr/>
+        </p:nvPicPr>
+        <p:blipFill>
+          <a:blip r:embed="rId1"/>
+          <a:srcRect l="5727" r="16841" b="26530"/>
+          <a:stretch>
+            <a:fillRect/>
+          </a:stretch>
+        </p:blipFill>
+        <p:spPr>
+          <a:xfrm>
+            <a:off x="0" y="0"/>
+            <a:ext cx="12192000" cy="6858000"/>
+          </a:xfrm>
+          <a:prstGeom prst="rect">
+            <a:avLst/>
+          </a:prstGeom>
+          <a:noFill/>
+          <a:ln w="9525">
+            <a:noFill/>
+          </a:ln>
+        </p:spPr>
+      </p:pic>
+      <p:sp>
+        <p:nvSpPr>
+          <p:cNvPr id="10255" name="矩形 8"/>
+          <p:cNvSpPr/>
+          <p:nvPr/>
+        </p:nvSpPr>
+        <p:spPr>
+          <a:xfrm>
+            <a:off x="574040" y="1052830"/>
+            <a:ext cx="8148320" cy="523240"/>
+          </a:xfrm>
+          <a:prstGeom prst="rect">
+            <a:avLst/>
+          </a:prstGeom>
+          <a:noFill/>
+          <a:ln w="9525">
+            <a:noFill/>
+          </a:ln>
+        </p:spPr>
+        <p:txBody>
+          <a:bodyPr wrap="square" lIns="0" tIns="0" rIns="0" bIns="0" anchor="t">
+            <a:noAutofit/>
+          </a:bodyPr>
+          <a:p>
+            <a:pPr marL="0" lvl="0" indent="457200" algn="l" defTabSz="1216025">
+              <a:lnSpc>
+                <a:spcPct val="90000"/>
+              </a:lnSpc>
+              <a:spcBef>
+                <a:spcPct val="20000"/>
+              </a:spcBef>
+              <a:buFont typeface="Arial" panose="020B0604020202090204" pitchFamily="34" charset="0"/>
+            </a:pPr>
+            <a:r>
+              <a:rPr lang="en-US" altLang="en-US" sz="2400" dirty="0">
+                <a:solidFill>
+                  <a:srgbClr val="404040"/>
+                </a:solidFill>
+                <a:ea typeface="Calibri" panose="020F0502020204030204" pitchFamily="34" charset="0"/>
+                <a:sym typeface="Arial" panose="020B0604020202090204" pitchFamily="34" charset="0"/>
+              </a:rPr>
+              <a:t>The correlation of Distance to Arrival delay in numbers</a:t>
+            </a:r>
+            <a:endParaRPr lang="en-US" altLang="en-US" sz="2400" dirty="0">
+              <a:solidFill>
+                <a:srgbClr val="404040"/>
+              </a:solidFill>
+              <a:ea typeface="Calibri" panose="020F0502020204030204" pitchFamily="34" charset="0"/>
+              <a:sym typeface="Arial" panose="020B0604020202090204" pitchFamily="34" charset="0"/>
+            </a:endParaRPr>
+          </a:p>
+        </p:txBody>
+      </p:sp>
+      <p:sp>
+        <p:nvSpPr>
+          <p:cNvPr id="10250" name="文本框 28"/>
+          <p:cNvSpPr txBox="1"/>
+          <p:nvPr/>
+        </p:nvSpPr>
+        <p:spPr>
+          <a:xfrm>
+            <a:off x="96520" y="90805"/>
+            <a:ext cx="11864340" cy="706755"/>
+          </a:xfrm>
+          <a:prstGeom prst="rect">
+            <a:avLst/>
+          </a:prstGeom>
+          <a:noFill/>
+          <a:ln w="9525">
+            <a:noFill/>
+          </a:ln>
+        </p:spPr>
+        <p:txBody>
+          <a:bodyPr wrap="square" anchor="t">
+            <a:spAutoFit/>
+          </a:bodyPr>
+          <a:p>
+            <a:pPr>
+              <a:buFont typeface="Arial" panose="020B0604020202090204" pitchFamily="34" charset="0"/>
+            </a:pPr>
+            <a:r>
+              <a:rPr lang="en-US" altLang="en-US" sz="4000" b="1" dirty="0">
+                <a:solidFill>
+                  <a:srgbClr val="404040"/>
+                </a:solidFill>
+                <a:ea typeface="Calibri" panose="020F0502020204030204" pitchFamily="34" charset="0"/>
+                <a:sym typeface="Arial" panose="020B0604020202090204" pitchFamily="34" charset="0"/>
+              </a:rPr>
+              <a:t>Part 3: Exploring how other factors effect delays </a:t>
+            </a:r>
+            <a:endParaRPr lang="en-US" altLang="en-US" sz="4000" b="1" dirty="0">
+              <a:solidFill>
+                <a:srgbClr val="404040"/>
+              </a:solidFill>
+              <a:ea typeface="Calibri" panose="020F0502020204030204" pitchFamily="34" charset="0"/>
+            </a:endParaRPr>
+          </a:p>
+        </p:txBody>
+      </p:sp>
+      <p:pic>
+        <p:nvPicPr>
+          <p:cNvPr id="2" name="Picture 1" descr="Screenshot 2025-11-05 at 5.39.32 PM"/>
+          <p:cNvPicPr>
+            <a:picLocks noChangeAspect="1"/>
+          </p:cNvPicPr>
+          <p:nvPr/>
+        </p:nvPicPr>
+        <p:blipFill>
+          <a:blip r:embed="rId2"/>
+          <a:stretch>
+            <a:fillRect/>
+          </a:stretch>
+        </p:blipFill>
+        <p:spPr>
+          <a:xfrm>
+            <a:off x="1077595" y="2228850"/>
+            <a:ext cx="9000490" cy="2837815"/>
+          </a:xfrm>
+          <a:prstGeom prst="rect">
+            <a:avLst/>
+          </a:prstGeom>
+        </p:spPr>
+      </p:pic>
+    </p:spTree>
+  </p:cSld>
+  <p:clrMapOvr>
+    <a:masterClrMapping/>
+  </p:clrMapOvr>
+  <p:transition spd="slow">
+    <p:wipe/>
+  </p:transition>
+</p:sld>
+</file>
+
+<file path=ppt/slides/slide19.xml><?xml version="1.0" encoding="utf-8"?>
+<p:sld xmlns:a="http://schemas.openxmlformats.org/drawingml/2006/main" xmlns:r="http://schemas.openxmlformats.org/officeDocument/2006/relationships" xmlns:p="http://schemas.openxmlformats.org/presentationml/2006/main">
+  <p:cSld>
+    <p:spTree>
+      <p:nvGrpSpPr>
+        <p:cNvPr id="1" name=""/>
+        <p:cNvGrpSpPr/>
+        <p:nvPr/>
+      </p:nvGrpSpPr>
+      <p:grpSpPr/>
+      <p:pic>
+        <p:nvPicPr>
+          <p:cNvPr id="10241" name="图片 3"/>
+          <p:cNvPicPr>
+            <a:picLocks noChangeAspect="1"/>
+          </p:cNvPicPr>
+          <p:nvPr/>
+        </p:nvPicPr>
+        <p:blipFill>
+          <a:blip r:embed="rId1"/>
+          <a:srcRect l="5727" r="16841" b="26530"/>
+          <a:stretch>
+            <a:fillRect/>
+          </a:stretch>
+        </p:blipFill>
+        <p:spPr>
+          <a:xfrm>
+            <a:off x="0" y="0"/>
+            <a:ext cx="12192000" cy="6858000"/>
+          </a:xfrm>
+          <a:prstGeom prst="rect">
+            <a:avLst/>
+          </a:prstGeom>
+          <a:noFill/>
+          <a:ln w="9525">
+            <a:noFill/>
+          </a:ln>
+        </p:spPr>
+      </p:pic>
+      <p:sp>
+        <p:nvSpPr>
+          <p:cNvPr id="10255" name="矩形 8"/>
+          <p:cNvSpPr/>
+          <p:nvPr/>
+        </p:nvSpPr>
+        <p:spPr>
+          <a:xfrm>
+            <a:off x="574040" y="1052830"/>
+            <a:ext cx="8148320" cy="523240"/>
+          </a:xfrm>
+          <a:prstGeom prst="rect">
+            <a:avLst/>
+          </a:prstGeom>
+          <a:noFill/>
+          <a:ln w="9525">
+            <a:noFill/>
+          </a:ln>
+        </p:spPr>
+        <p:txBody>
+          <a:bodyPr wrap="square" lIns="0" tIns="0" rIns="0" bIns="0" anchor="t">
+            <a:noAutofit/>
+          </a:bodyPr>
+          <a:p>
+            <a:pPr marL="0" lvl="0" indent="457200" algn="l" defTabSz="1216025">
+              <a:lnSpc>
+                <a:spcPct val="90000"/>
+              </a:lnSpc>
+              <a:spcBef>
+                <a:spcPct val="20000"/>
+              </a:spcBef>
+              <a:buFont typeface="Arial" panose="020B0604020202090204" pitchFamily="34" charset="0"/>
+            </a:pPr>
+            <a:r>
+              <a:rPr lang="en-US" altLang="en-US" sz="2400" dirty="0">
+                <a:solidFill>
+                  <a:srgbClr val="404040"/>
+                </a:solidFill>
+                <a:ea typeface="Calibri" panose="020F0502020204030204" pitchFamily="34" charset="0"/>
+                <a:sym typeface="Arial" panose="020B0604020202090204" pitchFamily="34" charset="0"/>
+              </a:rPr>
+              <a:t>The correlation of Distance to Arrival delay in numbers</a:t>
+            </a:r>
+            <a:endParaRPr lang="en-US" altLang="en-US" sz="2400" dirty="0">
+              <a:solidFill>
+                <a:srgbClr val="404040"/>
+              </a:solidFill>
+              <a:ea typeface="Calibri" panose="020F0502020204030204" pitchFamily="34" charset="0"/>
+              <a:sym typeface="Arial" panose="020B0604020202090204" pitchFamily="34" charset="0"/>
+            </a:endParaRPr>
+          </a:p>
+        </p:txBody>
+      </p:sp>
+      <p:sp>
+        <p:nvSpPr>
+          <p:cNvPr id="10250" name="文本框 28"/>
+          <p:cNvSpPr txBox="1"/>
+          <p:nvPr/>
+        </p:nvSpPr>
+        <p:spPr>
+          <a:xfrm>
+            <a:off x="96520" y="90805"/>
+            <a:ext cx="11864340" cy="706755"/>
+          </a:xfrm>
+          <a:prstGeom prst="rect">
+            <a:avLst/>
+          </a:prstGeom>
+          <a:noFill/>
+          <a:ln w="9525">
+            <a:noFill/>
+          </a:ln>
+        </p:spPr>
+        <p:txBody>
+          <a:bodyPr wrap="square" anchor="t">
+            <a:spAutoFit/>
+          </a:bodyPr>
+          <a:p>
+            <a:pPr>
+              <a:buFont typeface="Arial" panose="020B0604020202090204" pitchFamily="34" charset="0"/>
+            </a:pPr>
+            <a:r>
+              <a:rPr lang="en-US" altLang="en-US" sz="4000" b="1" dirty="0">
+                <a:solidFill>
+                  <a:srgbClr val="404040"/>
+                </a:solidFill>
+                <a:ea typeface="Calibri" panose="020F0502020204030204" pitchFamily="34" charset="0"/>
+                <a:sym typeface="Arial" panose="020B0604020202090204" pitchFamily="34" charset="0"/>
+              </a:rPr>
+              <a:t>Part 3: Exploring how other factors effect delays </a:t>
+            </a:r>
+            <a:endParaRPr lang="en-US" altLang="en-US" sz="4000" b="1" dirty="0">
+              <a:solidFill>
+                <a:srgbClr val="404040"/>
+              </a:solidFill>
+              <a:ea typeface="Calibri" panose="020F0502020204030204" pitchFamily="34" charset="0"/>
+            </a:endParaRPr>
+          </a:p>
+        </p:txBody>
+      </p:sp>
+      <p:pic>
+        <p:nvPicPr>
+          <p:cNvPr id="3" name="Picture 2" descr="Screenshot 2025-11-05 at 5.40.58 PM"/>
+          <p:cNvPicPr>
+            <a:picLocks noChangeAspect="1"/>
+          </p:cNvPicPr>
+          <p:nvPr/>
+        </p:nvPicPr>
+        <p:blipFill>
+          <a:blip r:embed="rId2"/>
+          <a:stretch>
+            <a:fillRect/>
+          </a:stretch>
+        </p:blipFill>
+        <p:spPr>
+          <a:xfrm>
+            <a:off x="96520" y="1482090"/>
+            <a:ext cx="6130925" cy="2863215"/>
+          </a:xfrm>
+          <a:prstGeom prst="rect">
+            <a:avLst/>
+          </a:prstGeom>
+        </p:spPr>
+      </p:pic>
+      <p:pic>
+        <p:nvPicPr>
+          <p:cNvPr id="4" name="Picture 3" descr="Screenshot 2025-11-05 at 5.41.16 PM"/>
+          <p:cNvPicPr>
+            <a:picLocks noChangeAspect="1"/>
+          </p:cNvPicPr>
+          <p:nvPr/>
+        </p:nvPicPr>
+        <p:blipFill>
+          <a:blip r:embed="rId3"/>
+          <a:stretch>
+            <a:fillRect/>
+          </a:stretch>
+        </p:blipFill>
+        <p:spPr>
+          <a:xfrm>
+            <a:off x="5900420" y="2509520"/>
+            <a:ext cx="6241415" cy="4251960"/>
+          </a:xfrm>
+          <a:prstGeom prst="rect">
+            <a:avLst/>
+          </a:prstGeom>
+        </p:spPr>
+      </p:pic>
+    </p:spTree>
+  </p:cSld>
+  <p:clrMapOvr>
+    <a:masterClrMapping/>
+  </p:clrMapOvr>
+  <p:transition spd="slow">
+    <p:wipe/>
+  </p:transition>
+</p:sld>
+</file>
+
+<file path=ppt/slides/slide2.xml><?xml version="1.0" encoding="utf-8"?>
+<p:sld xmlns:a="http://schemas.openxmlformats.org/drawingml/2006/main" xmlns:r="http://schemas.openxmlformats.org/officeDocument/2006/relationships" xmlns:p="http://schemas.openxmlformats.org/presentationml/2006/main">
+  <p:cSld>
+    <p:spTree>
+      <p:nvGrpSpPr>
+        <p:cNvPr id="1" name=""/>
+        <p:cNvGrpSpPr/>
+        <p:nvPr/>
+      </p:nvGrpSpPr>
+      <p:grpSpPr/>
+      <p:pic>
+        <p:nvPicPr>
+          <p:cNvPr id="10241" name="图片 3"/>
+          <p:cNvPicPr>
+            <a:picLocks noChangeAspect="1"/>
+          </p:cNvPicPr>
+          <p:nvPr/>
+        </p:nvPicPr>
+        <p:blipFill>
+          <a:blip r:embed="rId1"/>
+          <a:srcRect l="5727" r="16841" b="26530"/>
+          <a:stretch>
+            <a:fillRect/>
+          </a:stretch>
+        </p:blipFill>
+        <p:spPr>
+          <a:xfrm>
+            <a:off x="0" y="0"/>
+            <a:ext cx="12192000" cy="6858000"/>
+          </a:xfrm>
+          <a:prstGeom prst="rect">
+            <a:avLst/>
+          </a:prstGeom>
+          <a:noFill/>
+          <a:ln w="9525">
+            <a:noFill/>
+          </a:ln>
+        </p:spPr>
+      </p:pic>
+      <p:sp>
+        <p:nvSpPr>
+          <p:cNvPr id="10250" name="文本框 28"/>
+          <p:cNvSpPr txBox="1"/>
+          <p:nvPr/>
+        </p:nvSpPr>
+        <p:spPr>
+          <a:xfrm>
+            <a:off x="3966845" y="714375"/>
+            <a:ext cx="3651250" cy="1014730"/>
+          </a:xfrm>
+          <a:prstGeom prst="rect">
+            <a:avLst/>
+          </a:prstGeom>
+          <a:noFill/>
+          <a:ln w="9525">
+            <a:noFill/>
+          </a:ln>
+        </p:spPr>
+        <p:txBody>
+          <a:bodyPr wrap="square" anchor="t">
+            <a:spAutoFit/>
+          </a:bodyPr>
+          <a:p>
+            <a:pPr algn="ctr">
+              <a:buFont typeface="Arial" panose="020B0604020202090204" pitchFamily="34" charset="0"/>
+            </a:pPr>
+            <a:r>
+              <a:rPr lang="en-US" altLang="en-US" sz="6000" b="1" dirty="0">
+                <a:solidFill>
+                  <a:srgbClr val="404040"/>
+                </a:solidFill>
+                <a:ea typeface="Calibri" panose="020F0502020204030204" pitchFamily="34" charset="0"/>
+              </a:rPr>
+              <a:t>Objective</a:t>
+            </a:r>
+            <a:endParaRPr lang="en-US" altLang="en-US" sz="6000" b="1" dirty="0">
+              <a:solidFill>
+                <a:srgbClr val="404040"/>
+              </a:solidFill>
+              <a:ea typeface="Calibri" panose="020F0502020204030204" pitchFamily="34" charset="0"/>
+            </a:endParaRPr>
+          </a:p>
+        </p:txBody>
+      </p:sp>
+      <p:sp>
+        <p:nvSpPr>
+          <p:cNvPr id="12" name="矩形 11"/>
+          <p:cNvSpPr/>
+          <p:nvPr/>
+        </p:nvSpPr>
+        <p:spPr>
+          <a:xfrm>
+            <a:off x="828675" y="1729105"/>
+            <a:ext cx="10515600" cy="4653280"/>
+          </a:xfrm>
+          <a:prstGeom prst="rect">
+            <a:avLst/>
+          </a:prstGeom>
+          <a:noFill/>
+          <a:ln>
+            <a:solidFill>
+              <a:schemeClr val="tx1"/>
+            </a:solidFill>
+          </a:ln>
+        </p:spPr>
+        <p:style>
+          <a:lnRef idx="2">
+            <a:schemeClr val="accent1">
+              <a:shade val="50000"/>
+            </a:schemeClr>
+          </a:lnRef>
+          <a:fillRef idx="1">
+            <a:schemeClr val="accent1"/>
+          </a:fillRef>
+          <a:effectRef idx="0">
+            <a:schemeClr val="accent1"/>
+          </a:effectRef>
+          <a:fontRef idx="minor">
+            <a:schemeClr val="lt1"/>
+          </a:fontRef>
+        </p:style>
+        <p:txBody>
+          <a:bodyPr anchor="ctr"/>
+          <a:lstStyle/>
+          <a:p>
+            <a:pPr marL="0" marR="0" lvl="0" indent="0" algn="ctr" defTabSz="914400" rtl="0" eaLnBrk="1" fontAlgn="auto" latinLnBrk="0" hangingPunct="1">
+              <a:lnSpc>
+                <a:spcPct val="100000"/>
+              </a:lnSpc>
+              <a:spcBef>
+                <a:spcPts val="0"/>
+              </a:spcBef>
+              <a:spcAft>
+                <a:spcPts val="0"/>
+              </a:spcAft>
+              <a:buClrTx/>
+              <a:buSzTx/>
+              <a:buFontTx/>
+              <a:buNone/>
+              <a:defRPr/>
+            </a:pPr>
+            <a:endParaRPr kumimoji="0" lang="zh-CN" altLang="en-US" sz="1800" b="0" i="0" u="none" strike="noStrike" kern="1200" cap="none" spc="0" normalizeH="0" baseline="0" noProof="0">
+              <a:ln>
+                <a:noFill/>
+              </a:ln>
+              <a:solidFill>
+                <a:schemeClr val="lt1"/>
+              </a:solidFill>
+              <a:effectLst/>
+              <a:uLnTx/>
+              <a:uFillTx/>
+              <a:latin typeface="+mn-lt"/>
+              <a:ea typeface="+mn-ea"/>
+              <a:cs typeface="+mn-cs"/>
+            </a:endParaRPr>
+          </a:p>
+        </p:txBody>
+      </p:sp>
+      <p:sp>
+        <p:nvSpPr>
+          <p:cNvPr id="10253" name="文本框 6"/>
+          <p:cNvSpPr txBox="1"/>
+          <p:nvPr/>
+        </p:nvSpPr>
+        <p:spPr>
+          <a:xfrm>
+            <a:off x="956945" y="3169920"/>
+            <a:ext cx="9671685" cy="929640"/>
+          </a:xfrm>
+          <a:prstGeom prst="rect">
+            <a:avLst/>
+          </a:prstGeom>
+          <a:noFill/>
+          <a:ln w="9525">
+            <a:noFill/>
+          </a:ln>
+        </p:spPr>
+        <p:txBody>
+          <a:bodyPr wrap="square" anchor="t">
+            <a:noAutofit/>
+          </a:bodyPr>
+          <a:p>
+            <a:pPr>
+              <a:buFont typeface="Arial" panose="020B0604020202090204" pitchFamily="34" charset="0"/>
+            </a:pPr>
+            <a:endParaRPr lang="en-US" altLang="en-US" sz="3200" b="1" dirty="0">
+              <a:solidFill>
+                <a:srgbClr val="404040"/>
+              </a:solidFill>
+              <a:ea typeface="Calibri" panose="020F0502020204030204" pitchFamily="34" charset="0"/>
+            </a:endParaRPr>
+          </a:p>
+        </p:txBody>
+      </p:sp>
+      <p:sp>
+        <p:nvSpPr>
+          <p:cNvPr id="10255" name="矩形 8"/>
+          <p:cNvSpPr/>
+          <p:nvPr/>
+        </p:nvSpPr>
+        <p:spPr>
+          <a:xfrm>
+            <a:off x="1082675" y="1889125"/>
+            <a:ext cx="10102215" cy="4272915"/>
+          </a:xfrm>
+          <a:prstGeom prst="rect">
+            <a:avLst/>
+          </a:prstGeom>
+          <a:noFill/>
+          <a:ln w="9525">
+            <a:noFill/>
+          </a:ln>
+        </p:spPr>
+        <p:txBody>
+          <a:bodyPr wrap="square" lIns="0" tIns="0" rIns="0" bIns="0" anchor="t">
+            <a:noAutofit/>
+          </a:bodyPr>
+          <a:p>
+            <a:pPr marL="457200" lvl="1" indent="457200" algn="l" defTabSz="1216025">
+              <a:lnSpc>
+                <a:spcPct val="130000"/>
+              </a:lnSpc>
+              <a:spcBef>
+                <a:spcPct val="20000"/>
+              </a:spcBef>
+              <a:buFont typeface="Arial" panose="020B0604020202090204" pitchFamily="34" charset="0"/>
+            </a:pPr>
+            <a:r>
+              <a:rPr lang="en-US" altLang="en-US" sz="3200" b="1" dirty="0">
+                <a:solidFill>
+                  <a:srgbClr val="404040"/>
+                </a:solidFill>
+                <a:ea typeface="Calibri" panose="020F0502020204030204" pitchFamily="34" charset="0"/>
+                <a:sym typeface="Arial" panose="020B0604020202090204" pitchFamily="34" charset="0"/>
+              </a:rPr>
+              <a:t>Part 1</a:t>
+            </a:r>
+            <a:r>
+              <a:rPr lang="en-US" altLang="en-US" sz="3200" dirty="0">
+                <a:solidFill>
+                  <a:srgbClr val="404040"/>
+                </a:solidFill>
+                <a:ea typeface="Calibri" panose="020F0502020204030204" pitchFamily="34" charset="0"/>
+                <a:sym typeface="Arial" panose="020B0604020202090204" pitchFamily="34" charset="0"/>
+              </a:rPr>
+              <a:t>: Clean and process the flight dataset</a:t>
+            </a:r>
+            <a:endParaRPr lang="en-US" altLang="en-US" sz="3200" dirty="0">
+              <a:solidFill>
+                <a:srgbClr val="404040"/>
+              </a:solidFill>
+              <a:ea typeface="Calibri" panose="020F0502020204030204" pitchFamily="34" charset="0"/>
+              <a:sym typeface="Arial" panose="020B0604020202090204" pitchFamily="34" charset="0"/>
+            </a:endParaRPr>
+          </a:p>
+          <a:p>
+            <a:pPr marL="457200" lvl="1" indent="457200" algn="l" defTabSz="1216025">
+              <a:lnSpc>
+                <a:spcPct val="130000"/>
+              </a:lnSpc>
+              <a:spcBef>
+                <a:spcPct val="20000"/>
+              </a:spcBef>
+              <a:buFont typeface="Arial" panose="020B0604020202090204" pitchFamily="34" charset="0"/>
+            </a:pPr>
+            <a:r>
+              <a:rPr lang="en-US" altLang="en-US" sz="3200" b="1" dirty="0">
+                <a:solidFill>
+                  <a:srgbClr val="404040"/>
+                </a:solidFill>
+                <a:ea typeface="Calibri" panose="020F0502020204030204" pitchFamily="34" charset="0"/>
+                <a:sym typeface="Arial" panose="020B0604020202090204" pitchFamily="34" charset="0"/>
+              </a:rPr>
+              <a:t>Part 2</a:t>
+            </a:r>
+            <a:r>
+              <a:rPr lang="en-US" altLang="en-US" sz="3200" dirty="0">
+                <a:solidFill>
+                  <a:srgbClr val="404040"/>
+                </a:solidFill>
+                <a:ea typeface="Calibri" panose="020F0502020204030204" pitchFamily="34" charset="0"/>
+                <a:sym typeface="Arial" panose="020B0604020202090204" pitchFamily="34" charset="0"/>
+              </a:rPr>
+              <a:t>: Identify the major causes of flight delays</a:t>
+            </a:r>
+            <a:endParaRPr lang="en-US" altLang="en-US" sz="3200" dirty="0">
+              <a:solidFill>
+                <a:srgbClr val="404040"/>
+              </a:solidFill>
+              <a:ea typeface="Calibri" panose="020F0502020204030204" pitchFamily="34" charset="0"/>
+              <a:sym typeface="Arial" panose="020B0604020202090204" pitchFamily="34" charset="0"/>
+            </a:endParaRPr>
+          </a:p>
+          <a:p>
+            <a:pPr marL="457200" lvl="1" indent="457200" algn="l" defTabSz="1216025">
+              <a:lnSpc>
+                <a:spcPct val="130000"/>
+              </a:lnSpc>
+              <a:spcBef>
+                <a:spcPct val="20000"/>
+              </a:spcBef>
+              <a:buFont typeface="Arial" panose="020B0604020202090204" pitchFamily="34" charset="0"/>
+            </a:pPr>
+            <a:r>
+              <a:rPr lang="en-US" altLang="en-US" sz="3200" b="1" dirty="0">
+                <a:solidFill>
+                  <a:srgbClr val="404040"/>
+                </a:solidFill>
+                <a:ea typeface="Calibri" panose="020F0502020204030204" pitchFamily="34" charset="0"/>
+                <a:sym typeface="Arial" panose="020B0604020202090204" pitchFamily="34" charset="0"/>
+              </a:rPr>
+              <a:t>Part 3</a:t>
+            </a:r>
+            <a:r>
+              <a:rPr lang="en-US" altLang="en-US" sz="3200" dirty="0">
+                <a:solidFill>
+                  <a:srgbClr val="404040"/>
+                </a:solidFill>
+                <a:ea typeface="Calibri" panose="020F0502020204030204" pitchFamily="34" charset="0"/>
+                <a:sym typeface="Arial" panose="020B0604020202090204" pitchFamily="34" charset="0"/>
+              </a:rPr>
+              <a:t>: Explore how factors like distance or weather influence delays</a:t>
+            </a:r>
+            <a:endParaRPr lang="en-US" altLang="en-US" sz="3200" dirty="0">
+              <a:solidFill>
+                <a:srgbClr val="404040"/>
+              </a:solidFill>
+              <a:ea typeface="Calibri" panose="020F0502020204030204" pitchFamily="34" charset="0"/>
+              <a:sym typeface="Arial" panose="020B0604020202090204" pitchFamily="34" charset="0"/>
+            </a:endParaRPr>
+          </a:p>
+          <a:p>
+            <a:pPr marL="457200" lvl="1" indent="457200" algn="l" defTabSz="1216025">
+              <a:lnSpc>
+                <a:spcPct val="130000"/>
+              </a:lnSpc>
+              <a:spcBef>
+                <a:spcPct val="20000"/>
+              </a:spcBef>
+              <a:buFont typeface="Arial" panose="020B0604020202090204" pitchFamily="34" charset="0"/>
+            </a:pPr>
+            <a:r>
+              <a:rPr lang="en-US" altLang="en-US" sz="3200" b="1" dirty="0">
+                <a:solidFill>
+                  <a:srgbClr val="404040"/>
+                </a:solidFill>
+                <a:ea typeface="Calibri" panose="020F0502020204030204" pitchFamily="34" charset="0"/>
+                <a:sym typeface="Arial" panose="020B0604020202090204" pitchFamily="34" charset="0"/>
+              </a:rPr>
+              <a:t>Part 4</a:t>
+            </a:r>
+            <a:r>
+              <a:rPr lang="en-US" altLang="en-US" sz="3200" dirty="0">
+                <a:solidFill>
+                  <a:srgbClr val="404040"/>
+                </a:solidFill>
+                <a:ea typeface="Calibri" panose="020F0502020204030204" pitchFamily="34" charset="0"/>
+                <a:sym typeface="Arial" panose="020B0604020202090204" pitchFamily="34" charset="0"/>
+              </a:rPr>
+              <a:t>: Visualize the delay patterns clearly</a:t>
+            </a:r>
+            <a:endParaRPr lang="en-US" altLang="en-US" sz="3200" dirty="0">
+              <a:solidFill>
+                <a:srgbClr val="404040"/>
+              </a:solidFill>
+              <a:ea typeface="Calibri" panose="020F0502020204030204" pitchFamily="34" charset="0"/>
+              <a:sym typeface="Arial" panose="020B0604020202090204" pitchFamily="34" charset="0"/>
+            </a:endParaRPr>
+          </a:p>
+        </p:txBody>
+      </p:sp>
+    </p:spTree>
+  </p:cSld>
+  <p:clrMapOvr>
+    <a:masterClrMapping/>
+  </p:clrMapOvr>
+  <p:transition spd="slow">
+    <p:wipe/>
+  </p:transition>
+</p:sld>
+</file>
+
+<file path=ppt/slides/slide20.xml><?xml version="1.0" encoding="utf-8"?>
+<p:sld xmlns:a="http://schemas.openxmlformats.org/drawingml/2006/main" xmlns:r="http://schemas.openxmlformats.org/officeDocument/2006/relationships" xmlns:p="http://schemas.openxmlformats.org/presentationml/2006/main">
+  <p:cSld>
+    <p:spTree>
+      <p:nvGrpSpPr>
+        <p:cNvPr id="1" name=""/>
+        <p:cNvGrpSpPr/>
+        <p:nvPr/>
+      </p:nvGrpSpPr>
+      <p:grpSpPr/>
+      <p:pic>
+        <p:nvPicPr>
+          <p:cNvPr id="10241" name="图片 3"/>
+          <p:cNvPicPr>
+            <a:picLocks noChangeAspect="1"/>
+          </p:cNvPicPr>
+          <p:nvPr/>
+        </p:nvPicPr>
+        <p:blipFill>
+          <a:blip r:embed="rId1"/>
+          <a:srcRect l="5727" r="16841" b="26530"/>
+          <a:stretch>
+            <a:fillRect/>
+          </a:stretch>
+        </p:blipFill>
+        <p:spPr>
+          <a:xfrm>
+            <a:off x="0" y="0"/>
+            <a:ext cx="12192000" cy="6858000"/>
+          </a:xfrm>
+          <a:prstGeom prst="rect">
+            <a:avLst/>
+          </a:prstGeom>
+          <a:noFill/>
+          <a:ln w="9525">
+            <a:noFill/>
+          </a:ln>
+        </p:spPr>
+      </p:pic>
+      <p:sp>
+        <p:nvSpPr>
+          <p:cNvPr id="10255" name="矩形 8"/>
+          <p:cNvSpPr/>
+          <p:nvPr/>
+        </p:nvSpPr>
+        <p:spPr>
+          <a:xfrm>
+            <a:off x="96520" y="797560"/>
+            <a:ext cx="11974830" cy="5900420"/>
+          </a:xfrm>
+          <a:prstGeom prst="rect">
+            <a:avLst/>
+          </a:prstGeom>
+          <a:noFill/>
+          <a:ln w="9525">
+            <a:noFill/>
+          </a:ln>
+        </p:spPr>
+        <p:txBody>
+          <a:bodyPr wrap="square" lIns="0" tIns="0" rIns="0" bIns="0" anchor="t">
+            <a:noAutofit/>
+          </a:bodyPr>
+          <a:p>
+            <a:pPr marL="0" lvl="0" indent="457200" algn="l" defTabSz="1216025">
+              <a:lnSpc>
+                <a:spcPct val="80000"/>
+              </a:lnSpc>
+              <a:spcBef>
+                <a:spcPct val="20000"/>
+              </a:spcBef>
+              <a:buFont typeface="Arial" panose="020B0604020202090204" pitchFamily="34" charset="0"/>
+            </a:pPr>
+            <a:r>
+              <a:rPr lang="en-US" altLang="en-US" sz="1800" dirty="0">
+                <a:solidFill>
+                  <a:srgbClr val="404040"/>
+                </a:solidFill>
+                <a:ea typeface="Calibri" panose="020F0502020204030204" pitchFamily="34" charset="0"/>
+                <a:sym typeface="Arial" panose="020B0604020202090204" pitchFamily="34" charset="0"/>
+              </a:rPr>
+              <a:t>Late aircraft and carrier delays make up the majority (~90%) of total delay time.</a:t>
+            </a:r>
+            <a:endParaRPr lang="en-US" altLang="en-US" sz="1800" dirty="0">
+              <a:solidFill>
+                <a:srgbClr val="404040"/>
+              </a:solidFill>
+              <a:ea typeface="Calibri" panose="020F0502020204030204" pitchFamily="34" charset="0"/>
+              <a:sym typeface="Arial" panose="020B0604020202090204" pitchFamily="34" charset="0"/>
+            </a:endParaRPr>
+          </a:p>
+          <a:p>
+            <a:pPr marL="0" lvl="0" indent="457200" algn="l" defTabSz="1216025">
+              <a:lnSpc>
+                <a:spcPct val="80000"/>
+              </a:lnSpc>
+              <a:spcBef>
+                <a:spcPct val="20000"/>
+              </a:spcBef>
+              <a:buFont typeface="Arial" panose="020B0604020202090204" pitchFamily="34" charset="0"/>
+            </a:pPr>
+            <a:r>
+              <a:rPr lang="en-US" altLang="en-US" sz="1800" dirty="0">
+                <a:solidFill>
+                  <a:srgbClr val="404040"/>
+                </a:solidFill>
+                <a:ea typeface="Calibri" panose="020F0502020204030204" pitchFamily="34" charset="0"/>
+                <a:sym typeface="Arial" panose="020B0604020202090204" pitchFamily="34" charset="0"/>
+              </a:rPr>
+              <a:t>So:</a:t>
+            </a:r>
+            <a:endParaRPr lang="en-US" altLang="en-US" sz="1800" dirty="0">
+              <a:solidFill>
+                <a:srgbClr val="404040"/>
+              </a:solidFill>
+              <a:ea typeface="Calibri" panose="020F0502020204030204" pitchFamily="34" charset="0"/>
+              <a:sym typeface="Arial" panose="020B0604020202090204" pitchFamily="34" charset="0"/>
+            </a:endParaRPr>
+          </a:p>
+          <a:p>
+            <a:pPr marL="0" lvl="0" indent="457200" algn="l" defTabSz="1216025">
+              <a:lnSpc>
+                <a:spcPct val="80000"/>
+              </a:lnSpc>
+              <a:spcBef>
+                <a:spcPct val="20000"/>
+              </a:spcBef>
+              <a:buFont typeface="Arial" panose="020B0604020202090204" pitchFamily="34" charset="0"/>
+            </a:pPr>
+            <a:r>
+              <a:rPr lang="en-US" altLang="en-US" sz="1800" dirty="0">
+                <a:solidFill>
+                  <a:srgbClr val="404040"/>
+                </a:solidFill>
+                <a:ea typeface="Calibri" panose="020F0502020204030204" pitchFamily="34" charset="0"/>
+                <a:sym typeface="Arial" panose="020B0604020202090204" pitchFamily="34" charset="0"/>
+              </a:rPr>
+              <a:t>Delays are not primarily caused by distance, weather, or security checks.</a:t>
+            </a:r>
+            <a:endParaRPr lang="en-US" altLang="en-US" sz="1800" dirty="0">
+              <a:solidFill>
+                <a:srgbClr val="404040"/>
+              </a:solidFill>
+              <a:ea typeface="Calibri" panose="020F0502020204030204" pitchFamily="34" charset="0"/>
+              <a:sym typeface="Arial" panose="020B0604020202090204" pitchFamily="34" charset="0"/>
+            </a:endParaRPr>
+          </a:p>
+          <a:p>
+            <a:pPr marL="0" lvl="0" indent="457200" algn="l" defTabSz="1216025">
+              <a:lnSpc>
+                <a:spcPct val="80000"/>
+              </a:lnSpc>
+              <a:spcBef>
+                <a:spcPct val="20000"/>
+              </a:spcBef>
+              <a:buFont typeface="Arial" panose="020B0604020202090204" pitchFamily="34" charset="0"/>
+            </a:pPr>
+            <a:r>
+              <a:rPr lang="en-US" altLang="en-US" sz="1800" dirty="0">
+                <a:solidFill>
+                  <a:srgbClr val="404040"/>
+                </a:solidFill>
+                <a:ea typeface="Calibri" panose="020F0502020204030204" pitchFamily="34" charset="0"/>
+                <a:sym typeface="Arial" panose="020B0604020202090204" pitchFamily="34" charset="0"/>
+              </a:rPr>
+              <a:t>Instead, they're due to how airlines manage their own flight operations</a:t>
+            </a:r>
+            <a:endParaRPr lang="en-US" altLang="en-US" sz="1800" dirty="0">
+              <a:solidFill>
+                <a:srgbClr val="404040"/>
+              </a:solidFill>
+              <a:ea typeface="Calibri" panose="020F0502020204030204" pitchFamily="34" charset="0"/>
+              <a:sym typeface="Arial" panose="020B0604020202090204" pitchFamily="34" charset="0"/>
+            </a:endParaRPr>
+          </a:p>
+          <a:p>
+            <a:pPr marL="0" lvl="0" indent="457200" algn="l" defTabSz="1216025">
+              <a:lnSpc>
+                <a:spcPct val="80000"/>
+              </a:lnSpc>
+              <a:spcBef>
+                <a:spcPct val="20000"/>
+              </a:spcBef>
+              <a:buFont typeface="Arial" panose="020B0604020202090204" pitchFamily="34" charset="0"/>
+            </a:pPr>
+            <a:r>
+              <a:rPr lang="en-US" altLang="en-US" sz="1800" dirty="0">
+                <a:solidFill>
+                  <a:srgbClr val="404040"/>
+                </a:solidFill>
+                <a:ea typeface="Calibri" panose="020F0502020204030204" pitchFamily="34" charset="0"/>
+                <a:sym typeface="Arial" panose="020B0604020202090204" pitchFamily="34" charset="0"/>
+              </a:rPr>
+              <a:t>   </a:t>
+            </a:r>
+            <a:endParaRPr lang="en-US" altLang="en-US" sz="1800" dirty="0">
+              <a:solidFill>
+                <a:srgbClr val="404040"/>
+              </a:solidFill>
+              <a:ea typeface="Calibri" panose="020F0502020204030204" pitchFamily="34" charset="0"/>
+              <a:sym typeface="Arial" panose="020B0604020202090204" pitchFamily="34" charset="0"/>
+            </a:endParaRPr>
+          </a:p>
+          <a:p>
+            <a:pPr marL="0" lvl="0" indent="457200" algn="l" defTabSz="1216025">
+              <a:lnSpc>
+                <a:spcPct val="80000"/>
+              </a:lnSpc>
+              <a:spcBef>
+                <a:spcPct val="20000"/>
+              </a:spcBef>
+              <a:buFont typeface="Arial" panose="020B0604020202090204" pitchFamily="34" charset="0"/>
+            </a:pPr>
+            <a:r>
+              <a:rPr lang="en-US" altLang="en-US" sz="1800" dirty="0">
+                <a:solidFill>
+                  <a:srgbClr val="404040"/>
+                </a:solidFill>
+                <a:ea typeface="Calibri" panose="020F0502020204030204" pitchFamily="34" charset="0"/>
+                <a:sym typeface="Arial" panose="020B0604020202090204" pitchFamily="34" charset="0"/>
+              </a:rPr>
+              <a:t>Late Aircraft Delays</a:t>
+            </a:r>
+            <a:endParaRPr lang="en-US" altLang="en-US" sz="1800" dirty="0">
+              <a:solidFill>
+                <a:srgbClr val="404040"/>
+              </a:solidFill>
+              <a:ea typeface="Calibri" panose="020F0502020204030204" pitchFamily="34" charset="0"/>
+              <a:sym typeface="Arial" panose="020B0604020202090204" pitchFamily="34" charset="0"/>
+            </a:endParaRPr>
+          </a:p>
+          <a:p>
+            <a:pPr marL="457200" lvl="1" indent="457200" algn="l" defTabSz="1216025">
+              <a:lnSpc>
+                <a:spcPct val="80000"/>
+              </a:lnSpc>
+              <a:spcBef>
+                <a:spcPct val="20000"/>
+              </a:spcBef>
+              <a:buFont typeface="Arial" panose="020B0604020202090204" pitchFamily="34" charset="0"/>
+            </a:pPr>
+            <a:r>
+              <a:rPr lang="en-US" altLang="en-US" sz="1800" dirty="0">
+                <a:solidFill>
+                  <a:srgbClr val="404040"/>
+                </a:solidFill>
+                <a:ea typeface="Calibri" panose="020F0502020204030204" pitchFamily="34" charset="0"/>
+                <a:sym typeface="Arial" panose="020B0604020202090204" pitchFamily="34" charset="0"/>
+              </a:rPr>
+              <a:t>These happen when the previous flight of the same airplane arrives late, causing a chain reaction.</a:t>
+            </a:r>
+            <a:endParaRPr lang="en-US" altLang="en-US" sz="1800" dirty="0">
+              <a:solidFill>
+                <a:srgbClr val="404040"/>
+              </a:solidFill>
+              <a:ea typeface="Calibri" panose="020F0502020204030204" pitchFamily="34" charset="0"/>
+              <a:sym typeface="Arial" panose="020B0604020202090204" pitchFamily="34" charset="0"/>
+            </a:endParaRPr>
+          </a:p>
+          <a:p>
+            <a:pPr marL="914400" lvl="2" indent="457200" algn="l" defTabSz="1216025">
+              <a:lnSpc>
+                <a:spcPct val="80000"/>
+              </a:lnSpc>
+              <a:spcBef>
+                <a:spcPct val="20000"/>
+              </a:spcBef>
+              <a:buFont typeface="Arial" panose="020B0604020202090204" pitchFamily="34" charset="0"/>
+            </a:pPr>
+            <a:r>
+              <a:rPr lang="en-US" altLang="en-US" sz="1800" dirty="0">
+                <a:solidFill>
+                  <a:srgbClr val="404040"/>
+                </a:solidFill>
+                <a:ea typeface="Calibri" panose="020F0502020204030204" pitchFamily="34" charset="0"/>
+                <a:sym typeface="Arial" panose="020B0604020202090204" pitchFamily="34" charset="0"/>
+              </a:rPr>
+              <a:t>- Turnaround time (unloading, cleaning, refueling) becomes rushed or extended.</a:t>
+            </a:r>
+            <a:endParaRPr lang="en-US" altLang="en-US" sz="1800" dirty="0">
+              <a:solidFill>
+                <a:srgbClr val="404040"/>
+              </a:solidFill>
+              <a:ea typeface="Calibri" panose="020F0502020204030204" pitchFamily="34" charset="0"/>
+              <a:sym typeface="Arial" panose="020B0604020202090204" pitchFamily="34" charset="0"/>
+            </a:endParaRPr>
+          </a:p>
+          <a:p>
+            <a:pPr marL="914400" lvl="2" indent="457200" algn="l" defTabSz="1216025">
+              <a:lnSpc>
+                <a:spcPct val="80000"/>
+              </a:lnSpc>
+              <a:spcBef>
+                <a:spcPct val="20000"/>
+              </a:spcBef>
+              <a:buFont typeface="Arial" panose="020B0604020202090204" pitchFamily="34" charset="0"/>
+            </a:pPr>
+            <a:r>
+              <a:rPr lang="en-US" altLang="en-US" sz="1800" dirty="0">
+                <a:solidFill>
+                  <a:srgbClr val="404040"/>
+                </a:solidFill>
+                <a:ea typeface="Calibri" panose="020F0502020204030204" pitchFamily="34" charset="0"/>
+                <a:sym typeface="Arial" panose="020B0604020202090204" pitchFamily="34" charset="0"/>
+              </a:rPr>
+              <a:t>- If a plane is late in the morning, every next flight using that aircraft risks being delayed.</a:t>
+            </a:r>
+            <a:endParaRPr lang="en-US" altLang="en-US" sz="1800" dirty="0">
+              <a:solidFill>
+                <a:srgbClr val="404040"/>
+              </a:solidFill>
+              <a:ea typeface="Calibri" panose="020F0502020204030204" pitchFamily="34" charset="0"/>
+              <a:sym typeface="Arial" panose="020B0604020202090204" pitchFamily="34" charset="0"/>
+            </a:endParaRPr>
+          </a:p>
+          <a:p>
+            <a:pPr marL="914400" lvl="2" indent="457200" algn="l" defTabSz="1216025">
+              <a:lnSpc>
+                <a:spcPct val="80000"/>
+              </a:lnSpc>
+              <a:spcBef>
+                <a:spcPct val="20000"/>
+              </a:spcBef>
+              <a:buFont typeface="Arial" panose="020B0604020202090204" pitchFamily="34" charset="0"/>
+            </a:pPr>
+            <a:r>
+              <a:rPr lang="en-US" altLang="en-US" sz="1800" dirty="0">
+                <a:solidFill>
+                  <a:srgbClr val="404040"/>
+                </a:solidFill>
+                <a:ea typeface="Calibri" panose="020F0502020204030204" pitchFamily="34" charset="0"/>
+                <a:sym typeface="Arial" panose="020B0604020202090204" pitchFamily="34" charset="0"/>
+              </a:rPr>
+              <a:t>- The longer the day goes on: the bigger the cumulative delay.</a:t>
+            </a:r>
+            <a:endParaRPr lang="en-US" altLang="en-US" sz="1800" dirty="0">
+              <a:solidFill>
+                <a:srgbClr val="404040"/>
+              </a:solidFill>
+              <a:ea typeface="Calibri" panose="020F0502020204030204" pitchFamily="34" charset="0"/>
+              <a:sym typeface="Arial" panose="020B0604020202090204" pitchFamily="34" charset="0"/>
+            </a:endParaRPr>
+          </a:p>
+          <a:p>
+            <a:pPr marL="0" lvl="0" indent="457200" algn="l" defTabSz="1216025">
+              <a:lnSpc>
+                <a:spcPct val="80000"/>
+              </a:lnSpc>
+              <a:spcBef>
+                <a:spcPct val="20000"/>
+              </a:spcBef>
+              <a:buFont typeface="Arial" panose="020B0604020202090204" pitchFamily="34" charset="0"/>
+            </a:pPr>
+            <a:r>
+              <a:rPr lang="en-US" altLang="en-US" sz="1800" dirty="0">
+                <a:solidFill>
+                  <a:srgbClr val="404040"/>
+                </a:solidFill>
+                <a:ea typeface="Calibri" panose="020F0502020204030204" pitchFamily="34" charset="0"/>
+                <a:sym typeface="Arial" panose="020B0604020202090204" pitchFamily="34" charset="0"/>
+              </a:rPr>
+              <a:t>In short: It's a DOMINO effect of poor schedule recovery.</a:t>
+            </a:r>
+            <a:endParaRPr lang="en-US" altLang="en-US" sz="1800" dirty="0">
+              <a:solidFill>
+                <a:srgbClr val="404040"/>
+              </a:solidFill>
+              <a:ea typeface="Calibri" panose="020F0502020204030204" pitchFamily="34" charset="0"/>
+              <a:sym typeface="Arial" panose="020B0604020202090204" pitchFamily="34" charset="0"/>
+            </a:endParaRPr>
+          </a:p>
+          <a:p>
+            <a:pPr marL="0" lvl="0" indent="457200" algn="l" defTabSz="1216025">
+              <a:lnSpc>
+                <a:spcPct val="80000"/>
+              </a:lnSpc>
+              <a:spcBef>
+                <a:spcPct val="20000"/>
+              </a:spcBef>
+              <a:buFont typeface="Arial" panose="020B0604020202090204" pitchFamily="34" charset="0"/>
+            </a:pPr>
+            <a:endParaRPr lang="en-US" altLang="en-US" sz="1800" dirty="0">
+              <a:solidFill>
+                <a:srgbClr val="404040"/>
+              </a:solidFill>
+              <a:ea typeface="Calibri" panose="020F0502020204030204" pitchFamily="34" charset="0"/>
+              <a:sym typeface="Arial" panose="020B0604020202090204" pitchFamily="34" charset="0"/>
+            </a:endParaRPr>
+          </a:p>
+          <a:p>
+            <a:pPr marL="0" lvl="0" indent="457200" algn="l" defTabSz="1216025">
+              <a:lnSpc>
+                <a:spcPct val="80000"/>
+              </a:lnSpc>
+              <a:spcBef>
+                <a:spcPct val="20000"/>
+              </a:spcBef>
+              <a:buFont typeface="Arial" panose="020B0604020202090204" pitchFamily="34" charset="0"/>
+            </a:pPr>
+            <a:r>
+              <a:rPr lang="en-US" altLang="en-US" sz="1800" dirty="0">
+                <a:solidFill>
+                  <a:srgbClr val="404040"/>
+                </a:solidFill>
+                <a:ea typeface="Calibri" panose="020F0502020204030204" pitchFamily="34" charset="0"/>
+                <a:sym typeface="Arial" panose="020B0604020202090204" pitchFamily="34" charset="0"/>
+              </a:rPr>
+              <a:t>Carrier Delays</a:t>
+            </a:r>
+            <a:endParaRPr lang="en-US" altLang="en-US" sz="1800" dirty="0">
+              <a:solidFill>
+                <a:srgbClr val="404040"/>
+              </a:solidFill>
+              <a:ea typeface="Calibri" panose="020F0502020204030204" pitchFamily="34" charset="0"/>
+              <a:sym typeface="Arial" panose="020B0604020202090204" pitchFamily="34" charset="0"/>
+            </a:endParaRPr>
+          </a:p>
+          <a:p>
+            <a:pPr marL="457200" lvl="1" indent="457200" algn="l" defTabSz="1216025">
+              <a:lnSpc>
+                <a:spcPct val="80000"/>
+              </a:lnSpc>
+              <a:spcBef>
+                <a:spcPct val="20000"/>
+              </a:spcBef>
+              <a:buFont typeface="Arial" panose="020B0604020202090204" pitchFamily="34" charset="0"/>
+            </a:pPr>
+            <a:r>
+              <a:rPr lang="en-US" altLang="en-US" sz="1800" dirty="0">
+                <a:solidFill>
+                  <a:srgbClr val="404040"/>
+                </a:solidFill>
+                <a:ea typeface="Calibri" panose="020F0502020204030204" pitchFamily="34" charset="0"/>
+                <a:sym typeface="Arial" panose="020B0604020202090204" pitchFamily="34" charset="0"/>
+              </a:rPr>
+              <a:t>These come from issues within the airline's control, such as:</a:t>
+            </a:r>
+            <a:endParaRPr lang="en-US" altLang="en-US" sz="1800" dirty="0">
+              <a:solidFill>
+                <a:srgbClr val="404040"/>
+              </a:solidFill>
+              <a:ea typeface="Calibri" panose="020F0502020204030204" pitchFamily="34" charset="0"/>
+              <a:sym typeface="Arial" panose="020B0604020202090204" pitchFamily="34" charset="0"/>
+            </a:endParaRPr>
+          </a:p>
+          <a:p>
+            <a:pPr marL="914400" lvl="2" indent="457200" algn="l" defTabSz="1216025">
+              <a:lnSpc>
+                <a:spcPct val="80000"/>
+              </a:lnSpc>
+              <a:spcBef>
+                <a:spcPct val="20000"/>
+              </a:spcBef>
+              <a:buFont typeface="Arial" panose="020B0604020202090204" pitchFamily="34" charset="0"/>
+            </a:pPr>
+            <a:r>
+              <a:rPr lang="en-US" altLang="en-US" sz="1800" dirty="0">
+                <a:solidFill>
+                  <a:srgbClr val="404040"/>
+                </a:solidFill>
+                <a:ea typeface="Calibri" panose="020F0502020204030204" pitchFamily="34" charset="0"/>
+                <a:sym typeface="Arial" panose="020B0604020202090204" pitchFamily="34" charset="0"/>
+              </a:rPr>
+              <a:t>- Crew or maintenance problems</a:t>
+            </a:r>
+            <a:endParaRPr lang="en-US" altLang="en-US" sz="1800" dirty="0">
+              <a:solidFill>
+                <a:srgbClr val="404040"/>
+              </a:solidFill>
+              <a:ea typeface="Calibri" panose="020F0502020204030204" pitchFamily="34" charset="0"/>
+              <a:sym typeface="Arial" panose="020B0604020202090204" pitchFamily="34" charset="0"/>
+            </a:endParaRPr>
+          </a:p>
+          <a:p>
+            <a:pPr marL="914400" lvl="2" indent="457200" algn="l" defTabSz="1216025">
+              <a:lnSpc>
+                <a:spcPct val="80000"/>
+              </a:lnSpc>
+              <a:spcBef>
+                <a:spcPct val="20000"/>
+              </a:spcBef>
+              <a:buFont typeface="Arial" panose="020B0604020202090204" pitchFamily="34" charset="0"/>
+            </a:pPr>
+            <a:r>
+              <a:rPr lang="en-US" altLang="en-US" sz="1800" dirty="0">
+                <a:solidFill>
+                  <a:srgbClr val="404040"/>
+                </a:solidFill>
+                <a:ea typeface="Calibri" panose="020F0502020204030204" pitchFamily="34" charset="0"/>
+                <a:sym typeface="Arial" panose="020B0604020202090204" pitchFamily="34" charset="0"/>
+              </a:rPr>
+              <a:t>- Baggage handling delays</a:t>
+            </a:r>
+            <a:endParaRPr lang="en-US" altLang="en-US" sz="1800" dirty="0">
+              <a:solidFill>
+                <a:srgbClr val="404040"/>
+              </a:solidFill>
+              <a:ea typeface="Calibri" panose="020F0502020204030204" pitchFamily="34" charset="0"/>
+              <a:sym typeface="Arial" panose="020B0604020202090204" pitchFamily="34" charset="0"/>
+            </a:endParaRPr>
+          </a:p>
+          <a:p>
+            <a:pPr marL="914400" lvl="2" indent="457200" algn="l" defTabSz="1216025">
+              <a:lnSpc>
+                <a:spcPct val="80000"/>
+              </a:lnSpc>
+              <a:spcBef>
+                <a:spcPct val="20000"/>
+              </a:spcBef>
+              <a:buFont typeface="Arial" panose="020B0604020202090204" pitchFamily="34" charset="0"/>
+            </a:pPr>
+            <a:r>
+              <a:rPr lang="en-US" altLang="en-US" sz="1800" dirty="0">
+                <a:solidFill>
+                  <a:srgbClr val="404040"/>
+                </a:solidFill>
+                <a:ea typeface="Calibri" panose="020F0502020204030204" pitchFamily="34" charset="0"/>
+                <a:sym typeface="Arial" panose="020B0604020202090204" pitchFamily="34" charset="0"/>
+              </a:rPr>
+              <a:t>- Waiting for connecting passengers</a:t>
+            </a:r>
+            <a:endParaRPr lang="en-US" altLang="en-US" sz="1800" dirty="0">
+              <a:solidFill>
+                <a:srgbClr val="404040"/>
+              </a:solidFill>
+              <a:ea typeface="Calibri" panose="020F0502020204030204" pitchFamily="34" charset="0"/>
+              <a:sym typeface="Arial" panose="020B0604020202090204" pitchFamily="34" charset="0"/>
+            </a:endParaRPr>
+          </a:p>
+          <a:p>
+            <a:pPr marL="914400" lvl="2" indent="457200" algn="l" defTabSz="1216025">
+              <a:lnSpc>
+                <a:spcPct val="80000"/>
+              </a:lnSpc>
+              <a:spcBef>
+                <a:spcPct val="20000"/>
+              </a:spcBef>
+              <a:buFont typeface="Arial" panose="020B0604020202090204" pitchFamily="34" charset="0"/>
+            </a:pPr>
+            <a:r>
+              <a:rPr lang="en-US" altLang="en-US" sz="1800" dirty="0">
+                <a:solidFill>
+                  <a:srgbClr val="404040"/>
+                </a:solidFill>
+                <a:ea typeface="Calibri" panose="020F0502020204030204" pitchFamily="34" charset="0"/>
+                <a:sym typeface="Arial" panose="020B0604020202090204" pitchFamily="34" charset="0"/>
+              </a:rPr>
+              <a:t>- Logistical mismanagement (like gate availability or boarding delays)</a:t>
+            </a:r>
+            <a:endParaRPr lang="en-US" altLang="en-US" sz="1800" dirty="0">
+              <a:solidFill>
+                <a:srgbClr val="404040"/>
+              </a:solidFill>
+              <a:ea typeface="Calibri" panose="020F0502020204030204" pitchFamily="34" charset="0"/>
+              <a:sym typeface="Arial" panose="020B0604020202090204" pitchFamily="34" charset="0"/>
+            </a:endParaRPr>
+          </a:p>
+          <a:p>
+            <a:pPr marL="0" lvl="0" indent="457200" algn="l" defTabSz="1216025">
+              <a:lnSpc>
+                <a:spcPct val="80000"/>
+              </a:lnSpc>
+              <a:spcBef>
+                <a:spcPct val="20000"/>
+              </a:spcBef>
+              <a:buFont typeface="Arial" panose="020B0604020202090204" pitchFamily="34" charset="0"/>
+            </a:pPr>
+            <a:r>
+              <a:rPr lang="en-US" altLang="en-US" sz="1800" dirty="0">
+                <a:solidFill>
+                  <a:srgbClr val="404040"/>
+                </a:solidFill>
+                <a:ea typeface="Calibri" panose="020F0502020204030204" pitchFamily="34" charset="0"/>
+                <a:sym typeface="Arial" panose="020B0604020202090204" pitchFamily="34" charset="0"/>
+              </a:rPr>
+              <a:t>In short: It's operational inefficiency or human/system errors within the airline.</a:t>
+            </a:r>
+            <a:endParaRPr lang="en-US" altLang="en-US" sz="1800" dirty="0">
+              <a:solidFill>
+                <a:srgbClr val="404040"/>
+              </a:solidFill>
+              <a:ea typeface="Calibri" panose="020F0502020204030204" pitchFamily="34" charset="0"/>
+              <a:sym typeface="Arial" panose="020B0604020202090204" pitchFamily="34" charset="0"/>
+            </a:endParaRPr>
+          </a:p>
+        </p:txBody>
+      </p:sp>
+      <p:sp>
+        <p:nvSpPr>
+          <p:cNvPr id="10250" name="文本框 28"/>
+          <p:cNvSpPr txBox="1"/>
+          <p:nvPr/>
+        </p:nvSpPr>
+        <p:spPr>
+          <a:xfrm>
+            <a:off x="96520" y="90805"/>
+            <a:ext cx="11864340" cy="706755"/>
+          </a:xfrm>
+          <a:prstGeom prst="rect">
+            <a:avLst/>
+          </a:prstGeom>
+          <a:noFill/>
+          <a:ln w="9525">
+            <a:noFill/>
+          </a:ln>
+        </p:spPr>
+        <p:txBody>
+          <a:bodyPr wrap="square" anchor="t">
+            <a:spAutoFit/>
+          </a:bodyPr>
+          <a:p>
+            <a:pPr>
+              <a:buFont typeface="Arial" panose="020B0604020202090204" pitchFamily="34" charset="0"/>
+            </a:pPr>
+            <a:r>
+              <a:rPr lang="en-US" altLang="en-US" sz="4000" b="1" dirty="0">
+                <a:solidFill>
+                  <a:srgbClr val="404040"/>
+                </a:solidFill>
+                <a:ea typeface="Calibri" panose="020F0502020204030204" pitchFamily="34" charset="0"/>
+              </a:rPr>
+              <a:t>Conclusion regarding all the data above</a:t>
+            </a:r>
+            <a:endParaRPr lang="en-US" altLang="en-US" sz="4000" b="1" dirty="0">
+              <a:solidFill>
+                <a:srgbClr val="404040"/>
+              </a:solidFill>
+              <a:ea typeface="Calibri" panose="020F0502020204030204" pitchFamily="34" charset="0"/>
+            </a:endParaRPr>
+          </a:p>
+        </p:txBody>
+      </p:sp>
+      <p:sp>
+        <p:nvSpPr>
+          <p:cNvPr id="2" name="Text Box 1"/>
+          <p:cNvSpPr txBox="1"/>
+          <p:nvPr/>
+        </p:nvSpPr>
+        <p:spPr>
+          <a:xfrm>
+            <a:off x="7788275" y="3736340"/>
+            <a:ext cx="4172585" cy="1478915"/>
+          </a:xfrm>
+          <a:prstGeom prst="rect">
+            <a:avLst/>
+          </a:prstGeom>
+          <a:noFill/>
+        </p:spPr>
+        <p:txBody>
+          <a:bodyPr wrap="square" rtlCol="0" anchor="t">
+            <a:noAutofit/>
+          </a:bodyPr>
+          <a:p>
+            <a:pPr marL="0" lvl="0" indent="457200" algn="l" defTabSz="1216025">
+              <a:lnSpc>
+                <a:spcPct val="80000"/>
+              </a:lnSpc>
+              <a:spcBef>
+                <a:spcPct val="20000"/>
+              </a:spcBef>
+              <a:buFont typeface="Arial" panose="020B0604020202090204" pitchFamily="34" charset="0"/>
+            </a:pPr>
+            <a:r>
+              <a:rPr lang="en-US" altLang="en-US" sz="1800" dirty="0">
+                <a:solidFill>
+                  <a:srgbClr val="404040"/>
+                </a:solidFill>
+                <a:ea typeface="Calibri" panose="020F0502020204030204" pitchFamily="34" charset="0"/>
+                <a:sym typeface="Arial" panose="020B0604020202090204" pitchFamily="34" charset="0"/>
+              </a:rPr>
+              <a:t>LateAircraftDelay     35370.0  </a:t>
+            </a:r>
+            <a:endParaRPr lang="en-US" altLang="en-US" sz="1800" dirty="0">
+              <a:solidFill>
+                <a:srgbClr val="404040"/>
+              </a:solidFill>
+              <a:ea typeface="Calibri" panose="020F0502020204030204" pitchFamily="34" charset="0"/>
+              <a:sym typeface="Arial" panose="020B0604020202090204" pitchFamily="34" charset="0"/>
+            </a:endParaRPr>
+          </a:p>
+          <a:p>
+            <a:pPr marL="0" lvl="0" indent="457200" algn="l" defTabSz="1216025">
+              <a:lnSpc>
+                <a:spcPct val="80000"/>
+              </a:lnSpc>
+              <a:spcBef>
+                <a:spcPct val="20000"/>
+              </a:spcBef>
+              <a:buFont typeface="Arial" panose="020B0604020202090204" pitchFamily="34" charset="0"/>
+            </a:pPr>
+            <a:r>
+              <a:rPr lang="en-US" altLang="en-US" sz="1800" dirty="0">
+                <a:solidFill>
+                  <a:srgbClr val="404040"/>
+                </a:solidFill>
+                <a:ea typeface="Calibri" panose="020F0502020204030204" pitchFamily="34" charset="0"/>
+                <a:sym typeface="Arial" panose="020B0604020202090204" pitchFamily="34" charset="0"/>
+              </a:rPr>
+              <a:t>CarrierDelay             15905.0  </a:t>
+            </a:r>
+            <a:endParaRPr lang="en-US" altLang="en-US" sz="1800" dirty="0">
+              <a:solidFill>
+                <a:srgbClr val="404040"/>
+              </a:solidFill>
+              <a:ea typeface="Calibri" panose="020F0502020204030204" pitchFamily="34" charset="0"/>
+              <a:sym typeface="Arial" panose="020B0604020202090204" pitchFamily="34" charset="0"/>
+            </a:endParaRPr>
+          </a:p>
+          <a:p>
+            <a:pPr marL="0" lvl="0" indent="457200" algn="l" defTabSz="1216025">
+              <a:lnSpc>
+                <a:spcPct val="80000"/>
+              </a:lnSpc>
+              <a:spcBef>
+                <a:spcPct val="20000"/>
+              </a:spcBef>
+              <a:buFont typeface="Arial" panose="020B0604020202090204" pitchFamily="34" charset="0"/>
+            </a:pPr>
+            <a:r>
+              <a:rPr lang="en-US" altLang="en-US" sz="1800" dirty="0">
+                <a:solidFill>
+                  <a:srgbClr val="404040"/>
+                </a:solidFill>
+                <a:ea typeface="Calibri" panose="020F0502020204030204" pitchFamily="34" charset="0"/>
+                <a:sym typeface="Arial" panose="020B0604020202090204" pitchFamily="34" charset="0"/>
+              </a:rPr>
+              <a:t>NASDelay                 4486.0  </a:t>
+            </a:r>
+            <a:endParaRPr lang="en-US" altLang="en-US" sz="1800" dirty="0">
+              <a:solidFill>
+                <a:srgbClr val="404040"/>
+              </a:solidFill>
+              <a:ea typeface="Calibri" panose="020F0502020204030204" pitchFamily="34" charset="0"/>
+              <a:sym typeface="Arial" panose="020B0604020202090204" pitchFamily="34" charset="0"/>
+            </a:endParaRPr>
+          </a:p>
+          <a:p>
+            <a:pPr marL="0" lvl="0" indent="457200" algn="l" defTabSz="1216025">
+              <a:lnSpc>
+                <a:spcPct val="80000"/>
+              </a:lnSpc>
+              <a:spcBef>
+                <a:spcPct val="20000"/>
+              </a:spcBef>
+              <a:buFont typeface="Arial" panose="020B0604020202090204" pitchFamily="34" charset="0"/>
+            </a:pPr>
+            <a:r>
+              <a:rPr lang="en-US" altLang="en-US" sz="1800" dirty="0">
+                <a:solidFill>
+                  <a:srgbClr val="404040"/>
+                </a:solidFill>
+                <a:ea typeface="Calibri" panose="020F0502020204030204" pitchFamily="34" charset="0"/>
+                <a:sym typeface="Arial" panose="020B0604020202090204" pitchFamily="34" charset="0"/>
+              </a:rPr>
+              <a:t>WeatherDelay           515.0  </a:t>
+            </a:r>
+            <a:endParaRPr lang="en-US" altLang="en-US" sz="1800" dirty="0">
+              <a:solidFill>
+                <a:srgbClr val="404040"/>
+              </a:solidFill>
+              <a:ea typeface="Calibri" panose="020F0502020204030204" pitchFamily="34" charset="0"/>
+              <a:sym typeface="Arial" panose="020B0604020202090204" pitchFamily="34" charset="0"/>
+            </a:endParaRPr>
+          </a:p>
+          <a:p>
+            <a:pPr marL="0" lvl="0" indent="457200" algn="l" defTabSz="1216025">
+              <a:lnSpc>
+                <a:spcPct val="80000"/>
+              </a:lnSpc>
+              <a:spcBef>
+                <a:spcPct val="20000"/>
+              </a:spcBef>
+              <a:buFont typeface="Arial" panose="020B0604020202090204" pitchFamily="34" charset="0"/>
+            </a:pPr>
+            <a:r>
+              <a:rPr lang="en-US" altLang="en-US" sz="1800" dirty="0">
+                <a:solidFill>
+                  <a:srgbClr val="404040"/>
+                </a:solidFill>
+                <a:ea typeface="Calibri" panose="020F0502020204030204" pitchFamily="34" charset="0"/>
+                <a:sym typeface="Arial" panose="020B0604020202090204" pitchFamily="34" charset="0"/>
+              </a:rPr>
+              <a:t>SecurityDelay           121.0</a:t>
+            </a:r>
+            <a:endParaRPr lang="en-US" altLang="en-US" sz="1800" dirty="0">
+              <a:solidFill>
+                <a:srgbClr val="404040"/>
+              </a:solidFill>
+              <a:ea typeface="Calibri" panose="020F0502020204030204" pitchFamily="34" charset="0"/>
+              <a:sym typeface="Arial" panose="020B0604020202090204" pitchFamily="34" charset="0"/>
+            </a:endParaRPr>
+          </a:p>
+        </p:txBody>
+      </p:sp>
+    </p:spTree>
+  </p:cSld>
+  <p:clrMapOvr>
+    <a:masterClrMapping/>
+  </p:clrMapOvr>
+  <p:transition spd="slow">
+    <p:wipe/>
+  </p:transition>
+</p:sld>
+</file>
+
+<file path=ppt/slides/slide21.xml><?xml version="1.0" encoding="utf-8"?>
+<p:sld xmlns:a="http://schemas.openxmlformats.org/drawingml/2006/main" xmlns:r="http://schemas.openxmlformats.org/officeDocument/2006/relationships" xmlns:p="http://schemas.openxmlformats.org/presentationml/2006/main">
+  <p:cSld>
+    <p:spTree>
+      <p:nvGrpSpPr>
+        <p:cNvPr id="1" name=""/>
+        <p:cNvGrpSpPr/>
+        <p:nvPr/>
+      </p:nvGrpSpPr>
+      <p:grpSpPr/>
+      <p:pic>
+        <p:nvPicPr>
           <p:cNvPr id="29697" name="图片 3"/>
           <p:cNvPicPr>
             <a:picLocks noChangeAspect="1"/>
@@ -2970,388 +6073,6 @@
           </p:txBody>
         </p:sp>
       </p:grpSp>
-    </p:spTree>
-  </p:cSld>
-  <p:clrMapOvr>
-    <a:masterClrMapping/>
-  </p:clrMapOvr>
-  <p:transition spd="slow">
-    <p:wipe/>
-  </p:transition>
-</p:sld>
-</file>
-
-<file path=ppt/slides/slide2.xml><?xml version="1.0" encoding="utf-8"?>
-<p:sld xmlns:a="http://schemas.openxmlformats.org/drawingml/2006/main" xmlns:r="http://schemas.openxmlformats.org/officeDocument/2006/relationships" xmlns:p="http://schemas.openxmlformats.org/presentationml/2006/main">
-  <p:cSld>
-    <p:spTree>
-      <p:nvGrpSpPr>
-        <p:cNvPr id="1" name=""/>
-        <p:cNvGrpSpPr/>
-        <p:nvPr/>
-      </p:nvGrpSpPr>
-      <p:grpSpPr/>
-      <p:pic>
-        <p:nvPicPr>
-          <p:cNvPr id="10241" name="图片 3"/>
-          <p:cNvPicPr>
-            <a:picLocks noChangeAspect="1"/>
-          </p:cNvPicPr>
-          <p:nvPr/>
-        </p:nvPicPr>
-        <p:blipFill>
-          <a:blip r:embed="rId1"/>
-          <a:srcRect l="5727" r="16841" b="26530"/>
-          <a:stretch>
-            <a:fillRect/>
-          </a:stretch>
-        </p:blipFill>
-        <p:spPr>
-          <a:xfrm>
-            <a:off x="0" y="0"/>
-            <a:ext cx="12192000" cy="6858000"/>
-          </a:xfrm>
-          <a:prstGeom prst="rect">
-            <a:avLst/>
-          </a:prstGeom>
-          <a:noFill/>
-          <a:ln w="9525">
-            <a:noFill/>
-          </a:ln>
-        </p:spPr>
-      </p:pic>
-      <p:sp>
-        <p:nvSpPr>
-          <p:cNvPr id="10250" name="文本框 28"/>
-          <p:cNvSpPr txBox="1"/>
-          <p:nvPr/>
-        </p:nvSpPr>
-        <p:spPr>
-          <a:xfrm>
-            <a:off x="3966845" y="714375"/>
-            <a:ext cx="3651250" cy="1014730"/>
-          </a:xfrm>
-          <a:prstGeom prst="rect">
-            <a:avLst/>
-          </a:prstGeom>
-          <a:noFill/>
-          <a:ln w="9525">
-            <a:noFill/>
-          </a:ln>
-        </p:spPr>
-        <p:txBody>
-          <a:bodyPr wrap="square" anchor="t">
-            <a:spAutoFit/>
-          </a:bodyPr>
-          <a:p>
-            <a:pPr algn="ctr">
-              <a:buFont typeface="Arial" panose="020B0604020202090204" pitchFamily="34" charset="0"/>
-            </a:pPr>
-            <a:r>
-              <a:rPr lang="en-US" altLang="en-US" sz="6000" b="1" dirty="0">
-                <a:solidFill>
-                  <a:srgbClr val="404040"/>
-                </a:solidFill>
-                <a:ea typeface="Calibri" panose="020F0502020204030204" pitchFamily="34" charset="0"/>
-              </a:rPr>
-              <a:t>Objective</a:t>
-            </a:r>
-            <a:endParaRPr lang="en-US" altLang="en-US" sz="6000" b="1" dirty="0">
-              <a:solidFill>
-                <a:srgbClr val="404040"/>
-              </a:solidFill>
-              <a:ea typeface="Calibri" panose="020F0502020204030204" pitchFamily="34" charset="0"/>
-            </a:endParaRPr>
-          </a:p>
-        </p:txBody>
-      </p:sp>
-      <p:sp>
-        <p:nvSpPr>
-          <p:cNvPr id="12" name="矩形 11"/>
-          <p:cNvSpPr/>
-          <p:nvPr/>
-        </p:nvSpPr>
-        <p:spPr>
-          <a:xfrm>
-            <a:off x="828675" y="1729105"/>
-            <a:ext cx="10515600" cy="4653280"/>
-          </a:xfrm>
-          <a:prstGeom prst="rect">
-            <a:avLst/>
-          </a:prstGeom>
-          <a:noFill/>
-          <a:ln>
-            <a:solidFill>
-              <a:schemeClr val="tx1"/>
-            </a:solidFill>
-          </a:ln>
-        </p:spPr>
-        <p:style>
-          <a:lnRef idx="2">
-            <a:schemeClr val="accent1">
-              <a:shade val="50000"/>
-            </a:schemeClr>
-          </a:lnRef>
-          <a:fillRef idx="1">
-            <a:schemeClr val="accent1"/>
-          </a:fillRef>
-          <a:effectRef idx="0">
-            <a:schemeClr val="accent1"/>
-          </a:effectRef>
-          <a:fontRef idx="minor">
-            <a:schemeClr val="lt1"/>
-          </a:fontRef>
-        </p:style>
-        <p:txBody>
-          <a:bodyPr anchor="ctr"/>
-          <a:lstStyle/>
-          <a:p>
-            <a:pPr marL="0" marR="0" lvl="0" indent="0" algn="ctr" defTabSz="914400" rtl="0" eaLnBrk="1" fontAlgn="auto" latinLnBrk="0" hangingPunct="1">
-              <a:lnSpc>
-                <a:spcPct val="100000"/>
-              </a:lnSpc>
-              <a:spcBef>
-                <a:spcPts val="0"/>
-              </a:spcBef>
-              <a:spcAft>
-                <a:spcPts val="0"/>
-              </a:spcAft>
-              <a:buClrTx/>
-              <a:buSzTx/>
-              <a:buFontTx/>
-              <a:buNone/>
-              <a:defRPr/>
-            </a:pPr>
-            <a:endParaRPr kumimoji="0" lang="zh-CN" altLang="en-US" sz="1800" b="0" i="0" u="none" strike="noStrike" kern="1200" cap="none" spc="0" normalizeH="0" baseline="0" noProof="0">
-              <a:ln>
-                <a:noFill/>
-              </a:ln>
-              <a:solidFill>
-                <a:schemeClr val="lt1"/>
-              </a:solidFill>
-              <a:effectLst/>
-              <a:uLnTx/>
-              <a:uFillTx/>
-              <a:latin typeface="+mn-lt"/>
-              <a:ea typeface="+mn-ea"/>
-              <a:cs typeface="+mn-cs"/>
-            </a:endParaRPr>
-          </a:p>
-        </p:txBody>
-      </p:sp>
-      <p:sp>
-        <p:nvSpPr>
-          <p:cNvPr id="10253" name="文本框 6"/>
-          <p:cNvSpPr txBox="1"/>
-          <p:nvPr/>
-        </p:nvSpPr>
-        <p:spPr>
-          <a:xfrm>
-            <a:off x="956945" y="3169920"/>
-            <a:ext cx="9671685" cy="929640"/>
-          </a:xfrm>
-          <a:prstGeom prst="rect">
-            <a:avLst/>
-          </a:prstGeom>
-          <a:noFill/>
-          <a:ln w="9525">
-            <a:noFill/>
-          </a:ln>
-        </p:spPr>
-        <p:txBody>
-          <a:bodyPr wrap="square" anchor="t">
-            <a:noAutofit/>
-          </a:bodyPr>
-          <a:p>
-            <a:pPr>
-              <a:buFont typeface="Arial" panose="020B0604020202090204" pitchFamily="34" charset="0"/>
-            </a:pPr>
-            <a:endParaRPr lang="en-US" altLang="en-US" sz="3200" b="1" dirty="0">
-              <a:solidFill>
-                <a:srgbClr val="404040"/>
-              </a:solidFill>
-              <a:ea typeface="Calibri" panose="020F0502020204030204" pitchFamily="34" charset="0"/>
-            </a:endParaRPr>
-          </a:p>
-        </p:txBody>
-      </p:sp>
-      <p:sp>
-        <p:nvSpPr>
-          <p:cNvPr id="10255" name="矩形 8"/>
-          <p:cNvSpPr/>
-          <p:nvPr/>
-        </p:nvSpPr>
-        <p:spPr>
-          <a:xfrm>
-            <a:off x="1082675" y="1889125"/>
-            <a:ext cx="10102215" cy="4272915"/>
-          </a:xfrm>
-          <a:prstGeom prst="rect">
-            <a:avLst/>
-          </a:prstGeom>
-          <a:noFill/>
-          <a:ln w="9525">
-            <a:noFill/>
-          </a:ln>
-        </p:spPr>
-        <p:txBody>
-          <a:bodyPr wrap="square" lIns="0" tIns="0" rIns="0" bIns="0" anchor="t">
-            <a:noAutofit/>
-          </a:bodyPr>
-          <a:p>
-            <a:pPr marL="457200" lvl="1" indent="457200" algn="l" defTabSz="1216025">
-              <a:lnSpc>
-                <a:spcPct val="130000"/>
-              </a:lnSpc>
-              <a:spcBef>
-                <a:spcPct val="20000"/>
-              </a:spcBef>
-              <a:buFont typeface="Arial" panose="020B0604020202090204" pitchFamily="34" charset="0"/>
-            </a:pPr>
-            <a:r>
-              <a:rPr lang="en-US" altLang="en-US" sz="3200" b="1" dirty="0">
-                <a:solidFill>
-                  <a:srgbClr val="404040"/>
-                </a:solidFill>
-                <a:ea typeface="Calibri" panose="020F0502020204030204" pitchFamily="34" charset="0"/>
-                <a:sym typeface="Arial" panose="020B0604020202090204" pitchFamily="34" charset="0"/>
-              </a:rPr>
-              <a:t>Part 1</a:t>
-            </a:r>
-            <a:r>
-              <a:rPr lang="en-US" altLang="en-US" sz="3200" dirty="0">
-                <a:solidFill>
-                  <a:srgbClr val="404040"/>
-                </a:solidFill>
-                <a:ea typeface="Calibri" panose="020F0502020204030204" pitchFamily="34" charset="0"/>
-                <a:sym typeface="Arial" panose="020B0604020202090204" pitchFamily="34" charset="0"/>
-              </a:rPr>
-              <a:t>: Clean and process the flight dataset</a:t>
-            </a:r>
-            <a:endParaRPr lang="en-US" altLang="en-US" sz="3200" dirty="0">
-              <a:solidFill>
-                <a:srgbClr val="404040"/>
-              </a:solidFill>
-              <a:ea typeface="Calibri" panose="020F0502020204030204" pitchFamily="34" charset="0"/>
-              <a:sym typeface="Arial" panose="020B0604020202090204" pitchFamily="34" charset="0"/>
-            </a:endParaRPr>
-          </a:p>
-          <a:p>
-            <a:pPr marL="457200" lvl="1" indent="457200" algn="l" defTabSz="1216025">
-              <a:lnSpc>
-                <a:spcPct val="130000"/>
-              </a:lnSpc>
-              <a:spcBef>
-                <a:spcPct val="20000"/>
-              </a:spcBef>
-              <a:buFont typeface="Arial" panose="020B0604020202090204" pitchFamily="34" charset="0"/>
-            </a:pPr>
-            <a:r>
-              <a:rPr lang="en-US" altLang="en-US" sz="3200" b="1" dirty="0">
-                <a:solidFill>
-                  <a:srgbClr val="404040"/>
-                </a:solidFill>
-                <a:ea typeface="Calibri" panose="020F0502020204030204" pitchFamily="34" charset="0"/>
-                <a:sym typeface="Arial" panose="020B0604020202090204" pitchFamily="34" charset="0"/>
-              </a:rPr>
-              <a:t>Part 2</a:t>
-            </a:r>
-            <a:r>
-              <a:rPr lang="en-US" altLang="en-US" sz="3200" dirty="0">
-                <a:solidFill>
-                  <a:srgbClr val="404040"/>
-                </a:solidFill>
-                <a:ea typeface="Calibri" panose="020F0502020204030204" pitchFamily="34" charset="0"/>
-                <a:sym typeface="Arial" panose="020B0604020202090204" pitchFamily="34" charset="0"/>
-              </a:rPr>
-              <a:t>: Identify the major causes of flight delays</a:t>
-            </a:r>
-            <a:endParaRPr lang="en-US" altLang="en-US" sz="3200" dirty="0">
-              <a:solidFill>
-                <a:srgbClr val="404040"/>
-              </a:solidFill>
-              <a:ea typeface="Calibri" panose="020F0502020204030204" pitchFamily="34" charset="0"/>
-              <a:sym typeface="Arial" panose="020B0604020202090204" pitchFamily="34" charset="0"/>
-            </a:endParaRPr>
-          </a:p>
-          <a:p>
-            <a:pPr marL="457200" lvl="1" indent="457200" algn="l" defTabSz="1216025">
-              <a:lnSpc>
-                <a:spcPct val="130000"/>
-              </a:lnSpc>
-              <a:spcBef>
-                <a:spcPct val="20000"/>
-              </a:spcBef>
-              <a:buFont typeface="Arial" panose="020B0604020202090204" pitchFamily="34" charset="0"/>
-            </a:pPr>
-            <a:r>
-              <a:rPr lang="en-US" altLang="en-US" sz="3200" b="1" dirty="0">
-                <a:solidFill>
-                  <a:srgbClr val="404040"/>
-                </a:solidFill>
-                <a:ea typeface="Calibri" panose="020F0502020204030204" pitchFamily="34" charset="0"/>
-                <a:sym typeface="Arial" panose="020B0604020202090204" pitchFamily="34" charset="0"/>
-              </a:rPr>
-              <a:t>Part 3</a:t>
-            </a:r>
-            <a:r>
-              <a:rPr lang="en-US" altLang="en-US" sz="3200" dirty="0">
-                <a:solidFill>
-                  <a:srgbClr val="404040"/>
-                </a:solidFill>
-                <a:ea typeface="Calibri" panose="020F0502020204030204" pitchFamily="34" charset="0"/>
-                <a:sym typeface="Arial" panose="020B0604020202090204" pitchFamily="34" charset="0"/>
-              </a:rPr>
-              <a:t>: Explore how factors like distance or weather influence delays</a:t>
-            </a:r>
-            <a:endParaRPr lang="en-US" altLang="en-US" sz="3200" dirty="0">
-              <a:solidFill>
-                <a:srgbClr val="404040"/>
-              </a:solidFill>
-              <a:ea typeface="Calibri" panose="020F0502020204030204" pitchFamily="34" charset="0"/>
-              <a:sym typeface="Arial" panose="020B0604020202090204" pitchFamily="34" charset="0"/>
-            </a:endParaRPr>
-          </a:p>
-          <a:p>
-            <a:pPr marL="457200" lvl="1" indent="457200" algn="l" defTabSz="1216025">
-              <a:lnSpc>
-                <a:spcPct val="130000"/>
-              </a:lnSpc>
-              <a:spcBef>
-                <a:spcPct val="20000"/>
-              </a:spcBef>
-              <a:buFont typeface="Arial" panose="020B0604020202090204" pitchFamily="34" charset="0"/>
-            </a:pPr>
-            <a:r>
-              <a:rPr lang="en-US" altLang="en-US" sz="3200" b="1" dirty="0">
-                <a:solidFill>
-                  <a:srgbClr val="404040"/>
-                </a:solidFill>
-                <a:ea typeface="Calibri" panose="020F0502020204030204" pitchFamily="34" charset="0"/>
-                <a:sym typeface="Arial" panose="020B0604020202090204" pitchFamily="34" charset="0"/>
-              </a:rPr>
-              <a:t>Part 4</a:t>
-            </a:r>
-            <a:r>
-              <a:rPr lang="en-US" altLang="en-US" sz="3200" dirty="0">
-                <a:solidFill>
-                  <a:srgbClr val="404040"/>
-                </a:solidFill>
-                <a:ea typeface="Calibri" panose="020F0502020204030204" pitchFamily="34" charset="0"/>
-                <a:sym typeface="Arial" panose="020B0604020202090204" pitchFamily="34" charset="0"/>
-              </a:rPr>
-              <a:t>: Visualize the delay patterns clearly</a:t>
-            </a:r>
-            <a:endParaRPr lang="en-US" altLang="en-US" sz="3200" dirty="0">
-              <a:solidFill>
-                <a:srgbClr val="404040"/>
-              </a:solidFill>
-              <a:ea typeface="Calibri" panose="020F0502020204030204" pitchFamily="34" charset="0"/>
-              <a:sym typeface="Arial" panose="020B0604020202090204" pitchFamily="34" charset="0"/>
-            </a:endParaRPr>
-          </a:p>
-        </p:txBody>
-      </p:sp>
     </p:spTree>
   </p:cSld>
   <p:clrMapOvr>

--- a/Final_Project.pptx
+++ b/Final_Project.pptx
@@ -4684,7 +4684,7 @@
               <a:buFont typeface="Arial" panose="020B0604020202090204" pitchFamily="34" charset="0"/>
             </a:pPr>
             <a:r>
-              <a:rPr lang="en-US" altLang="en-US" sz="3200" b="1" dirty="0">
+              <a:rPr lang="en-US" altLang="en-US" sz="3600" b="1" dirty="0">
                 <a:solidFill>
                   <a:srgbClr val="404040"/>
                 </a:solidFill>
@@ -4694,7 +4694,7 @@
               <a:t>Part 1</a:t>
             </a:r>
             <a:r>
-              <a:rPr lang="en-US" altLang="en-US" sz="3200" dirty="0">
+              <a:rPr lang="en-US" altLang="en-US" sz="3600" dirty="0">
                 <a:solidFill>
                   <a:srgbClr val="404040"/>
                 </a:solidFill>
@@ -4703,7 +4703,7 @@
               </a:rPr>
               <a:t>: Clean and process the flight dataset</a:t>
             </a:r>
-            <a:endParaRPr lang="en-US" altLang="en-US" sz="3200" dirty="0">
+            <a:endParaRPr lang="en-US" altLang="en-US" sz="3600" dirty="0">
               <a:solidFill>
                 <a:srgbClr val="404040"/>
               </a:solidFill>
@@ -4722,7 +4722,7 @@
               <a:buFont typeface="Arial" panose="020B0604020202090204" pitchFamily="34" charset="0"/>
             </a:pPr>
             <a:r>
-              <a:rPr lang="en-US" altLang="en-US" sz="3200" b="1" dirty="0">
+              <a:rPr lang="en-US" altLang="en-US" sz="3600" b="1" dirty="0">
                 <a:solidFill>
                   <a:srgbClr val="404040"/>
                 </a:solidFill>
@@ -4732,7 +4732,7 @@
               <a:t>Part 2</a:t>
             </a:r>
             <a:r>
-              <a:rPr lang="en-US" altLang="en-US" sz="3200" dirty="0">
+              <a:rPr lang="en-US" altLang="en-US" sz="3600" dirty="0">
                 <a:solidFill>
                   <a:srgbClr val="404040"/>
                 </a:solidFill>
@@ -4741,7 +4741,7 @@
               </a:rPr>
               <a:t>: Identify the major causes of flight delays</a:t>
             </a:r>
-            <a:endParaRPr lang="en-US" altLang="en-US" sz="3200" dirty="0">
+            <a:endParaRPr lang="en-US" altLang="en-US" sz="3600" dirty="0">
               <a:solidFill>
                 <a:srgbClr val="404040"/>
               </a:solidFill>
@@ -4760,7 +4760,7 @@
               <a:buFont typeface="Arial" panose="020B0604020202090204" pitchFamily="34" charset="0"/>
             </a:pPr>
             <a:r>
-              <a:rPr lang="en-US" altLang="en-US" sz="3200" b="1" dirty="0">
+              <a:rPr lang="en-US" altLang="en-US" sz="3600" b="1" dirty="0">
                 <a:solidFill>
                   <a:srgbClr val="404040"/>
                 </a:solidFill>
@@ -4770,7 +4770,7 @@
               <a:t>Part 3</a:t>
             </a:r>
             <a:r>
-              <a:rPr lang="en-US" altLang="en-US" sz="3200" dirty="0">
+              <a:rPr lang="en-US" altLang="en-US" sz="3600" dirty="0">
                 <a:solidFill>
                   <a:srgbClr val="404040"/>
                 </a:solidFill>
@@ -4779,45 +4779,7 @@
               </a:rPr>
               <a:t>: Explore how factors like distance or weather influence delays</a:t>
             </a:r>
-            <a:endParaRPr lang="en-US" altLang="en-US" sz="3200" dirty="0">
-              <a:solidFill>
-                <a:srgbClr val="404040"/>
-              </a:solidFill>
-              <a:ea typeface="Calibri" panose="020F0502020204030204" pitchFamily="34" charset="0"/>
-              <a:sym typeface="Arial" panose="020B0604020202090204" pitchFamily="34" charset="0"/>
-            </a:endParaRPr>
-          </a:p>
-          <a:p>
-            <a:pPr marL="457200" lvl="1" indent="457200" algn="l" defTabSz="1216025">
-              <a:lnSpc>
-                <a:spcPct val="130000"/>
-              </a:lnSpc>
-              <a:spcBef>
-                <a:spcPct val="20000"/>
-              </a:spcBef>
-              <a:buFont typeface="Arial" panose="020B0604020202090204" pitchFamily="34" charset="0"/>
-            </a:pPr>
-            <a:r>
-              <a:rPr lang="en-US" altLang="en-US" sz="3200" b="1" dirty="0">
-                <a:solidFill>
-                  <a:srgbClr val="404040"/>
-                </a:solidFill>
-                <a:ea typeface="Calibri" panose="020F0502020204030204" pitchFamily="34" charset="0"/>
-                <a:sym typeface="Arial" panose="020B0604020202090204" pitchFamily="34" charset="0"/>
-              </a:rPr>
-              <a:t>Part 4</a:t>
-            </a:r>
-            <a:r>
-              <a:rPr lang="en-US" altLang="en-US" sz="3200" dirty="0">
-                <a:solidFill>
-                  <a:srgbClr val="404040"/>
-                </a:solidFill>
-                <a:ea typeface="Calibri" panose="020F0502020204030204" pitchFamily="34" charset="0"/>
-                <a:sym typeface="Arial" panose="020B0604020202090204" pitchFamily="34" charset="0"/>
-              </a:rPr>
-              <a:t>: Visualize the delay patterns clearly</a:t>
-            </a:r>
-            <a:endParaRPr lang="en-US" altLang="en-US" sz="3200" dirty="0">
+            <a:endParaRPr lang="en-US" altLang="en-US" sz="3600" dirty="0">
               <a:solidFill>
                 <a:srgbClr val="404040"/>
               </a:solidFill>
